--- a/itb-stei/libreoffice/contoh-itb.pptx
+++ b/itb-stei/libreoffice/contoh-itb.pptx
@@ -5,18 +5,19 @@
     <p:sldMasterId id="2147483648" r:id="rId2"/>
     <p:sldMasterId id="2147483651" r:id="rId3"/>
     <p:sldMasterId id="2147483654" r:id="rId4"/>
+    <p:sldMasterId id="2147483656" r:id="rId5"/>
   </p:sldMasterIdLst>
   <p:sldIdLst>
-    <p:sldId id="256" r:id="rId5"/>
-    <p:sldId id="257" r:id="rId6"/>
-    <p:sldId id="258" r:id="rId7"/>
-    <p:sldId id="259" r:id="rId8"/>
-    <p:sldId id="260" r:id="rId9"/>
-    <p:sldId id="261" r:id="rId10"/>
-    <p:sldId id="262" r:id="rId11"/>
-    <p:sldId id="263" r:id="rId12"/>
-    <p:sldId id="264" r:id="rId13"/>
-    <p:sldId id="265" r:id="rId14"/>
+    <p:sldId id="256" r:id="rId6"/>
+    <p:sldId id="257" r:id="rId7"/>
+    <p:sldId id="258" r:id="rId8"/>
+    <p:sldId id="259" r:id="rId9"/>
+    <p:sldId id="260" r:id="rId10"/>
+    <p:sldId id="261" r:id="rId11"/>
+    <p:sldId id="262" r:id="rId12"/>
+    <p:sldId id="263" r:id="rId13"/>
+    <p:sldId id="264" r:id="rId14"/>
+    <p:sldId id="265" r:id="rId15"/>
   </p:sldIdLst>
   <p:sldSz cx="9144000" cy="5143500"/>
   <p:notesSz cx="7559675" cy="10691813"/>
@@ -52,8 +53,8 @@
         </p:nvSpPr>
         <p:spPr>
           <a:xfrm>
-            <a:off x="198000" y="0"/>
-            <a:ext cx="8064000" cy="558000"/>
+            <a:off x="0" y="1980000"/>
+            <a:ext cx="9144000" cy="1080000"/>
           </a:xfrm>
           <a:prstGeom prst="rect">
             <a:avLst/>
@@ -68,10 +69,10 @@
             <a:noAutofit/>
           </a:bodyPr>
           <a:p>
-            <a:pPr indent="0">
+            <a:pPr indent="0" algn="ctr">
               <a:buNone/>
             </a:pPr>
-            <a:endParaRPr b="1" lang="en-US" sz="1900" spc="-1" strike="noStrike">
+            <a:endParaRPr b="1" lang="en-US" sz="2280" spc="-1" strike="noStrike">
               <a:solidFill>
                 <a:srgbClr val="ffffff"/>
               </a:solidFill>
@@ -114,8 +115,8 @@
         </p:nvSpPr>
         <p:spPr>
           <a:xfrm>
-            <a:off x="198000" y="0"/>
-            <a:ext cx="8064000" cy="558000"/>
+            <a:off x="0" y="1980000"/>
+            <a:ext cx="9144000" cy="1080000"/>
           </a:xfrm>
           <a:prstGeom prst="rect">
             <a:avLst/>
@@ -130,10 +131,10 @@
             <a:noAutofit/>
           </a:bodyPr>
           <a:p>
-            <a:pPr indent="0">
+            <a:pPr indent="0" algn="ctr">
               <a:buNone/>
             </a:pPr>
-            <a:endParaRPr b="1" lang="en-US" sz="1900" spc="-1" strike="noStrike">
+            <a:endParaRPr b="1" lang="en-US" sz="2280" spc="-1" strike="noStrike">
               <a:solidFill>
                 <a:srgbClr val="ffffff"/>
               </a:solidFill>
@@ -154,8 +155,8 @@
         </p:nvSpPr>
         <p:spPr>
           <a:xfrm>
-            <a:off x="716400" y="864000"/>
-            <a:ext cx="7920000" cy="3816000"/>
+            <a:off x="457200" y="1203480"/>
+            <a:ext cx="8229240" cy="2982960"/>
           </a:xfrm>
           <a:prstGeom prst="rect">
             <a:avLst/>
@@ -216,8 +217,8 @@
         </p:nvSpPr>
         <p:spPr>
           <a:xfrm>
-            <a:off x="198000" y="0"/>
-            <a:ext cx="8064000" cy="558000"/>
+            <a:off x="0" y="1980000"/>
+            <a:ext cx="9144000" cy="1080000"/>
           </a:xfrm>
           <a:prstGeom prst="rect">
             <a:avLst/>
@@ -232,10 +233,10 @@
             <a:noAutofit/>
           </a:bodyPr>
           <a:p>
-            <a:pPr indent="0">
+            <a:pPr indent="0" algn="ctr">
               <a:buNone/>
             </a:pPr>
-            <a:endParaRPr b="1" lang="en-US" sz="1900" spc="-1" strike="noStrike">
+            <a:endParaRPr b="1" lang="en-US" sz="2280" spc="-1" strike="noStrike">
               <a:solidFill>
                 <a:srgbClr val="ffffff"/>
               </a:solidFill>
@@ -256,8 +257,8 @@
         </p:nvSpPr>
         <p:spPr>
           <a:xfrm>
-            <a:off x="716400" y="864000"/>
-            <a:ext cx="7920000" cy="3816000"/>
+            <a:off x="457200" y="1203480"/>
+            <a:ext cx="8229240" cy="2982960"/>
           </a:xfrm>
           <a:prstGeom prst="rect">
             <a:avLst/>
@@ -321,7 +322,7 @@
         <p:txBody>
           <a:bodyPr/>
           <a:p>
-            <a:fld id="{E8DC64FA-AD9A-449C-8DD6-E6EEF0234EE4}" type="slidenum">
+            <a:fld id="{26B7382E-8BB8-4E67-BF1A-24DFC4BD2481}" type="slidenum">
               <a:t>&lt;#&gt;</a:t>
             </a:fld>
           </a:p>
@@ -361,8 +362,8 @@
         </p:nvSpPr>
         <p:spPr>
           <a:xfrm>
-            <a:off x="198000" y="0"/>
-            <a:ext cx="8064000" cy="558000"/>
+            <a:off x="0" y="1980000"/>
+            <a:ext cx="9144000" cy="1080000"/>
           </a:xfrm>
           <a:prstGeom prst="rect">
             <a:avLst/>
@@ -377,10 +378,10 @@
             <a:noAutofit/>
           </a:bodyPr>
           <a:p>
-            <a:pPr indent="0">
+            <a:pPr indent="0" algn="ctr">
               <a:buNone/>
             </a:pPr>
-            <a:endParaRPr b="1" lang="en-US" sz="1900" spc="-1" strike="noStrike">
+            <a:endParaRPr b="1" lang="en-US" sz="2280" spc="-1" strike="noStrike">
               <a:solidFill>
                 <a:srgbClr val="ffffff"/>
               </a:solidFill>
@@ -423,7 +424,7 @@
         <p:txBody>
           <a:bodyPr/>
           <a:p>
-            <a:fld id="{B1FF68E8-8F01-4E68-988B-1FC2297BF8E9}" type="slidenum">
+            <a:fld id="{74F71292-DBDB-449E-9B59-E042078699CA}" type="slidenum">
               <a:t>&lt;#&gt;</a:t>
             </a:fld>
           </a:p>
@@ -463,8 +464,8 @@
         </p:nvSpPr>
         <p:spPr>
           <a:xfrm>
-            <a:off x="198000" y="0"/>
-            <a:ext cx="8064000" cy="558000"/>
+            <a:off x="0" y="1980000"/>
+            <a:ext cx="9144000" cy="1080000"/>
           </a:xfrm>
           <a:prstGeom prst="rect">
             <a:avLst/>
@@ -479,15 +480,117 @@
             <a:noAutofit/>
           </a:bodyPr>
           <a:p>
-            <a:pPr indent="0">
+            <a:pPr indent="0" algn="ctr">
               <a:buNone/>
             </a:pPr>
-            <a:endParaRPr b="1" lang="en-US" sz="1900" spc="-1" strike="noStrike">
+            <a:endParaRPr b="1" lang="en-US" sz="2280" spc="-1" strike="noStrike">
               <a:solidFill>
                 <a:srgbClr val="ffffff"/>
               </a:solidFill>
               <a:latin typeface="Fira Sans"/>
             </a:endParaRPr>
+          </a:p>
+        </p:txBody>
+      </p:sp>
+    </p:spTree>
+  </p:cSld>
+</p:sldLayout>
+</file>
+
+<file path=ppt/slideLayouts/slideLayout6.xml><?xml version="1.0" encoding="utf-8"?>
+<p:sldLayout xmlns:a="http://schemas.openxmlformats.org/drawingml/2006/main" xmlns:p="http://schemas.openxmlformats.org/presentationml/2006/main" xmlns:r="http://schemas.openxmlformats.org/officeDocument/2006/relationships" xmlns:p14="http://schemas.microsoft.com/office/powerpoint/2010/main" xmlns:p15="http://schemas.microsoft.com/office/powerpoint/2012/main" xmlns:mc="http://schemas.openxmlformats.org/markup-compatibility/2006" type="titleOnly" preserve="1">
+  <p:cSld name="ITB Penutup">
+    <p:spTree>
+      <p:nvGrpSpPr>
+        <p:cNvPr id="1" name=""/>
+        <p:cNvGrpSpPr/>
+        <p:nvPr/>
+      </p:nvGrpSpPr>
+      <p:grpSpPr>
+        <a:xfrm>
+          <a:off x="0" y="0"/>
+          <a:ext cx="0" cy="0"/>
+          <a:chOff x="0" y="0"/>
+          <a:chExt cx="0" cy="0"/>
+        </a:xfrm>
+      </p:grpSpPr>
+      <p:sp>
+        <p:nvSpPr>
+          <p:cNvPr id="32" name="PlaceHolder 1"/>
+          <p:cNvSpPr>
+            <a:spLocks noGrp="1"/>
+          </p:cNvSpPr>
+          <p:nvPr>
+            <p:ph type="title"/>
+          </p:nvPr>
+        </p:nvSpPr>
+        <p:spPr>
+          <a:xfrm>
+            <a:off x="0" y="1980000"/>
+            <a:ext cx="9144000" cy="1080000"/>
+          </a:xfrm>
+          <a:prstGeom prst="rect">
+            <a:avLst/>
+          </a:prstGeom>
+          <a:noFill/>
+          <a:ln w="0">
+            <a:noFill/>
+          </a:ln>
+        </p:spPr>
+        <p:txBody>
+          <a:bodyPr lIns="0" rIns="0" tIns="0" bIns="0" anchor="ctr">
+            <a:noAutofit/>
+          </a:bodyPr>
+          <a:p>
+            <a:pPr indent="0" algn="ctr">
+              <a:buNone/>
+            </a:pPr>
+            <a:endParaRPr b="1" lang="en-US" sz="2280" spc="-1" strike="noStrike">
+              <a:solidFill>
+                <a:srgbClr val="ffffff"/>
+              </a:solidFill>
+              <a:latin typeface="Fira Sans"/>
+            </a:endParaRPr>
+          </a:p>
+        </p:txBody>
+      </p:sp>
+      <p:sp>
+        <p:nvSpPr>
+          <p:cNvPr id="3" name="PlaceHolder 2"/>
+          <p:cNvSpPr>
+            <a:spLocks noGrp="1"/>
+          </p:cNvSpPr>
+          <p:nvPr>
+            <p:ph type="ftr" idx="3"/>
+          </p:nvPr>
+        </p:nvSpPr>
+        <p:spPr/>
+        <p:txBody>
+          <a:bodyPr/>
+          <a:p>
+            <a:r>
+              <a:t>Footer</a:t>
+            </a:r>
+          </a:p>
+        </p:txBody>
+      </p:sp>
+      <p:sp>
+        <p:nvSpPr>
+          <p:cNvPr id="4" name="PlaceHolder 3"/>
+          <p:cNvSpPr>
+            <a:spLocks noGrp="1"/>
+          </p:cNvSpPr>
+          <p:nvPr>
+            <p:ph type="sldNum" idx="4"/>
+          </p:nvPr>
+        </p:nvSpPr>
+        <p:spPr/>
+        <p:txBody>
+          <a:bodyPr/>
+          <a:p>
+            <a:fld id="{93237E2E-16D0-4AC5-B5E7-21414E87286B}" type="slidenum">
+              <a:t>&lt;#&gt;</a:t>
+            </a:fld>
           </a:p>
         </p:txBody>
       </p:sp>
@@ -499,6 +602,13 @@
 <file path=ppt/slideMasters/slideMaster1.xml><?xml version="1.0" encoding="utf-8"?>
 <p:sldMaster xmlns:a="http://schemas.openxmlformats.org/drawingml/2006/main" xmlns:p="http://schemas.openxmlformats.org/presentationml/2006/main" xmlns:r="http://schemas.openxmlformats.org/officeDocument/2006/relationships" xmlns:p14="http://schemas.microsoft.com/office/powerpoint/2010/main" xmlns:p15="http://schemas.microsoft.com/office/powerpoint/2012/main" xmlns:mc="http://schemas.openxmlformats.org/markup-compatibility/2006">
   <p:cSld>
+    <p:bg>
+      <p:bgPr>
+        <a:solidFill>
+          <a:srgbClr val="fafbfd"/>
+        </a:solidFill>
+      </p:bgPr>
+    </p:bg>
     <p:spTree>
       <p:nvGrpSpPr>
         <p:cNvPr id="1" name=""/>
@@ -613,14 +723,14 @@
             <a:noAutofit/>
           </a:bodyPr>
           <a:p>
-            <a:pPr marL="255600" indent="-255600">
+            <a:pPr marL="255600" indent="-244800">
               <a:spcAft>
                 <a:spcPts val="595"/>
               </a:spcAft>
               <a:buClr>
                 <a:srgbClr val="4b75ba"/>
               </a:buClr>
-              <a:buSzPct val="62000"/>
+              <a:buSzPct val="80000"/>
               <a:buFont typeface="DejaVu Sans"/>
               <a:buChar char="▶"/>
             </a:pPr>
@@ -852,6 +962,13 @@
 <file path=ppt/slideMasters/slideMaster2.xml><?xml version="1.0" encoding="utf-8"?>
 <p:sldMaster xmlns:a="http://schemas.openxmlformats.org/drawingml/2006/main" xmlns:p="http://schemas.openxmlformats.org/presentationml/2006/main" xmlns:r="http://schemas.openxmlformats.org/officeDocument/2006/relationships" xmlns:p14="http://schemas.microsoft.com/office/powerpoint/2010/main" xmlns:p15="http://schemas.microsoft.com/office/powerpoint/2012/main" xmlns:mc="http://schemas.openxmlformats.org/markup-compatibility/2006">
   <p:cSld>
+    <p:bg>
+      <p:bgPr>
+        <a:solidFill>
+          <a:srgbClr val="fafbfd"/>
+        </a:solidFill>
+      </p:bgPr>
+    </p:bg>
     <p:spTree>
       <p:nvGrpSpPr>
         <p:cNvPr id="1" name=""/>
@@ -1112,14 +1229,14 @@
             <a:noAutofit/>
           </a:bodyPr>
           <a:p>
-            <a:pPr marL="255600" indent="-255600">
+            <a:pPr marL="255600" indent="-244800">
               <a:spcAft>
                 <a:spcPts val="595"/>
               </a:spcAft>
               <a:buClr>
                 <a:srgbClr val="4b75ba"/>
               </a:buClr>
-              <a:buSzPct val="62000"/>
+              <a:buSzPct val="80000"/>
               <a:buFont typeface="DejaVu Sans"/>
               <a:buChar char="▶"/>
             </a:pPr>
@@ -1405,7 +1522,7 @@
             <a:pPr indent="0" algn="r">
               <a:buNone/>
             </a:pPr>
-            <a:fld id="{6529C087-A7D5-4618-9699-C08297EC764E}" type="slidenum">
+            <a:fld id="{DD7B3085-D0E1-4A62-8383-8B962793F545}" type="slidenum">
               <a:rPr b="0" lang="en-US" sz="1110" spc="-1" strike="noStrike">
                 <a:solidFill>
                   <a:srgbClr val="005aab"/>
@@ -1413,24 +1530,6 @@
                 <a:latin typeface="Fira Sans Book"/>
               </a:rPr>
               <a:t>&lt;number&gt;</a:t>
-            </a:fld>
-            <a:r>
-              <a:rPr b="0" lang="en-US" sz="1110" spc="-1" strike="noStrike">
-                <a:solidFill>
-                  <a:srgbClr val="005aab"/>
-                </a:solidFill>
-                <a:latin typeface="Fira Sans Book"/>
-              </a:rPr>
-              <a:t>/</a:t>
-            </a:r>
-            <a:fld id="{30F5BF03-802A-4173-8152-ADB91D2E14E6}" type="slidecount">
-              <a:rPr b="0" lang="en-US" sz="1110" spc="-1" strike="noStrike">
-                <a:solidFill>
-                  <a:srgbClr val="005aab"/>
-                </a:solidFill>
-                <a:latin typeface="Fira Sans Book"/>
-              </a:rPr>
-              <a:t>10</a:t>
             </a:fld>
             <a:endParaRPr b="0" lang="en-US" sz="1110" spc="-1" strike="noStrike">
               <a:solidFill>
@@ -1454,6 +1553,13 @@
 <file path=ppt/slideMasters/slideMaster3.xml><?xml version="1.0" encoding="utf-8"?>
 <p:sldMaster xmlns:a="http://schemas.openxmlformats.org/drawingml/2006/main" xmlns:p="http://schemas.openxmlformats.org/presentationml/2006/main" xmlns:r="http://schemas.openxmlformats.org/officeDocument/2006/relationships" xmlns:p14="http://schemas.microsoft.com/office/powerpoint/2010/main" xmlns:p15="http://schemas.microsoft.com/office/powerpoint/2012/main" xmlns:mc="http://schemas.openxmlformats.org/markup-compatibility/2006">
   <p:cSld>
+    <p:bg>
+      <p:bgPr>
+        <a:solidFill>
+          <a:srgbClr val="fafbfd"/>
+        </a:solidFill>
+      </p:bgPr>
+    </p:bg>
     <p:spTree>
       <p:nvGrpSpPr>
         <p:cNvPr id="1" name=""/>
@@ -1638,14 +1744,14 @@
             <a:noAutofit/>
           </a:bodyPr>
           <a:p>
-            <a:pPr marL="255600" indent="-255600">
+            <a:pPr marL="255600" indent="-244800">
               <a:spcAft>
                 <a:spcPts val="595"/>
               </a:spcAft>
               <a:buClr>
                 <a:srgbClr val="4b75ba"/>
               </a:buClr>
-              <a:buSzPct val="62000"/>
+              <a:buSzPct val="80000"/>
               <a:buFont typeface="DejaVu Sans"/>
               <a:buChar char="▶"/>
             </a:pPr>
@@ -1834,6 +1940,538 @@
   <p:clrMap bg1="lt1" bg2="lt2" tx1="dk1" tx2="dk2" accent1="accent1" accent2="accent2" accent3="accent3" accent4="accent4" accent5="accent5" accent6="accent6" hlink="hlink" folHlink="folHlink"/>
   <p:sldLayoutIdLst>
     <p:sldLayoutId id="2147483655" r:id="rId3"/>
+  </p:sldLayoutIdLst>
+</p:sldMaster>
+</file>
+
+<file path=ppt/slideMasters/slideMaster4.xml><?xml version="1.0" encoding="utf-8"?>
+<p:sldMaster xmlns:a="http://schemas.openxmlformats.org/drawingml/2006/main" xmlns:p="http://schemas.openxmlformats.org/presentationml/2006/main" xmlns:r="http://schemas.openxmlformats.org/officeDocument/2006/relationships" xmlns:p14="http://schemas.microsoft.com/office/powerpoint/2010/main" xmlns:p15="http://schemas.microsoft.com/office/powerpoint/2012/main" xmlns:mc="http://schemas.openxmlformats.org/markup-compatibility/2006">
+  <p:cSld>
+    <p:bg>
+      <p:bgPr>
+        <a:solidFill>
+          <a:srgbClr val="fafbfd"/>
+        </a:solidFill>
+      </p:bgPr>
+    </p:bg>
+    <p:spTree>
+      <p:nvGrpSpPr>
+        <p:cNvPr id="1" name=""/>
+        <p:cNvGrpSpPr/>
+        <p:nvPr/>
+      </p:nvGrpSpPr>
+      <p:grpSpPr>
+        <a:xfrm>
+          <a:off x="0" y="0"/>
+          <a:ext cx="0" cy="0"/>
+          <a:chOff x="0" y="0"/>
+          <a:chExt cx="0" cy="0"/>
+        </a:xfrm>
+      </p:grpSpPr>
+      <p:sp>
+        <p:nvSpPr>
+          <p:cNvPr id="25" name=""/>
+          <p:cNvSpPr/>
+          <p:nvPr/>
+        </p:nvSpPr>
+        <p:spPr>
+          <a:xfrm>
+            <a:off x="0" y="0"/>
+            <a:ext cx="9144000" cy="5143680"/>
+          </a:xfrm>
+          <a:prstGeom prst="rect">
+            <a:avLst/>
+          </a:prstGeom>
+          <a:solidFill>
+            <a:srgbClr val="005aab"/>
+          </a:solidFill>
+          <a:ln w="0">
+            <a:noFill/>
+          </a:ln>
+        </p:spPr>
+        <p:txBody>
+          <a:bodyPr lIns="0" rIns="0" tIns="0" bIns="0" anchor="t">
+            <a:noAutofit/>
+          </a:bodyPr>
+          <a:p>
+            <a:endParaRPr b="0" lang="en-US" sz="1580" spc="-1" strike="noStrike">
+              <a:solidFill>
+                <a:srgbClr val="212121"/>
+              </a:solidFill>
+              <a:latin typeface="Fira Sans Book"/>
+            </a:endParaRPr>
+          </a:p>
+        </p:txBody>
+      </p:sp>
+      <p:sp>
+        <p:nvSpPr>
+          <p:cNvPr id="26" name=""/>
+          <p:cNvSpPr/>
+          <p:nvPr/>
+        </p:nvSpPr>
+        <p:spPr>
+          <a:xfrm>
+            <a:off x="0" y="4932000"/>
+            <a:ext cx="9144000" cy="212400"/>
+          </a:xfrm>
+          <a:prstGeom prst="rect">
+            <a:avLst/>
+          </a:prstGeom>
+          <a:solidFill>
+            <a:srgbClr val="d4e3f1"/>
+          </a:solidFill>
+          <a:ln w="0">
+            <a:noFill/>
+          </a:ln>
+        </p:spPr>
+        <p:txBody>
+          <a:bodyPr lIns="0" rIns="0" tIns="0" bIns="0" anchor="t">
+            <a:noAutofit/>
+          </a:bodyPr>
+          <a:p>
+            <a:endParaRPr b="0" lang="en-US" sz="1580" spc="-1" strike="noStrike">
+              <a:solidFill>
+                <a:srgbClr val="212121"/>
+              </a:solidFill>
+              <a:latin typeface="Fira Sans Book"/>
+            </a:endParaRPr>
+          </a:p>
+        </p:txBody>
+      </p:sp>
+      <p:sp>
+        <p:nvSpPr>
+          <p:cNvPr id="27" name=""/>
+          <p:cNvSpPr/>
+          <p:nvPr/>
+        </p:nvSpPr>
+        <p:spPr>
+          <a:xfrm>
+            <a:off x="0" y="4924800"/>
+            <a:ext cx="9144000" cy="0"/>
+          </a:xfrm>
+          <a:prstGeom prst="line">
+            <a:avLst/>
+          </a:prstGeom>
+          <a:ln w="14040">
+            <a:solidFill>
+              <a:srgbClr val="e8a317"/>
+            </a:solidFill>
+            <a:round/>
+          </a:ln>
+        </p:spPr>
+        <p:style>
+          <a:lnRef idx="0"/>
+          <a:fillRef idx="0"/>
+          <a:effectRef idx="0"/>
+          <a:fontRef idx="minor"/>
+        </p:style>
+        <p:txBody>
+          <a:bodyPr lIns="6840" rIns="6840" tIns="-6840" bIns="-6840" anchor="t">
+            <a:noAutofit/>
+          </a:bodyPr>
+          <a:p>
+            <a:endParaRPr b="0" lang="en-US" sz="1580" spc="-1" strike="noStrike">
+              <a:solidFill>
+                <a:srgbClr val="212121"/>
+              </a:solidFill>
+              <a:latin typeface="Fira Sans Book"/>
+            </a:endParaRPr>
+          </a:p>
+        </p:txBody>
+      </p:sp>
+      <p:sp>
+        <p:nvSpPr>
+          <p:cNvPr id="28" name="PlaceHolder 1"/>
+          <p:cNvSpPr>
+            <a:spLocks noGrp="1"/>
+          </p:cNvSpPr>
+          <p:nvPr>
+            <p:ph type="title"/>
+          </p:nvPr>
+        </p:nvSpPr>
+        <p:spPr>
+          <a:xfrm>
+            <a:off x="0" y="1980000"/>
+            <a:ext cx="9144000" cy="1080000"/>
+          </a:xfrm>
+          <a:prstGeom prst="rect">
+            <a:avLst/>
+          </a:prstGeom>
+          <a:noFill/>
+          <a:ln w="0">
+            <a:noFill/>
+          </a:ln>
+        </p:spPr>
+        <p:txBody>
+          <a:bodyPr lIns="0" rIns="0" tIns="0" bIns="0" anchor="ctr">
+            <a:noAutofit/>
+          </a:bodyPr>
+          <a:p>
+            <a:pPr indent="0" algn="ctr">
+              <a:buNone/>
+            </a:pPr>
+            <a:r>
+              <a:rPr b="1" lang="en-US" sz="2280" spc="-1" strike="noStrike">
+                <a:solidFill>
+                  <a:srgbClr val="ffffff"/>
+                </a:solidFill>
+                <a:latin typeface="Fira Sans"/>
+              </a:rPr>
+              <a:t>Click to edit the title text format</a:t>
+            </a:r>
+            <a:endParaRPr b="1" lang="en-US" sz="2280" spc="-1" strike="noStrike">
+              <a:solidFill>
+                <a:srgbClr val="ffffff"/>
+              </a:solidFill>
+              <a:latin typeface="Fira Sans"/>
+            </a:endParaRPr>
+          </a:p>
+        </p:txBody>
+      </p:sp>
+      <p:sp>
+        <p:nvSpPr>
+          <p:cNvPr id="29" name="PlaceHolder 2"/>
+          <p:cNvSpPr>
+            <a:spLocks noGrp="1"/>
+          </p:cNvSpPr>
+          <p:nvPr>
+            <p:ph type="ftr" idx="3"/>
+          </p:nvPr>
+        </p:nvSpPr>
+        <p:spPr>
+          <a:xfrm>
+            <a:off x="115200" y="4906800"/>
+            <a:ext cx="5760000" cy="212400"/>
+          </a:xfrm>
+          <a:prstGeom prst="rect">
+            <a:avLst/>
+          </a:prstGeom>
+          <a:noFill/>
+          <a:ln w="0">
+            <a:noFill/>
+          </a:ln>
+        </p:spPr>
+        <p:txBody>
+          <a:bodyPr lIns="0" rIns="0" tIns="0" bIns="0" anchor="ctr">
+            <a:noAutofit/>
+          </a:bodyPr>
+          <a:lstStyle>
+            <a:lvl1pPr indent="0">
+              <a:buNone/>
+              <a:defRPr b="0" lang="en-US" sz="1110" spc="-1" strike="noStrike">
+                <a:solidFill>
+                  <a:srgbClr val="005aab"/>
+                </a:solidFill>
+                <a:latin typeface="Fira Sans Book"/>
+              </a:defRPr>
+            </a:lvl1pPr>
+          </a:lstStyle>
+          <a:p>
+            <a:pPr indent="0">
+              <a:buNone/>
+            </a:pPr>
+            <a:r>
+              <a:rPr b="0" lang="en-US" sz="1110" spc="-1" strike="noStrike">
+                <a:solidFill>
+                  <a:srgbClr val="005aab"/>
+                </a:solidFill>
+                <a:latin typeface="Fira Sans Book"/>
+              </a:rPr>
+              <a:t>&lt;footer&gt;</a:t>
+            </a:r>
+            <a:endParaRPr b="0" lang="en-US" sz="1110" spc="-1" strike="noStrike">
+              <a:solidFill>
+                <a:srgbClr val="005aab"/>
+              </a:solidFill>
+              <a:latin typeface="Fira Sans Book"/>
+            </a:endParaRPr>
+          </a:p>
+        </p:txBody>
+      </p:sp>
+      <p:sp>
+        <p:nvSpPr>
+          <p:cNvPr id="30" name="PlaceHolder 3"/>
+          <p:cNvSpPr>
+            <a:spLocks noGrp="1"/>
+          </p:cNvSpPr>
+          <p:nvPr>
+            <p:ph type="sldNum" idx="4"/>
+          </p:nvPr>
+        </p:nvSpPr>
+        <p:spPr>
+          <a:xfrm>
+            <a:off x="7588800" y="4906800"/>
+            <a:ext cx="1440000" cy="212400"/>
+          </a:xfrm>
+          <a:prstGeom prst="rect">
+            <a:avLst/>
+          </a:prstGeom>
+          <a:noFill/>
+          <a:ln w="0">
+            <a:noFill/>
+          </a:ln>
+        </p:spPr>
+        <p:txBody>
+          <a:bodyPr lIns="0" rIns="0" tIns="0" bIns="0" anchor="ctr">
+            <a:noAutofit/>
+          </a:bodyPr>
+          <a:lstStyle>
+            <a:lvl1pPr indent="0" algn="r">
+              <a:buNone/>
+              <a:defRPr b="0" lang="en-US" sz="1110" spc="-1" strike="noStrike">
+                <a:solidFill>
+                  <a:srgbClr val="005aab"/>
+                </a:solidFill>
+                <a:latin typeface="Fira Sans Book"/>
+              </a:defRPr>
+            </a:lvl1pPr>
+          </a:lstStyle>
+          <a:p>
+            <a:pPr indent="0" algn="r">
+              <a:buNone/>
+            </a:pPr>
+            <a:fld id="{CAE3F5F9-A250-4E59-AFC3-7CE81ADF9769}" type="slidenum">
+              <a:rPr b="0" lang="en-US" sz="1110" spc="-1" strike="noStrike">
+                <a:solidFill>
+                  <a:srgbClr val="005aab"/>
+                </a:solidFill>
+                <a:latin typeface="Fira Sans Book"/>
+              </a:rPr>
+              <a:t>&lt;number&gt;</a:t>
+            </a:fld>
+            <a:endParaRPr b="0" lang="en-US" sz="1110" spc="-1" strike="noStrike">
+              <a:solidFill>
+                <a:srgbClr val="005aab"/>
+              </a:solidFill>
+              <a:latin typeface="Fira Sans Book"/>
+            </a:endParaRPr>
+          </a:p>
+        </p:txBody>
+      </p:sp>
+      <p:sp>
+        <p:nvSpPr>
+          <p:cNvPr id="31" name="PlaceHolder 4"/>
+          <p:cNvSpPr>
+            <a:spLocks noGrp="1"/>
+          </p:cNvSpPr>
+          <p:nvPr>
+            <p:ph type="body"/>
+          </p:nvPr>
+        </p:nvSpPr>
+        <p:spPr>
+          <a:xfrm>
+            <a:off x="457200" y="1203480"/>
+            <a:ext cx="8229240" cy="2982960"/>
+          </a:xfrm>
+          <a:prstGeom prst="rect">
+            <a:avLst/>
+          </a:prstGeom>
+          <a:noFill/>
+          <a:ln w="0">
+            <a:noFill/>
+          </a:ln>
+        </p:spPr>
+        <p:txBody>
+          <a:bodyPr lIns="0" rIns="0" tIns="0" bIns="0" anchor="t">
+            <a:noAutofit/>
+          </a:bodyPr>
+          <a:p>
+            <a:pPr marL="255600" indent="-244800">
+              <a:spcAft>
+                <a:spcPts val="595"/>
+              </a:spcAft>
+              <a:buClr>
+                <a:srgbClr val="4b75ba"/>
+              </a:buClr>
+              <a:buSzPct val="80000"/>
+              <a:buFont typeface="DejaVu Sans"/>
+              <a:buChar char="▶"/>
+            </a:pPr>
+            <a:r>
+              <a:rPr b="0" lang="en-US" sz="1580" spc="-1" strike="noStrike">
+                <a:solidFill>
+                  <a:srgbClr val="212121"/>
+                </a:solidFill>
+                <a:latin typeface="Fira Sans Book"/>
+              </a:rPr>
+              <a:t>Click to edit the outline text format</a:t>
+            </a:r>
+            <a:endParaRPr b="0" lang="en-US" sz="1580" spc="-1" strike="noStrike">
+              <a:solidFill>
+                <a:srgbClr val="212121"/>
+              </a:solidFill>
+              <a:latin typeface="Fira Sans Book"/>
+            </a:endParaRPr>
+          </a:p>
+          <a:p>
+            <a:pPr lvl="1" marL="658800" indent="-244800">
+              <a:spcAft>
+                <a:spcPts val="595"/>
+              </a:spcAft>
+              <a:buClr>
+                <a:srgbClr val="e8a317"/>
+              </a:buClr>
+              <a:buFont typeface="DejaVu Sans"/>
+              <a:buChar char="−"/>
+            </a:pPr>
+            <a:r>
+              <a:rPr b="0" lang="en-US" sz="1420" spc="-1" strike="noStrike">
+                <a:solidFill>
+                  <a:srgbClr val="212121"/>
+                </a:solidFill>
+                <a:latin typeface="Fira Sans Book"/>
+              </a:rPr>
+              <a:t>Second Outline Level</a:t>
+            </a:r>
+            <a:endParaRPr b="0" lang="en-US" sz="1420" spc="-1" strike="noStrike">
+              <a:solidFill>
+                <a:srgbClr val="212121"/>
+              </a:solidFill>
+              <a:latin typeface="Fira Sans Book"/>
+            </a:endParaRPr>
+          </a:p>
+          <a:p>
+            <a:pPr lvl="2" marL="1044000" indent="-216000">
+              <a:spcAft>
+                <a:spcPts val="595"/>
+              </a:spcAft>
+              <a:buClr>
+                <a:srgbClr val="4a5360"/>
+              </a:buClr>
+              <a:buFont typeface="DejaVu Sans"/>
+              <a:buChar char="•"/>
+            </a:pPr>
+            <a:r>
+              <a:rPr b="0" lang="en-US" sz="1270" spc="-1" strike="noStrike">
+                <a:solidFill>
+                  <a:srgbClr val="212121"/>
+                </a:solidFill>
+                <a:latin typeface="Fira Sans Book"/>
+              </a:rPr>
+              <a:t>Third Outline Level</a:t>
+            </a:r>
+            <a:endParaRPr b="0" lang="en-US" sz="1270" spc="-1" strike="noStrike">
+              <a:solidFill>
+                <a:srgbClr val="212121"/>
+              </a:solidFill>
+              <a:latin typeface="Fira Sans Book"/>
+            </a:endParaRPr>
+          </a:p>
+          <a:p>
+            <a:pPr lvl="3" marL="1368000" indent="-216000">
+              <a:spcAft>
+                <a:spcPts val="595"/>
+              </a:spcAft>
+              <a:buClr>
+                <a:srgbClr val="4a5360"/>
+              </a:buClr>
+              <a:buFont typeface="DejaVu Sans"/>
+              <a:buChar char="•"/>
+            </a:pPr>
+            <a:r>
+              <a:rPr b="0" lang="en-US" sz="1270" spc="-1" strike="noStrike">
+                <a:solidFill>
+                  <a:srgbClr val="212121"/>
+                </a:solidFill>
+                <a:latin typeface="Fira Sans Book"/>
+              </a:rPr>
+              <a:t>Fourth Outline Level</a:t>
+            </a:r>
+            <a:endParaRPr b="0" lang="en-US" sz="1270" spc="-1" strike="noStrike">
+              <a:solidFill>
+                <a:srgbClr val="212121"/>
+              </a:solidFill>
+              <a:latin typeface="Fira Sans Book"/>
+            </a:endParaRPr>
+          </a:p>
+          <a:p>
+            <a:pPr lvl="4" marL="1692000" indent="-216000">
+              <a:spcAft>
+                <a:spcPts val="595"/>
+              </a:spcAft>
+              <a:buClr>
+                <a:srgbClr val="4a5360"/>
+              </a:buClr>
+              <a:buFont typeface="DejaVu Sans"/>
+              <a:buChar char="•"/>
+            </a:pPr>
+            <a:r>
+              <a:rPr b="0" lang="en-US" sz="1270" spc="-1" strike="noStrike">
+                <a:solidFill>
+                  <a:srgbClr val="212121"/>
+                </a:solidFill>
+                <a:latin typeface="Fira Sans Book"/>
+              </a:rPr>
+              <a:t>Fifth Outline Level</a:t>
+            </a:r>
+            <a:endParaRPr b="0" lang="en-US" sz="1270" spc="-1" strike="noStrike">
+              <a:solidFill>
+                <a:srgbClr val="212121"/>
+              </a:solidFill>
+              <a:latin typeface="Fira Sans Book"/>
+            </a:endParaRPr>
+          </a:p>
+          <a:p>
+            <a:pPr lvl="5" marL="2016000" indent="-216000">
+              <a:spcAft>
+                <a:spcPts val="595"/>
+              </a:spcAft>
+              <a:buClr>
+                <a:srgbClr val="4a5360"/>
+              </a:buClr>
+              <a:buFont typeface="DejaVu Sans"/>
+              <a:buChar char="•"/>
+            </a:pPr>
+            <a:r>
+              <a:rPr b="0" lang="en-US" sz="1270" spc="-1" strike="noStrike">
+                <a:solidFill>
+                  <a:srgbClr val="212121"/>
+                </a:solidFill>
+                <a:latin typeface="Fira Sans Book"/>
+              </a:rPr>
+              <a:t>Sixth Outline Level</a:t>
+            </a:r>
+            <a:endParaRPr b="0" lang="en-US" sz="1270" spc="-1" strike="noStrike">
+              <a:solidFill>
+                <a:srgbClr val="212121"/>
+              </a:solidFill>
+              <a:latin typeface="Fira Sans Book"/>
+            </a:endParaRPr>
+          </a:p>
+          <a:p>
+            <a:pPr lvl="6" marL="2340000" indent="-216000">
+              <a:spcAft>
+                <a:spcPts val="595"/>
+              </a:spcAft>
+              <a:buClr>
+                <a:srgbClr val="4a5360"/>
+              </a:buClr>
+              <a:buFont typeface="DejaVu Sans"/>
+              <a:buChar char="•"/>
+            </a:pPr>
+            <a:r>
+              <a:rPr b="0" lang="en-US" sz="1270" spc="-1" strike="noStrike">
+                <a:solidFill>
+                  <a:srgbClr val="212121"/>
+                </a:solidFill>
+                <a:latin typeface="Fira Sans Book"/>
+              </a:rPr>
+              <a:t>Seventh Outline Level</a:t>
+            </a:r>
+            <a:endParaRPr b="0" lang="en-US" sz="1270" spc="-1" strike="noStrike">
+              <a:solidFill>
+                <a:srgbClr val="212121"/>
+              </a:solidFill>
+              <a:latin typeface="Fira Sans Book"/>
+            </a:endParaRPr>
+          </a:p>
+        </p:txBody>
+      </p:sp>
+    </p:spTree>
+  </p:cSld>
+  <p:clrMap bg1="lt1" bg2="lt2" tx1="dk1" tx2="dk2" accent1="accent1" accent2="accent2" accent3="accent3" accent4="accent4" accent5="accent5" accent6="accent6" hlink="hlink" folHlink="folHlink"/>
+  <p:sldLayoutIdLst>
+    <p:sldLayoutId id="2147483657" r:id="rId2"/>
   </p:sldLayoutIdLst>
 </p:sldMaster>
 </file>
@@ -1857,7 +2495,7 @@
       </p:grpSpPr>
       <p:sp>
         <p:nvSpPr>
-          <p:cNvPr id="25" name="PlaceHolder 1"/>
+          <p:cNvPr id="33" name="PlaceHolder 1"/>
           <p:cNvSpPr>
             <a:spLocks noGrp="1"/>
           </p:cNvSpPr>
@@ -1906,7 +2544,7 @@
       </p:sp>
       <p:sp>
         <p:nvSpPr>
-          <p:cNvPr id="26" name="PlaceHolder 2"/>
+          <p:cNvPr id="34" name="PlaceHolder 2"/>
           <p:cNvSpPr>
             <a:spLocks noGrp="1"/>
           </p:cNvSpPr>
@@ -1955,7 +2593,7 @@
       </p:sp>
       <p:sp>
         <p:nvSpPr>
-          <p:cNvPr id="27" name=""/>
+          <p:cNvPr id="35" name=""/>
           <p:cNvSpPr txBox="1"/>
           <p:nvPr/>
         </p:nvSpPr>
@@ -1997,7 +2635,7 @@
       </p:sp>
       <p:sp>
         <p:nvSpPr>
-          <p:cNvPr id="28" name=""/>
+          <p:cNvPr id="36" name=""/>
           <p:cNvSpPr txBox="1"/>
           <p:nvPr/>
         </p:nvSpPr>
@@ -2039,7 +2677,7 @@
       </p:sp>
       <p:sp>
         <p:nvSpPr>
-          <p:cNvPr id="29" name=""/>
+          <p:cNvPr id="37" name=""/>
           <p:cNvSpPr txBox="1"/>
           <p:nvPr/>
         </p:nvSpPr>
@@ -2081,7 +2719,7 @@
       </p:sp>
       <p:sp>
         <p:nvSpPr>
-          <p:cNvPr id="30" name=""/>
+          <p:cNvPr id="38" name=""/>
           <p:cNvSpPr txBox="1"/>
           <p:nvPr/>
         </p:nvSpPr>
@@ -2123,7 +2761,7 @@
       </p:sp>
       <p:sp>
         <p:nvSpPr>
-          <p:cNvPr id="31" name=""/>
+          <p:cNvPr id="39" name=""/>
           <p:cNvSpPr txBox="1"/>
           <p:nvPr/>
         </p:nvSpPr>
@@ -2145,6 +2783,11 @@
             <a:noAutofit/>
           </a:bodyPr>
           <a:p>
+            <a:pPr>
+              <a:lnSpc>
+                <a:spcPts val="1446"/>
+              </a:lnSpc>
+            </a:pPr>
             <a:r>
               <a:rPr b="0" lang="en-US" sz="1110" spc="-1" strike="noStrike">
                 <a:solidFill>
@@ -2152,7 +2795,97 @@
                 </a:solidFill>
                 <a:latin typeface="Fira Sans Book"/>
               </a:rPr>
-              <a:t>Program Doktor Teknik Elektro dan Informatika</a:t>
+              <a:t>Program</a:t>
+            </a:r>
+            <a:r>
+              <a:rPr b="0" lang="en-US" sz="1110" spc="-32" strike="noStrike">
+                <a:solidFill>
+                  <a:srgbClr val="212121"/>
+                </a:solidFill>
+                <a:latin typeface="Fira Sans Book"/>
+              </a:rPr>
+              <a:t> </a:t>
+            </a:r>
+            <a:r>
+              <a:rPr b="0" lang="en-US" sz="1110" spc="-1" strike="noStrike">
+                <a:solidFill>
+                  <a:srgbClr val="212121"/>
+                </a:solidFill>
+                <a:latin typeface="Fira Sans Book"/>
+              </a:rPr>
+              <a:t>Doktor</a:t>
+            </a:r>
+            <a:r>
+              <a:rPr b="0" lang="en-US" sz="1110" spc="-32" strike="noStrike">
+                <a:solidFill>
+                  <a:srgbClr val="212121"/>
+                </a:solidFill>
+                <a:latin typeface="Fira Sans Book"/>
+              </a:rPr>
+              <a:t> </a:t>
+            </a:r>
+            <a:r>
+              <a:rPr b="0" lang="en-US" sz="1110" spc="-1" strike="noStrike">
+                <a:solidFill>
+                  <a:srgbClr val="212121"/>
+                </a:solidFill>
+                <a:latin typeface="Fira Sans Book"/>
+              </a:rPr>
+              <a:t>Teknik</a:t>
+            </a:r>
+            <a:r>
+              <a:rPr b="0" lang="en-US" sz="1110" spc="-32" strike="noStrike">
+                <a:solidFill>
+                  <a:srgbClr val="212121"/>
+                </a:solidFill>
+                <a:latin typeface="Fira Sans Book"/>
+              </a:rPr>
+              <a:t> </a:t>
+            </a:r>
+            <a:r>
+              <a:rPr b="0" lang="en-US" sz="1110" spc="-1" strike="noStrike">
+                <a:solidFill>
+                  <a:srgbClr val="212121"/>
+                </a:solidFill>
+                <a:latin typeface="Fira Sans Book"/>
+              </a:rPr>
+              <a:t>Elektro</a:t>
+            </a:r>
+            <a:r>
+              <a:rPr b="0" lang="en-US" sz="1110" spc="-32" strike="noStrike">
+                <a:solidFill>
+                  <a:srgbClr val="212121"/>
+                </a:solidFill>
+                <a:latin typeface="Fira Sans Book"/>
+              </a:rPr>
+              <a:t> </a:t>
+            </a:r>
+            <a:r>
+              <a:rPr b="0" lang="en-US" sz="1110" spc="-1" strike="noStrike">
+                <a:solidFill>
+                  <a:srgbClr val="212121"/>
+                </a:solidFill>
+                <a:latin typeface="Fira Sans Book"/>
+              </a:rPr>
+              <a:t>dan</a:t>
+            </a:r>
+            <a:r>
+              <a:rPr b="0" lang="en-US" sz="1110" spc="-32" strike="noStrike">
+                <a:solidFill>
+                  <a:srgbClr val="212121"/>
+                </a:solidFill>
+                <a:latin typeface="Fira Sans Book"/>
+              </a:rPr>
+              <a:t> </a:t>
+            </a:r>
+            <a:r>
+              <a:rPr b="0" lang="en-US" sz="1110" spc="-1" strike="noStrike">
+                <a:solidFill>
+                  <a:srgbClr val="212121"/>
+                </a:solidFill>
+                <a:latin typeface="Fira Sans Book"/>
+              </a:rPr>
+              <a:t>Informatika</a:t>
             </a:r>
             <a:endParaRPr b="0" lang="en-US" sz="1110" spc="-1" strike="noStrike">
               <a:solidFill>
@@ -2162,6 +2895,11 @@
             </a:endParaRPr>
           </a:p>
           <a:p>
+            <a:pPr>
+              <a:lnSpc>
+                <a:spcPts val="1446"/>
+              </a:lnSpc>
+            </a:pPr>
             <a:r>
               <a:rPr b="0" lang="en-US" sz="1110" spc="-1" strike="noStrike">
                 <a:solidFill>
@@ -2169,7 +2907,133 @@
                 </a:solidFill>
                 <a:latin typeface="Fira Sans Book"/>
               </a:rPr>
-              <a:t>Sekolah Teknik Elektro dan Informatika, Institut Teknologi Bandung</a:t>
+              <a:t>Sekolah</a:t>
+            </a:r>
+            <a:r>
+              <a:rPr b="0" lang="en-US" sz="1110" spc="-32" strike="noStrike">
+                <a:solidFill>
+                  <a:srgbClr val="212121"/>
+                </a:solidFill>
+                <a:latin typeface="Fira Sans Book"/>
+              </a:rPr>
+              <a:t> </a:t>
+            </a:r>
+            <a:r>
+              <a:rPr b="0" lang="en-US" sz="1110" spc="-1" strike="noStrike">
+                <a:solidFill>
+                  <a:srgbClr val="212121"/>
+                </a:solidFill>
+                <a:latin typeface="Fira Sans Book"/>
+              </a:rPr>
+              <a:t>Teknik</a:t>
+            </a:r>
+            <a:r>
+              <a:rPr b="0" lang="en-US" sz="1110" spc="-32" strike="noStrike">
+                <a:solidFill>
+                  <a:srgbClr val="212121"/>
+                </a:solidFill>
+                <a:latin typeface="Fira Sans Book"/>
+              </a:rPr>
+              <a:t> </a:t>
+            </a:r>
+            <a:r>
+              <a:rPr b="0" lang="en-US" sz="1110" spc="-1" strike="noStrike">
+                <a:solidFill>
+                  <a:srgbClr val="212121"/>
+                </a:solidFill>
+                <a:latin typeface="Fira Sans Book"/>
+              </a:rPr>
+              <a:t>Elektro</a:t>
+            </a:r>
+            <a:r>
+              <a:rPr b="0" lang="en-US" sz="1110" spc="-32" strike="noStrike">
+                <a:solidFill>
+                  <a:srgbClr val="212121"/>
+                </a:solidFill>
+                <a:latin typeface="Fira Sans Book"/>
+              </a:rPr>
+              <a:t> </a:t>
+            </a:r>
+            <a:r>
+              <a:rPr b="0" lang="en-US" sz="1110" spc="-1" strike="noStrike">
+                <a:solidFill>
+                  <a:srgbClr val="212121"/>
+                </a:solidFill>
+                <a:latin typeface="Fira Sans Book"/>
+              </a:rPr>
+              <a:t>dan</a:t>
+            </a:r>
+            <a:r>
+              <a:rPr b="0" lang="en-US" sz="1110" spc="-32" strike="noStrike">
+                <a:solidFill>
+                  <a:srgbClr val="212121"/>
+                </a:solidFill>
+                <a:latin typeface="Fira Sans Book"/>
+              </a:rPr>
+              <a:t> </a:t>
+            </a:r>
+            <a:r>
+              <a:rPr b="0" lang="en-US" sz="1110" spc="-1" strike="noStrike">
+                <a:solidFill>
+                  <a:srgbClr val="212121"/>
+                </a:solidFill>
+                <a:latin typeface="Fira Sans Book"/>
+              </a:rPr>
+              <a:t>Informatika,</a:t>
+            </a:r>
+            <a:r>
+              <a:rPr b="0" lang="en-US" sz="1110" spc="-32" strike="noStrike">
+                <a:solidFill>
+                  <a:srgbClr val="212121"/>
+                </a:solidFill>
+                <a:latin typeface="Fira Sans Book"/>
+              </a:rPr>
+              <a:t> </a:t>
+            </a:r>
+            <a:r>
+              <a:rPr b="0" lang="en-US" sz="1110" spc="-1" strike="noStrike">
+                <a:solidFill>
+                  <a:srgbClr val="212121"/>
+                </a:solidFill>
+                <a:latin typeface="Fira Sans Book"/>
+              </a:rPr>
+              <a:t>Institut</a:t>
+            </a:r>
+            <a:r>
+              <a:rPr b="0" lang="en-US" sz="1110" spc="-32" strike="noStrike">
+                <a:solidFill>
+                  <a:srgbClr val="212121"/>
+                </a:solidFill>
+                <a:latin typeface="Fira Sans Book"/>
+              </a:rPr>
+              <a:t> </a:t>
+            </a:r>
+            <a:r>
+              <a:rPr b="0" lang="en-US" sz="1110" spc="-1" strike="noStrike">
+                <a:solidFill>
+                  <a:srgbClr val="212121"/>
+                </a:solidFill>
+                <a:latin typeface="Fira Sans Book"/>
+              </a:rPr>
+              <a:t>Teknologi</a:t>
+            </a:r>
+            <a:r>
+              <a:rPr b="0" lang="en-US" sz="1110" spc="-32" strike="noStrike">
+                <a:solidFill>
+                  <a:srgbClr val="212121"/>
+                </a:solidFill>
+                <a:latin typeface="Fira Sans Book"/>
+              </a:rPr>
+              <a:t> </a:t>
+            </a:r>
+            <a:r>
+              <a:rPr b="0" lang="en-US" sz="1110" spc="-1" strike="noStrike">
+                <a:solidFill>
+                  <a:srgbClr val="212121"/>
+                </a:solidFill>
+                <a:latin typeface="Fira Sans Book"/>
+              </a:rPr>
+              <a:t>Bandung</a:t>
             </a:r>
             <a:endParaRPr b="0" lang="en-US" sz="1110" spc="-1" strike="noStrike">
               <a:solidFill>
@@ -2194,15 +3058,8 @@
 </file>
 
 <file path=ppt/slides/slide10.xml><?xml version="1.0" encoding="utf-8"?>
-<p:sld xmlns:a="http://schemas.openxmlformats.org/drawingml/2006/main" xmlns:p="http://schemas.openxmlformats.org/presentationml/2006/main" xmlns:r="http://schemas.openxmlformats.org/officeDocument/2006/relationships" xmlns:p14="http://schemas.microsoft.com/office/powerpoint/2010/main" xmlns:p15="http://schemas.microsoft.com/office/powerpoint/2012/main" xmlns:mc="http://schemas.openxmlformats.org/markup-compatibility/2006" showMasterSp="0">
+<p:sld xmlns:a="http://schemas.openxmlformats.org/drawingml/2006/main" xmlns:p="http://schemas.openxmlformats.org/presentationml/2006/main" xmlns:r="http://schemas.openxmlformats.org/officeDocument/2006/relationships" xmlns:p14="http://schemas.microsoft.com/office/powerpoint/2010/main" xmlns:p15="http://schemas.microsoft.com/office/powerpoint/2012/main" xmlns:mc="http://schemas.openxmlformats.org/markup-compatibility/2006">
   <p:cSld>
-    <p:bg>
-      <p:bgPr>
-        <a:solidFill>
-          <a:srgbClr val="005aab"/>
-        </a:solidFill>
-      </p:bgPr>
-    </p:bg>
     <p:spTree>
       <p:nvGrpSpPr>
         <p:cNvPr id="1" name=""/>
@@ -2219,14 +3076,18 @@
       </p:grpSpPr>
       <p:sp>
         <p:nvSpPr>
-          <p:cNvPr id="130" name=""/>
-          <p:cNvSpPr txBox="1"/>
-          <p:nvPr/>
-        </p:nvSpPr>
-        <p:spPr>
-          <a:xfrm>
-            <a:off x="0" y="2268000"/>
-            <a:ext cx="9144000" cy="504000"/>
+          <p:cNvPr id="134" name="PlaceHolder 1"/>
+          <p:cNvSpPr>
+            <a:spLocks noGrp="1"/>
+          </p:cNvSpPr>
+          <p:nvPr>
+            <p:ph type="title"/>
+          </p:nvPr>
+        </p:nvSpPr>
+        <p:spPr>
+          <a:xfrm>
+            <a:off x="0" y="1980000"/>
+            <a:ext cx="9144000" cy="1080000"/>
           </a:xfrm>
           <a:prstGeom prst="rect">
             <a:avLst/>
@@ -2241,7 +3102,9 @@
             <a:noAutofit/>
           </a:bodyPr>
           <a:p>
-            <a:pPr algn="ctr"/>
+            <a:pPr indent="0" algn="ctr">
+              <a:buNone/>
+            </a:pPr>
             <a:r>
               <a:rPr b="1" lang="en-US" sz="2280" spc="-1" strike="noStrike">
                 <a:solidFill>
@@ -2257,6 +3120,69 @@
               </a:solidFill>
               <a:latin typeface="Fira Sans"/>
             </a:endParaRPr>
+          </a:p>
+        </p:txBody>
+      </p:sp>
+      <p:sp>
+        <p:nvSpPr>
+          <p:cNvPr id="135" name=""/>
+          <p:cNvSpPr txBox="1"/>
+          <p:nvPr/>
+        </p:nvSpPr>
+        <p:spPr>
+          <a:xfrm>
+            <a:off x="7588800" y="4906800"/>
+            <a:ext cx="1440000" cy="212400"/>
+          </a:xfrm>
+          <a:prstGeom prst="rect">
+            <a:avLst/>
+          </a:prstGeom>
+          <a:noFill/>
+          <a:ln w="0">
+            <a:noFill/>
+          </a:ln>
+        </p:spPr>
+        <p:txBody>
+          <a:bodyPr lIns="0" rIns="0" tIns="0" bIns="0" anchor="ctr">
+            <a:noAutofit/>
+          </a:bodyPr>
+          <a:p>
+            <a:pPr algn="r"/>
+            <a:r>
+              <a:rPr b="0" lang="en-US" sz="1110" spc="-1" strike="noStrike">
+                <a:solidFill>
+                  <a:srgbClr val="005aab"/>
+                </a:solidFill>
+                <a:latin typeface="Fira Sans Book"/>
+              </a:rPr>
+              <a:t>6/6</a:t>
+            </a:r>
+            <a:endParaRPr b="0" lang="en-US" sz="1110" spc="-1" strike="noStrike">
+              <a:solidFill>
+                <a:srgbClr val="005aab"/>
+              </a:solidFill>
+              <a:latin typeface="Fira Sans Book"/>
+            </a:endParaRPr>
+          </a:p>
+        </p:txBody>
+      </p:sp>
+      <p:sp>
+        <p:nvSpPr>
+          <p:cNvPr id="3" name="PlaceHolder 2"/>
+          <p:cNvSpPr>
+            <a:spLocks noGrp="1"/>
+          </p:cNvSpPr>
+          <p:nvPr>
+            <p:ph type="ftr" idx="3"/>
+          </p:nvPr>
+        </p:nvSpPr>
+        <p:spPr/>
+        <p:txBody>
+          <a:bodyPr/>
+          <a:p>
+            <a:r>
+              <a:t>Nama Anda · Judul Presentasi Anda · STEI ITB</a:t>
+            </a:r>
           </a:p>
         </p:txBody>
       </p:sp>
@@ -2292,7 +3218,7 @@
       </p:grpSpPr>
       <p:sp>
         <p:nvSpPr>
-          <p:cNvPr id="32" name="PlaceHolder 1"/>
+          <p:cNvPr id="40" name="PlaceHolder 1"/>
           <p:cNvSpPr>
             <a:spLocks noGrp="1"/>
           </p:cNvSpPr>
@@ -2341,7 +3267,7 @@
       </p:sp>
       <p:sp>
         <p:nvSpPr>
-          <p:cNvPr id="33" name=""/>
+          <p:cNvPr id="41" name=""/>
           <p:cNvSpPr/>
           <p:nvPr/>
         </p:nvSpPr>
@@ -2382,7 +3308,7 @@
       </p:sp>
       <p:sp>
         <p:nvSpPr>
-          <p:cNvPr id="34" name=""/>
+          <p:cNvPr id="42" name=""/>
           <p:cNvSpPr/>
           <p:nvPr/>
         </p:nvSpPr>
@@ -2413,10 +3339,15 @@
           <a:fontRef idx="minor"/>
         </p:style>
         <p:txBody>
-          <a:bodyPr lIns="100800" rIns="100800" tIns="0" bIns="0" anchor="ctr">
+          <a:bodyPr lIns="79200" rIns="79200" tIns="0" bIns="64800" anchor="ctr">
             <a:noAutofit/>
           </a:bodyPr>
           <a:p>
+            <a:pPr>
+              <a:lnSpc>
+                <a:spcPts val="2013"/>
+              </a:lnSpc>
+            </a:pPr>
             <a:r>
               <a:rPr b="0" lang="en-US" sz="1420" spc="-1" strike="noStrike">
                 <a:solidFill>
@@ -2437,7 +3368,7 @@
       </p:sp>
       <p:sp>
         <p:nvSpPr>
-          <p:cNvPr id="35" name=""/>
+          <p:cNvPr id="43" name=""/>
           <p:cNvSpPr/>
           <p:nvPr/>
         </p:nvSpPr>
@@ -2488,7 +3419,7 @@
       </p:sp>
       <p:sp>
         <p:nvSpPr>
-          <p:cNvPr id="36" name=""/>
+          <p:cNvPr id="44" name=""/>
           <p:cNvSpPr/>
           <p:nvPr/>
         </p:nvSpPr>
@@ -2519,10 +3450,15 @@
           <a:fontRef idx="minor"/>
         </p:style>
         <p:txBody>
-          <a:bodyPr lIns="100800" rIns="100800" tIns="0" bIns="0" anchor="ctr">
+          <a:bodyPr lIns="79200" rIns="79200" tIns="0" bIns="64800" anchor="ctr">
             <a:noAutofit/>
           </a:bodyPr>
           <a:p>
+            <a:pPr>
+              <a:lnSpc>
+                <a:spcPts val="2013"/>
+              </a:lnSpc>
+            </a:pPr>
             <a:r>
               <a:rPr b="0" lang="en-US" sz="1420" spc="-1" strike="noStrike">
                 <a:solidFill>
@@ -2530,7 +3466,43 @@
                 </a:solidFill>
                 <a:latin typeface="Fira Sans Book"/>
               </a:rPr>
-              <a:t>Masalah dan pertanyaan penelitian</a:t>
+              <a:t>Masalah</a:t>
+            </a:r>
+            <a:r>
+              <a:rPr b="0" lang="en-US" sz="1420" spc="111" strike="noStrike">
+                <a:solidFill>
+                  <a:srgbClr val="212121"/>
+                </a:solidFill>
+                <a:latin typeface="Fira Sans Book"/>
+              </a:rPr>
+              <a:t> </a:t>
+            </a:r>
+            <a:r>
+              <a:rPr b="0" lang="en-US" sz="1420" spc="-1" strike="noStrike">
+                <a:solidFill>
+                  <a:srgbClr val="212121"/>
+                </a:solidFill>
+                <a:latin typeface="Fira Sans Book"/>
+              </a:rPr>
+              <a:t>dan</a:t>
+            </a:r>
+            <a:r>
+              <a:rPr b="0" lang="en-US" sz="1420" spc="111" strike="noStrike">
+                <a:solidFill>
+                  <a:srgbClr val="212121"/>
+                </a:solidFill>
+                <a:latin typeface="Fira Sans Book"/>
+              </a:rPr>
+              <a:t> </a:t>
+            </a:r>
+            <a:r>
+              <a:rPr b="0" lang="en-US" sz="1420" spc="-1" strike="noStrike">
+                <a:solidFill>
+                  <a:srgbClr val="212121"/>
+                </a:solidFill>
+                <a:latin typeface="Fira Sans Book"/>
+              </a:rPr>
+              <a:t>pertanyaan</a:t>
             </a:r>
             <a:endParaRPr b="0" lang="en-US" sz="1420" spc="-1" strike="noStrike">
               <a:solidFill>
@@ -2539,11 +3511,33 @@
               <a:latin typeface="Fira Sans Book"/>
             </a:endParaRPr>
           </a:p>
-        </p:txBody>
-      </p:sp>
-      <p:sp>
-        <p:nvSpPr>
-          <p:cNvPr id="37" name=""/>
+          <a:p>
+            <a:pPr>
+              <a:lnSpc>
+                <a:spcPts val="2013"/>
+              </a:lnSpc>
+            </a:pPr>
+            <a:r>
+              <a:rPr b="0" lang="en-US" sz="1420" spc="-1" strike="noStrike">
+                <a:solidFill>
+                  <a:srgbClr val="212121"/>
+                </a:solidFill>
+                <a:latin typeface="Fira Sans Book"/>
+              </a:rPr>
+              <a:t>penelitian</a:t>
+            </a:r>
+            <a:endParaRPr b="0" lang="en-US" sz="1420" spc="-1" strike="noStrike">
+              <a:solidFill>
+                <a:srgbClr val="212121"/>
+              </a:solidFill>
+              <a:latin typeface="Fira Sans Book"/>
+            </a:endParaRPr>
+          </a:p>
+        </p:txBody>
+      </p:sp>
+      <p:sp>
+        <p:nvSpPr>
+          <p:cNvPr id="45" name=""/>
           <p:cNvSpPr/>
           <p:nvPr/>
         </p:nvSpPr>
@@ -2594,7 +3588,7 @@
       </p:sp>
       <p:sp>
         <p:nvSpPr>
-          <p:cNvPr id="38" name=""/>
+          <p:cNvPr id="46" name=""/>
           <p:cNvSpPr/>
           <p:nvPr/>
         </p:nvSpPr>
@@ -2625,10 +3619,15 @@
           <a:fontRef idx="minor"/>
         </p:style>
         <p:txBody>
-          <a:bodyPr lIns="100800" rIns="100800" tIns="0" bIns="0" anchor="ctr">
+          <a:bodyPr lIns="79200" rIns="79200" tIns="0" bIns="64800" anchor="ctr">
             <a:noAutofit/>
           </a:bodyPr>
           <a:p>
+            <a:pPr>
+              <a:lnSpc>
+                <a:spcPts val="2013"/>
+              </a:lnSpc>
+            </a:pPr>
             <a:r>
               <a:rPr b="0" lang="en-US" sz="1420" spc="-1" strike="noStrike">
                 <a:solidFill>
@@ -2649,7 +3648,7 @@
       </p:sp>
       <p:sp>
         <p:nvSpPr>
-          <p:cNvPr id="39" name=""/>
+          <p:cNvPr id="47" name=""/>
           <p:cNvSpPr/>
           <p:nvPr/>
         </p:nvSpPr>
@@ -2675,7 +3674,7 @@
           <a:fontRef idx="minor"/>
         </p:style>
         <p:txBody>
-          <a:bodyPr lIns="0" rIns="0" tIns="0" bIns="0" anchor="ctr">
+          <a:bodyPr lIns="0" rIns="0" tIns="0" bIns="39600" anchor="ctr">
             <a:noAutofit/>
           </a:bodyPr>
           <a:p>
@@ -2700,7 +3699,7 @@
       </p:sp>
       <p:sp>
         <p:nvSpPr>
-          <p:cNvPr id="40" name=""/>
+          <p:cNvPr id="48" name=""/>
           <p:cNvSpPr/>
           <p:nvPr/>
         </p:nvSpPr>
@@ -2731,10 +3730,15 @@
           <a:fontRef idx="minor"/>
         </p:style>
         <p:txBody>
-          <a:bodyPr lIns="100800" rIns="100800" tIns="0" bIns="0" anchor="ctr">
+          <a:bodyPr lIns="79200" rIns="79200" tIns="0" bIns="64800" anchor="ctr">
             <a:noAutofit/>
           </a:bodyPr>
           <a:p>
+            <a:pPr>
+              <a:lnSpc>
+                <a:spcPts val="2013"/>
+              </a:lnSpc>
+            </a:pPr>
             <a:r>
               <a:rPr b="0" lang="en-US" sz="1420" spc="-1" strike="noStrike">
                 <a:solidFill>
@@ -2755,7 +3759,7 @@
       </p:sp>
       <p:sp>
         <p:nvSpPr>
-          <p:cNvPr id="41" name=""/>
+          <p:cNvPr id="49" name=""/>
           <p:cNvSpPr/>
           <p:nvPr/>
         </p:nvSpPr>
@@ -2806,7 +3810,7 @@
       </p:sp>
       <p:sp>
         <p:nvSpPr>
-          <p:cNvPr id="42" name=""/>
+          <p:cNvPr id="50" name=""/>
           <p:cNvSpPr/>
           <p:nvPr/>
         </p:nvSpPr>
@@ -2837,10 +3841,15 @@
           <a:fontRef idx="minor"/>
         </p:style>
         <p:txBody>
-          <a:bodyPr lIns="100800" rIns="100800" tIns="0" bIns="0" anchor="ctr">
+          <a:bodyPr lIns="79200" rIns="79200" tIns="0" bIns="64800" anchor="ctr">
             <a:noAutofit/>
           </a:bodyPr>
           <a:p>
+            <a:pPr>
+              <a:lnSpc>
+                <a:spcPts val="2013"/>
+              </a:lnSpc>
+            </a:pPr>
             <a:r>
               <a:rPr b="0" lang="en-US" sz="1420" spc="-1" strike="noStrike">
                 <a:solidFill>
@@ -2861,7 +3870,7 @@
       </p:sp>
       <p:sp>
         <p:nvSpPr>
-          <p:cNvPr id="43" name=""/>
+          <p:cNvPr id="51" name=""/>
           <p:cNvSpPr/>
           <p:nvPr/>
         </p:nvSpPr>
@@ -2887,7 +3896,7 @@
           <a:fontRef idx="minor"/>
         </p:style>
         <p:txBody>
-          <a:bodyPr lIns="0" rIns="0" tIns="0" bIns="0" anchor="ctr">
+          <a:bodyPr lIns="0" rIns="0" tIns="0" bIns="39600" anchor="ctr">
             <a:noAutofit/>
           </a:bodyPr>
           <a:p>
@@ -2912,7 +3921,7 @@
       </p:sp>
       <p:sp>
         <p:nvSpPr>
-          <p:cNvPr id="44" name=""/>
+          <p:cNvPr id="52" name=""/>
           <p:cNvSpPr/>
           <p:nvPr/>
         </p:nvSpPr>
@@ -2943,10 +3952,15 @@
           <a:fontRef idx="minor"/>
         </p:style>
         <p:txBody>
-          <a:bodyPr lIns="100800" rIns="100800" tIns="0" bIns="0" anchor="ctr">
+          <a:bodyPr lIns="79200" rIns="79200" tIns="0" bIns="64800" anchor="ctr">
             <a:noAutofit/>
           </a:bodyPr>
           <a:p>
+            <a:pPr>
+              <a:lnSpc>
+                <a:spcPts val="2013"/>
+              </a:lnSpc>
+            </a:pPr>
             <a:r>
               <a:rPr b="0" lang="en-US" sz="1420" spc="-1" strike="noStrike">
                 <a:solidFill>
@@ -2967,7 +3981,7 @@
       </p:sp>
       <p:sp>
         <p:nvSpPr>
-          <p:cNvPr id="45" name=""/>
+          <p:cNvPr id="53" name=""/>
           <p:cNvSpPr/>
           <p:nvPr/>
         </p:nvSpPr>
@@ -3018,7 +4032,7 @@
       </p:sp>
       <p:sp>
         <p:nvSpPr>
-          <p:cNvPr id="46" name=""/>
+          <p:cNvPr id="54" name=""/>
           <p:cNvSpPr/>
           <p:nvPr/>
         </p:nvSpPr>
@@ -3049,10 +4063,15 @@
           <a:fontRef idx="minor"/>
         </p:style>
         <p:txBody>
-          <a:bodyPr lIns="100800" rIns="100800" tIns="0" bIns="0" anchor="ctr">
+          <a:bodyPr lIns="79200" rIns="79200" tIns="36000" bIns="64800" anchor="ctr">
             <a:noAutofit/>
           </a:bodyPr>
           <a:p>
+            <a:pPr>
+              <a:lnSpc>
+                <a:spcPts val="2013"/>
+              </a:lnSpc>
+            </a:pPr>
             <a:r>
               <a:rPr b="0" lang="en-US" sz="1420" spc="-1" strike="noStrike">
                 <a:solidFill>
@@ -3060,7 +4079,61 @@
                 </a:solidFill>
                 <a:latin typeface="Fira Sans Book"/>
               </a:rPr>
-              <a:t>Celah riset dan model</a:t>
+              <a:t>Celah</a:t>
+            </a:r>
+            <a:r>
+              <a:rPr b="0" lang="en-US" sz="1420" spc="111" strike="noStrike">
+                <a:solidFill>
+                  <a:srgbClr val="212121"/>
+                </a:solidFill>
+                <a:latin typeface="Fira Sans Book"/>
+              </a:rPr>
+              <a:t> </a:t>
+            </a:r>
+            <a:r>
+              <a:rPr b="0" lang="en-US" sz="1420" spc="-1" strike="noStrike">
+                <a:solidFill>
+                  <a:srgbClr val="212121"/>
+                </a:solidFill>
+                <a:latin typeface="Fira Sans Book"/>
+              </a:rPr>
+              <a:t>riset</a:t>
+            </a:r>
+            <a:r>
+              <a:rPr b="0" lang="en-US" sz="1420" spc="111" strike="noStrike">
+                <a:solidFill>
+                  <a:srgbClr val="212121"/>
+                </a:solidFill>
+                <a:latin typeface="Fira Sans Book"/>
+              </a:rPr>
+              <a:t> </a:t>
+            </a:r>
+            <a:r>
+              <a:rPr b="0" lang="en-US" sz="1420" spc="-1" strike="noStrike">
+                <a:solidFill>
+                  <a:srgbClr val="212121"/>
+                </a:solidFill>
+                <a:latin typeface="Fira Sans Book"/>
+              </a:rPr>
+              <a:t>dan</a:t>
+            </a:r>
+            <a:r>
+              <a:rPr b="0" lang="en-US" sz="1420" spc="111" strike="noStrike">
+                <a:solidFill>
+                  <a:srgbClr val="212121"/>
+                </a:solidFill>
+                <a:latin typeface="Fira Sans Book"/>
+              </a:rPr>
+              <a:t> </a:t>
+            </a:r>
+            <a:r>
+              <a:rPr b="0" lang="en-US" sz="1420" spc="-1" strike="noStrike">
+                <a:solidFill>
+                  <a:srgbClr val="212121"/>
+                </a:solidFill>
+                <a:latin typeface="Fira Sans Book"/>
+              </a:rPr>
+              <a:t>model</a:t>
             </a:r>
             <a:endParaRPr b="0" lang="en-US" sz="1420" spc="-1" strike="noStrike">
               <a:solidFill>
@@ -3073,7 +4146,7 @@
       </p:sp>
       <p:sp>
         <p:nvSpPr>
-          <p:cNvPr id="47" name=""/>
+          <p:cNvPr id="55" name=""/>
           <p:cNvSpPr/>
           <p:nvPr/>
         </p:nvSpPr>
@@ -3099,7 +4172,7 @@
           <a:fontRef idx="minor"/>
         </p:style>
         <p:txBody>
-          <a:bodyPr lIns="0" rIns="0" tIns="0" bIns="0" anchor="ctr">
+          <a:bodyPr lIns="0" rIns="0" tIns="0" bIns="39600" anchor="ctr">
             <a:noAutofit/>
           </a:bodyPr>
           <a:p>
@@ -3124,7 +4197,7 @@
       </p:sp>
       <p:sp>
         <p:nvSpPr>
-          <p:cNvPr id="48" name=""/>
+          <p:cNvPr id="56" name=""/>
           <p:cNvSpPr/>
           <p:nvPr/>
         </p:nvSpPr>
@@ -3155,10 +4228,15 @@
           <a:fontRef idx="minor"/>
         </p:style>
         <p:txBody>
-          <a:bodyPr lIns="100800" rIns="100800" tIns="0" bIns="0" anchor="ctr">
+          <a:bodyPr lIns="79200" rIns="79200" tIns="0" bIns="64800" anchor="ctr">
             <a:noAutofit/>
           </a:bodyPr>
           <a:p>
+            <a:pPr>
+              <a:lnSpc>
+                <a:spcPts val="2013"/>
+              </a:lnSpc>
+            </a:pPr>
             <a:r>
               <a:rPr b="0" lang="en-US" sz="1420" spc="-1" strike="noStrike">
                 <a:solidFill>
@@ -3166,7 +4244,61 @@
                 </a:solidFill>
                 <a:latin typeface="Fira Sans Book"/>
               </a:rPr>
-              <a:t>Validitas dan langkah berikutnya</a:t>
+              <a:t>Validitas</a:t>
+            </a:r>
+            <a:r>
+              <a:rPr b="0" lang="en-US" sz="1420" spc="120" strike="noStrike">
+                <a:solidFill>
+                  <a:srgbClr val="212121"/>
+                </a:solidFill>
+                <a:latin typeface="Fira Sans Book"/>
+              </a:rPr>
+              <a:t> </a:t>
+            </a:r>
+            <a:r>
+              <a:rPr b="0" lang="en-US" sz="1420" spc="-1" strike="noStrike">
+                <a:solidFill>
+                  <a:srgbClr val="212121"/>
+                </a:solidFill>
+                <a:latin typeface="Fira Sans Book"/>
+              </a:rPr>
+              <a:t>dan</a:t>
+            </a:r>
+            <a:r>
+              <a:rPr b="0" lang="en-US" sz="1420" spc="120" strike="noStrike">
+                <a:solidFill>
+                  <a:srgbClr val="212121"/>
+                </a:solidFill>
+                <a:latin typeface="Fira Sans Book"/>
+              </a:rPr>
+              <a:t> </a:t>
+            </a:r>
+            <a:r>
+              <a:rPr b="0" lang="en-US" sz="1420" spc="-1" strike="noStrike">
+                <a:solidFill>
+                  <a:srgbClr val="212121"/>
+                </a:solidFill>
+                <a:latin typeface="Fira Sans Book"/>
+              </a:rPr>
+              <a:t>langkah</a:t>
+            </a:r>
+            <a:r>
+              <a:rPr b="0" lang="en-US" sz="1420" spc="120" strike="noStrike">
+                <a:solidFill>
+                  <a:srgbClr val="212121"/>
+                </a:solidFill>
+                <a:latin typeface="Fira Sans Book"/>
+              </a:rPr>
+              <a:t> </a:t>
+            </a:r>
+            <a:r>
+              <a:rPr b="0" lang="en-US" sz="1420" spc="-1" strike="noStrike">
+                <a:solidFill>
+                  <a:srgbClr val="212121"/>
+                </a:solidFill>
+                <a:latin typeface="Fira Sans Book"/>
+              </a:rPr>
+              <a:t>berikutnya</a:t>
             </a:r>
             <a:endParaRPr b="0" lang="en-US" sz="1420" spc="-1" strike="noStrike">
               <a:solidFill>
@@ -3179,7 +4311,7 @@
       </p:sp>
       <p:sp>
         <p:nvSpPr>
-          <p:cNvPr id="49" name=""/>
+          <p:cNvPr id="57" name=""/>
           <p:cNvSpPr/>
           <p:nvPr/>
         </p:nvSpPr>
@@ -3224,6 +4356,49 @@
                 <a:srgbClr val="ffffff"/>
               </a:solidFill>
               <a:latin typeface="Fira Sans"/>
+            </a:endParaRPr>
+          </a:p>
+        </p:txBody>
+      </p:sp>
+      <p:sp>
+        <p:nvSpPr>
+          <p:cNvPr id="58" name=""/>
+          <p:cNvSpPr txBox="1"/>
+          <p:nvPr/>
+        </p:nvSpPr>
+        <p:spPr>
+          <a:xfrm>
+            <a:off x="7588800" y="4906800"/>
+            <a:ext cx="1440000" cy="212400"/>
+          </a:xfrm>
+          <a:prstGeom prst="rect">
+            <a:avLst/>
+          </a:prstGeom>
+          <a:noFill/>
+          <a:ln w="0">
+            <a:noFill/>
+          </a:ln>
+        </p:spPr>
+        <p:txBody>
+          <a:bodyPr lIns="0" rIns="0" tIns="0" bIns="0" anchor="ctr">
+            <a:noAutofit/>
+          </a:bodyPr>
+          <a:p>
+            <a:pPr algn="r"/>
+            <a:r>
+              <a:rPr b="0" lang="en-US" sz="1110" spc="-1" strike="noStrike">
+                <a:solidFill>
+                  <a:srgbClr val="005aab"/>
+                </a:solidFill>
+                <a:latin typeface="Fira Sans Book"/>
+              </a:rPr>
+              <a:t>1/6</a:t>
+            </a:r>
+            <a:endParaRPr b="0" lang="en-US" sz="1110" spc="-1" strike="noStrike">
+              <a:solidFill>
+                <a:srgbClr val="005aab"/>
+              </a:solidFill>
+              <a:latin typeface="Fira Sans Book"/>
             </a:endParaRPr>
           </a:p>
         </p:txBody>
@@ -3245,26 +4420,6 @@
             <a:r>
               <a:t>Nama Anda · Judul Presentasi Anda · STEI ITB</a:t>
             </a:r>
-          </a:p>
-        </p:txBody>
-      </p:sp>
-      <p:sp>
-        <p:nvSpPr>
-          <p:cNvPr id="4" name="PlaceHolder 3"/>
-          <p:cNvSpPr>
-            <a:spLocks noGrp="1"/>
-          </p:cNvSpPr>
-          <p:nvPr>
-            <p:ph type="sldNum" idx="2"/>
-          </p:nvPr>
-        </p:nvSpPr>
-        <p:spPr/>
-        <p:txBody>
-          <a:bodyPr/>
-          <a:p>
-            <a:fld id="{8A53F8CD-061D-4B0E-B18C-A685ED716F2D}" type="slidenum">
-              <a:t>2</a:t>
-            </a:fld>
           </a:p>
         </p:txBody>
       </p:sp>
@@ -3300,7 +4455,7 @@
       </p:grpSpPr>
       <p:sp>
         <p:nvSpPr>
-          <p:cNvPr id="50" name=""/>
+          <p:cNvPr id="59" name=""/>
           <p:cNvSpPr txBox="1"/>
           <p:nvPr/>
         </p:nvSpPr>
@@ -3343,7 +4498,7 @@
       </p:sp>
       <p:sp>
         <p:nvSpPr>
-          <p:cNvPr id="51" name=""/>
+          <p:cNvPr id="60" name=""/>
           <p:cNvSpPr txBox="1"/>
           <p:nvPr/>
         </p:nvSpPr>
@@ -3386,7 +4541,7 @@
       </p:sp>
       <p:sp>
         <p:nvSpPr>
-          <p:cNvPr id="52" name="PlaceHolder 1"/>
+          <p:cNvPr id="61" name="PlaceHolder 1"/>
           <p:cNvSpPr>
             <a:spLocks noGrp="1"/>
           </p:cNvSpPr>
@@ -3422,7 +4577,25 @@
                 </a:solidFill>
                 <a:latin typeface="Fira Sans"/>
               </a:rPr>
-              <a:t>Latar belakang</a:t>
+              <a:t>Latar</a:t>
+            </a:r>
+            <a:r>
+              <a:rPr b="1" lang="en-US" sz="2730" spc="310" strike="noStrike">
+                <a:solidFill>
+                  <a:srgbClr val="003d75"/>
+                </a:solidFill>
+                <a:latin typeface="Fira Sans"/>
+              </a:rPr>
+              <a:t> </a:t>
+            </a:r>
+            <a:r>
+              <a:rPr b="1" lang="en-US" sz="2730" spc="-1" strike="noStrike">
+                <a:solidFill>
+                  <a:srgbClr val="003d75"/>
+                </a:solidFill>
+                <a:latin typeface="Fira Sans"/>
+              </a:rPr>
+              <a:t>belakang</a:t>
             </a:r>
             <a:endParaRPr b="1" lang="en-US" sz="2730" spc="-1" strike="noStrike">
               <a:solidFill>
@@ -3465,7 +4638,7 @@
       </p:grpSpPr>
       <p:sp>
         <p:nvSpPr>
-          <p:cNvPr id="53" name="PlaceHolder 1"/>
+          <p:cNvPr id="62" name="PlaceHolder 1"/>
           <p:cNvSpPr>
             <a:spLocks noGrp="1"/>
           </p:cNvSpPr>
@@ -3514,7 +4687,7 @@
       </p:sp>
       <p:sp>
         <p:nvSpPr>
-          <p:cNvPr id="54" name=""/>
+          <p:cNvPr id="63" name=""/>
           <p:cNvSpPr/>
           <p:nvPr/>
         </p:nvSpPr>
@@ -3555,7 +4728,7 @@
       </p:sp>
       <p:sp>
         <p:nvSpPr>
-          <p:cNvPr id="55" name="PlaceHolder 2"/>
+          <p:cNvPr id="64" name="PlaceHolder 2"/>
           <p:cNvSpPr>
             <a:spLocks noGrp="1"/>
           </p:cNvSpPr>
@@ -3581,14 +4754,14 @@
             <a:noAutofit/>
           </a:bodyPr>
           <a:p>
-            <a:pPr marL="255600" indent="-255600">
+            <a:pPr marL="255600" indent="-244800">
               <a:spcAft>
                 <a:spcPts val="595"/>
               </a:spcAft>
               <a:buClr>
                 <a:srgbClr val="4b75ba"/>
               </a:buClr>
-              <a:buSzPct val="62000"/>
+              <a:buSzPct val="80000"/>
               <a:buFont typeface="DejaVu Sans"/>
               <a:buChar char="▶"/>
             </a:pPr>
@@ -3645,14 +4818,14 @@
             </a:endParaRPr>
           </a:p>
           <a:p>
-            <a:pPr marL="255600" indent="-255600">
+            <a:pPr marL="255600" indent="-244800">
               <a:spcAft>
                 <a:spcPts val="595"/>
               </a:spcAft>
               <a:buClr>
                 <a:srgbClr val="4b75ba"/>
               </a:buClr>
-              <a:buSzPct val="62000"/>
+              <a:buSzPct val="80000"/>
               <a:buFont typeface="DejaVu Sans"/>
               <a:buChar char="▶"/>
             </a:pPr>
@@ -3693,7 +4866,7 @@
           <a:p>
             <a:pPr lvl="1" marL="658800" indent="-244800">
               <a:spcAft>
-                <a:spcPts val="567"/>
+                <a:spcPts val="879"/>
               </a:spcAft>
               <a:buClr>
                 <a:srgbClr val="e8a317"/>
@@ -3718,14 +4891,14 @@
             </a:endParaRPr>
           </a:p>
           <a:p>
-            <a:pPr marL="255600" indent="-255600">
+            <a:pPr marL="255600" indent="-244800">
               <a:spcAft>
                 <a:spcPts val="595"/>
               </a:spcAft>
               <a:buClr>
                 <a:srgbClr val="4b75ba"/>
               </a:buClr>
-              <a:buSzPct val="62000"/>
+              <a:buSzPct val="80000"/>
               <a:buFont typeface="DejaVu Sans"/>
               <a:buChar char="▶"/>
             </a:pPr>
@@ -3749,7 +4922,7 @@
       </p:sp>
       <p:sp>
         <p:nvSpPr>
-          <p:cNvPr id="56" name=""/>
+          <p:cNvPr id="65" name=""/>
           <p:cNvSpPr txBox="1"/>
           <p:nvPr/>
         </p:nvSpPr>
@@ -3778,7 +4951,97 @@
                 </a:solidFill>
                 <a:latin typeface="Fira Sans Book"/>
               </a:rPr>
-              <a:t>Sumber: Penulis, Tahun; Penulis lain, Tahun</a:t>
+              <a:t>Sumber:</a:t>
+            </a:r>
+            <a:r>
+              <a:rPr b="0" lang="en-US" sz="1110" spc="-29" strike="noStrike">
+                <a:solidFill>
+                  <a:srgbClr val="4a5360"/>
+                </a:solidFill>
+                <a:latin typeface="Fira Sans Book"/>
+              </a:rPr>
+              <a:t> </a:t>
+            </a:r>
+            <a:r>
+              <a:rPr b="0" lang="en-US" sz="1110" spc="-1" strike="noStrike">
+                <a:solidFill>
+                  <a:srgbClr val="4a5360"/>
+                </a:solidFill>
+                <a:latin typeface="Fira Sans Book"/>
+              </a:rPr>
+              <a:t>Penulis,</a:t>
+            </a:r>
+            <a:r>
+              <a:rPr b="0" lang="en-US" sz="1110" spc="-29" strike="noStrike">
+                <a:solidFill>
+                  <a:srgbClr val="4a5360"/>
+                </a:solidFill>
+                <a:latin typeface="Fira Sans Book"/>
+              </a:rPr>
+              <a:t> </a:t>
+            </a:r>
+            <a:r>
+              <a:rPr b="0" lang="en-US" sz="1110" spc="-1" strike="noStrike">
+                <a:solidFill>
+                  <a:srgbClr val="4a5360"/>
+                </a:solidFill>
+                <a:latin typeface="Fira Sans Book"/>
+              </a:rPr>
+              <a:t>Tahun;</a:t>
+            </a:r>
+            <a:r>
+              <a:rPr b="0" lang="en-US" sz="1110" spc="-29" strike="noStrike">
+                <a:solidFill>
+                  <a:srgbClr val="4a5360"/>
+                </a:solidFill>
+                <a:latin typeface="Fira Sans Book"/>
+              </a:rPr>
+              <a:t> </a:t>
+            </a:r>
+            <a:r>
+              <a:rPr b="0" lang="en-US" sz="1110" spc="-1" strike="noStrike">
+                <a:solidFill>
+                  <a:srgbClr val="4a5360"/>
+                </a:solidFill>
+                <a:latin typeface="Fira Sans Book"/>
+              </a:rPr>
+              <a:t>Penulis</a:t>
+            </a:r>
+            <a:r>
+              <a:rPr b="0" lang="en-US" sz="1110" spc="-29" strike="noStrike">
+                <a:solidFill>
+                  <a:srgbClr val="4a5360"/>
+                </a:solidFill>
+                <a:latin typeface="Fira Sans Book"/>
+              </a:rPr>
+              <a:t> </a:t>
+            </a:r>
+            <a:r>
+              <a:rPr b="0" lang="en-US" sz="1110" spc="-1" strike="noStrike">
+                <a:solidFill>
+                  <a:srgbClr val="4a5360"/>
+                </a:solidFill>
+                <a:latin typeface="Fira Sans Book"/>
+              </a:rPr>
+              <a:t>lain,</a:t>
+            </a:r>
+            <a:r>
+              <a:rPr b="0" lang="en-US" sz="1110" spc="-29" strike="noStrike">
+                <a:solidFill>
+                  <a:srgbClr val="4a5360"/>
+                </a:solidFill>
+                <a:latin typeface="Fira Sans Book"/>
+              </a:rPr>
+              <a:t> </a:t>
+            </a:r>
+            <a:r>
+              <a:rPr b="0" lang="en-US" sz="1110" spc="-1" strike="noStrike">
+                <a:solidFill>
+                  <a:srgbClr val="4a5360"/>
+                </a:solidFill>
+                <a:latin typeface="Fira Sans Book"/>
+              </a:rPr>
+              <a:t>Tahun</a:t>
             </a:r>
             <a:endParaRPr b="0" lang="en-US" sz="1110" spc="-1" strike="noStrike">
               <a:solidFill>
@@ -3791,7 +5054,7 @@
       </p:sp>
       <p:grpSp>
         <p:nvGrpSpPr>
-          <p:cNvPr id="57" name=""/>
+          <p:cNvPr id="66" name=""/>
           <p:cNvGrpSpPr/>
           <p:nvPr/>
         </p:nvGrpSpPr>
@@ -3805,7 +5068,7 @@
         </p:grpSpPr>
         <p:sp>
           <p:nvSpPr>
-            <p:cNvPr id="58" name=""/>
+            <p:cNvPr id="67" name=""/>
             <p:cNvSpPr/>
             <p:nvPr/>
           </p:nvSpPr>
@@ -3855,7 +5118,7 @@
         </p:sp>
         <p:sp>
           <p:nvSpPr>
-            <p:cNvPr id="59" name=""/>
+            <p:cNvPr id="68" name=""/>
             <p:cNvSpPr/>
             <p:nvPr/>
           </p:nvSpPr>
@@ -3906,6 +5169,49 @@
       </p:grpSp>
       <p:sp>
         <p:nvSpPr>
+          <p:cNvPr id="69" name=""/>
+          <p:cNvSpPr txBox="1"/>
+          <p:nvPr/>
+        </p:nvSpPr>
+        <p:spPr>
+          <a:xfrm>
+            <a:off x="7588800" y="4906800"/>
+            <a:ext cx="1440000" cy="212400"/>
+          </a:xfrm>
+          <a:prstGeom prst="rect">
+            <a:avLst/>
+          </a:prstGeom>
+          <a:noFill/>
+          <a:ln w="0">
+            <a:noFill/>
+          </a:ln>
+        </p:spPr>
+        <p:txBody>
+          <a:bodyPr lIns="0" rIns="0" tIns="0" bIns="0" anchor="ctr">
+            <a:noAutofit/>
+          </a:bodyPr>
+          <a:p>
+            <a:pPr algn="r"/>
+            <a:r>
+              <a:rPr b="0" lang="en-US" sz="1110" spc="-1" strike="noStrike">
+                <a:solidFill>
+                  <a:srgbClr val="005aab"/>
+                </a:solidFill>
+                <a:latin typeface="Fira Sans Book"/>
+              </a:rPr>
+              <a:t>2/6</a:t>
+            </a:r>
+            <a:endParaRPr b="0" lang="en-US" sz="1110" spc="-1" strike="noStrike">
+              <a:solidFill>
+                <a:srgbClr val="005aab"/>
+              </a:solidFill>
+              <a:latin typeface="Fira Sans Book"/>
+            </a:endParaRPr>
+          </a:p>
+        </p:txBody>
+      </p:sp>
+      <p:sp>
+        <p:nvSpPr>
           <p:cNvPr id="4" name="PlaceHolder 3"/>
           <p:cNvSpPr>
             <a:spLocks noGrp="1"/>
@@ -3921,26 +5227,6 @@
             <a:r>
               <a:t>Nama Anda · Judul Presentasi Anda · STEI ITB</a:t>
             </a:r>
-          </a:p>
-        </p:txBody>
-      </p:sp>
-      <p:sp>
-        <p:nvSpPr>
-          <p:cNvPr id="5" name="PlaceHolder 4"/>
-          <p:cNvSpPr>
-            <a:spLocks noGrp="1"/>
-          </p:cNvSpPr>
-          <p:nvPr>
-            <p:ph type="sldNum" idx="2"/>
-          </p:nvPr>
-        </p:nvSpPr>
-        <p:spPr/>
-        <p:txBody>
-          <a:bodyPr/>
-          <a:p>
-            <a:fld id="{33B1849A-B7B3-411A-9924-2A70E11524E3}" type="slidenum">
-              <a:t>4</a:t>
-            </a:fld>
           </a:p>
         </p:txBody>
       </p:sp>
@@ -3976,7 +5262,7 @@
       </p:grpSpPr>
       <p:sp>
         <p:nvSpPr>
-          <p:cNvPr id="60" name="PlaceHolder 1"/>
+          <p:cNvPr id="70" name="PlaceHolder 1"/>
           <p:cNvSpPr>
             <a:spLocks noGrp="1"/>
           </p:cNvSpPr>
@@ -4025,7 +5311,7 @@
       </p:sp>
       <p:sp>
         <p:nvSpPr>
-          <p:cNvPr id="61" name=""/>
+          <p:cNvPr id="71" name=""/>
           <p:cNvSpPr/>
           <p:nvPr/>
         </p:nvSpPr>
@@ -4066,7 +5352,7 @@
       </p:sp>
       <p:grpSp>
         <p:nvGrpSpPr>
-          <p:cNvPr id="62" name=""/>
+          <p:cNvPr id="72" name=""/>
           <p:cNvGrpSpPr/>
           <p:nvPr/>
         </p:nvGrpSpPr>
@@ -4080,7 +5366,7 @@
         </p:grpSpPr>
         <p:sp>
           <p:nvSpPr>
-            <p:cNvPr id="63" name=""/>
+            <p:cNvPr id="73" name=""/>
             <p:cNvSpPr/>
             <p:nvPr/>
           </p:nvSpPr>
@@ -4111,10 +5397,15 @@
             <a:fontRef idx="minor"/>
           </p:style>
           <p:txBody>
-            <a:bodyPr lIns="100800" rIns="100800" tIns="72000" bIns="36000" anchor="t">
+            <a:bodyPr lIns="79200" rIns="79200" tIns="32400" bIns="36000" anchor="t">
               <a:noAutofit/>
             </a:bodyPr>
             <a:p>
+              <a:pPr>
+                <a:lnSpc>
+                  <a:spcPts val="1701"/>
+                </a:lnSpc>
+              </a:pPr>
               <a:r>
                 <a:rPr b="0" lang="en-US" sz="1270" spc="-1" strike="noStrike">
                   <a:solidFill>
@@ -4122,7 +5413,70 @@
                   </a:solidFill>
                   <a:latin typeface="Fira Sans Book"/>
                 </a:rPr>
-                <a:t>Isi kartu pertama. Pakai </a:t>
+                <a:t>Isi</a:t>
+              </a:r>
+              <a:r>
+                <a:rPr b="0" lang="en-US" sz="1270" spc="94" strike="noStrike">
+                  <a:solidFill>
+                    <a:srgbClr val="212121"/>
+                  </a:solidFill>
+                  <a:latin typeface="Fira Sans Book"/>
+                </a:rPr>
+                <a:t> </a:t>
+              </a:r>
+              <a:r>
+                <a:rPr b="0" lang="en-US" sz="1270" spc="-1" strike="noStrike">
+                  <a:solidFill>
+                    <a:srgbClr val="212121"/>
+                  </a:solidFill>
+                  <a:latin typeface="Fira Sans Book"/>
+                </a:rPr>
+                <a:t>kartu</a:t>
+              </a:r>
+              <a:r>
+                <a:rPr b="0" lang="en-US" sz="1270" spc="94" strike="noStrike">
+                  <a:solidFill>
+                    <a:srgbClr val="212121"/>
+                  </a:solidFill>
+                  <a:latin typeface="Fira Sans Book"/>
+                </a:rPr>
+                <a:t> </a:t>
+              </a:r>
+              <a:r>
+                <a:rPr b="0" lang="en-US" sz="1270" spc="-1" strike="noStrike">
+                  <a:solidFill>
+                    <a:srgbClr val="212121"/>
+                  </a:solidFill>
+                  <a:latin typeface="Fira Sans Book"/>
+                </a:rPr>
+                <a:t>pertama.</a:t>
+              </a:r>
+              <a:r>
+                <a:rPr b="0" lang="en-US" sz="1270" spc="94" strike="noStrike">
+                  <a:solidFill>
+                    <a:srgbClr val="212121"/>
+                  </a:solidFill>
+                  <a:latin typeface="Fira Sans Book"/>
+                </a:rPr>
+                <a:t> </a:t>
+              </a:r>
+              <a:r>
+                <a:rPr b="0" lang="en-US" sz="1270" spc="-1" strike="noStrike">
+                  <a:solidFill>
+                    <a:srgbClr val="212121"/>
+                  </a:solidFill>
+                  <a:latin typeface="Fira Sans Book"/>
+                </a:rPr>
+                <a:t>Pakai</a:t>
+              </a:r>
+              <a:r>
+                <a:rPr b="0" lang="en-US" sz="1270" spc="94" strike="noStrike">
+                  <a:solidFill>
+                    <a:srgbClr val="212121"/>
+                  </a:solidFill>
+                  <a:latin typeface="Fira Sans Book"/>
+                </a:rPr>
+                <a:t> </a:t>
               </a:r>
               <a:r>
                 <a:rPr b="1" lang="en-US" sz="1270" spc="-1" strike="noStrike">
@@ -4134,13 +5488,76 @@
                 <a:t>tebal</a:t>
               </a:r>
               <a:r>
+                <a:rPr b="0" lang="en-US" sz="1270" spc="94" strike="noStrike">
+                  <a:solidFill>
+                    <a:srgbClr val="212121"/>
+                  </a:solidFill>
+                  <a:latin typeface="Fira Sans Book"/>
+                </a:rPr>
+                <a:t> </a:t>
+              </a:r>
+              <a:r>
                 <a:rPr b="0" lang="en-US" sz="1270" spc="-1" strike="noStrike">
                   <a:solidFill>
                     <a:srgbClr val="212121"/>
                   </a:solidFill>
                   <a:latin typeface="Fira Sans Book"/>
                 </a:rPr>
-                <a:t> untuk kata yang penting.</a:t>
+                <a:t>untuk</a:t>
+              </a:r>
+              <a:r>
+                <a:rPr b="0" lang="en-US" sz="1270" spc="94" strike="noStrike">
+                  <a:solidFill>
+                    <a:srgbClr val="212121"/>
+                  </a:solidFill>
+                  <a:latin typeface="Fira Sans Book"/>
+                </a:rPr>
+                <a:t> </a:t>
+              </a:r>
+              <a:r>
+                <a:rPr b="0" lang="en-US" sz="1270" spc="-1" strike="noStrike">
+                  <a:solidFill>
+                    <a:srgbClr val="212121"/>
+                  </a:solidFill>
+                  <a:latin typeface="Fira Sans Book"/>
+                </a:rPr>
+                <a:t>kata</a:t>
+              </a:r>
+              <a:r>
+                <a:rPr b="0" lang="en-US" sz="1270" spc="94" strike="noStrike">
+                  <a:solidFill>
+                    <a:srgbClr val="212121"/>
+                  </a:solidFill>
+                  <a:latin typeface="Fira Sans Book"/>
+                </a:rPr>
+                <a:t> </a:t>
+              </a:r>
+              <a:r>
+                <a:rPr b="0" lang="en-US" sz="1270" spc="-1" strike="noStrike">
+                  <a:solidFill>
+                    <a:srgbClr val="212121"/>
+                  </a:solidFill>
+                  <a:latin typeface="Fira Sans Book"/>
+                </a:rPr>
+                <a:t>yang</a:t>
+              </a:r>
+              <a:r>
+                <a:rPr b="0" lang="en-US" sz="1270" spc="94" strike="noStrike">
+                  <a:solidFill>
+                    <a:srgbClr val="212121"/>
+                  </a:solidFill>
+                  <a:latin typeface="Fira Sans Book"/>
+                </a:rPr>
+                <a:t> </a:t>
+              </a:r>
+              <a:r>
+                <a:rPr b="0" lang="en-US" sz="1270" spc="-1" strike="noStrike">
+                  <a:solidFill>
+                    <a:srgbClr val="212121"/>
+                  </a:solidFill>
+                  <a:latin typeface="Fira Sans Book"/>
+                </a:rPr>
+                <a:t>pen­ting.</a:t>
               </a:r>
               <a:endParaRPr b="0" lang="en-US" sz="1270" spc="-1" strike="noStrike">
                 <a:solidFill>
@@ -4153,7 +5570,7 @@
         </p:sp>
         <p:sp>
           <p:nvSpPr>
-            <p:cNvPr id="64" name=""/>
+            <p:cNvPr id="74" name=""/>
             <p:cNvSpPr/>
             <p:nvPr/>
           </p:nvSpPr>
@@ -4181,7 +5598,7 @@
             <a:fontRef idx="minor"/>
           </p:style>
           <p:txBody>
-            <a:bodyPr lIns="61200" rIns="61200" tIns="0" bIns="0" anchor="ctr">
+            <a:bodyPr lIns="39600" rIns="39600" tIns="0" bIns="0" anchor="ctr">
               <a:noAutofit/>
             </a:bodyPr>
             <a:p>
@@ -4206,7 +5623,7 @@
       </p:grpSp>
       <p:grpSp>
         <p:nvGrpSpPr>
-          <p:cNvPr id="65" name=""/>
+          <p:cNvPr id="75" name=""/>
           <p:cNvGrpSpPr/>
           <p:nvPr/>
         </p:nvGrpSpPr>
@@ -4220,7 +5637,7 @@
         </p:grpSpPr>
         <p:sp>
           <p:nvSpPr>
-            <p:cNvPr id="66" name=""/>
+            <p:cNvPr id="76" name=""/>
             <p:cNvSpPr/>
             <p:nvPr/>
           </p:nvSpPr>
@@ -4251,10 +5668,15 @@
             <a:fontRef idx="minor"/>
           </p:style>
           <p:txBody>
-            <a:bodyPr lIns="100800" rIns="100800" tIns="72000" bIns="36000" anchor="t">
+            <a:bodyPr lIns="79200" rIns="79200" tIns="32400" bIns="36000" anchor="t">
               <a:noAutofit/>
             </a:bodyPr>
             <a:p>
+              <a:pPr>
+                <a:lnSpc>
+                  <a:spcPts val="1701"/>
+                </a:lnSpc>
+              </a:pPr>
               <a:r>
                 <a:rPr b="0" lang="en-US" sz="1270" spc="-1" strike="noStrike">
                   <a:solidFill>
@@ -4262,7 +5684,133 @@
                   </a:solidFill>
                   <a:latin typeface="Fira Sans Book"/>
                 </a:rPr>
-                <a:t>Kartu dengan kepala emas untuk konteks atau catatan.</a:t>
+                <a:t>Kartu</a:t>
+              </a:r>
+              <a:r>
+                <a:rPr b="0" lang="en-US" sz="1270" spc="63" strike="noStrike">
+                  <a:solidFill>
+                    <a:srgbClr val="212121"/>
+                  </a:solidFill>
+                  <a:latin typeface="Fira Sans Book"/>
+                </a:rPr>
+                <a:t> </a:t>
+              </a:r>
+              <a:r>
+                <a:rPr b="0" lang="en-US" sz="1270" spc="-1" strike="noStrike">
+                  <a:solidFill>
+                    <a:srgbClr val="212121"/>
+                  </a:solidFill>
+                  <a:latin typeface="Fira Sans Book"/>
+                </a:rPr>
+                <a:t>dengan</a:t>
+              </a:r>
+              <a:r>
+                <a:rPr b="0" lang="en-US" sz="1270" spc="63" strike="noStrike">
+                  <a:solidFill>
+                    <a:srgbClr val="212121"/>
+                  </a:solidFill>
+                  <a:latin typeface="Fira Sans Book"/>
+                </a:rPr>
+                <a:t> </a:t>
+              </a:r>
+              <a:r>
+                <a:rPr b="0" lang="en-US" sz="1270" spc="-1" strike="noStrike">
+                  <a:solidFill>
+                    <a:srgbClr val="212121"/>
+                  </a:solidFill>
+                  <a:latin typeface="Fira Sans Book"/>
+                </a:rPr>
+                <a:t>kepala</a:t>
+              </a:r>
+              <a:r>
+                <a:rPr b="0" lang="en-US" sz="1270" spc="63" strike="noStrike">
+                  <a:solidFill>
+                    <a:srgbClr val="212121"/>
+                  </a:solidFill>
+                  <a:latin typeface="Fira Sans Book"/>
+                </a:rPr>
+                <a:t> </a:t>
+              </a:r>
+              <a:r>
+                <a:rPr b="0" lang="en-US" sz="1270" spc="-1" strike="noStrike">
+                  <a:solidFill>
+                    <a:srgbClr val="212121"/>
+                  </a:solidFill>
+                  <a:latin typeface="Fira Sans Book"/>
+                </a:rPr>
+                <a:t>emas</a:t>
+              </a:r>
+              <a:r>
+                <a:rPr b="0" lang="en-US" sz="1270" spc="63" strike="noStrike">
+                  <a:solidFill>
+                    <a:srgbClr val="212121"/>
+                  </a:solidFill>
+                  <a:latin typeface="Fira Sans Book"/>
+                </a:rPr>
+                <a:t> </a:t>
+              </a:r>
+              <a:r>
+                <a:rPr b="0" lang="en-US" sz="1270" spc="-1" strike="noStrike">
+                  <a:solidFill>
+                    <a:srgbClr val="212121"/>
+                  </a:solidFill>
+                  <a:latin typeface="Fira Sans Book"/>
+                </a:rPr>
+                <a:t>untuk</a:t>
+              </a:r>
+              <a:r>
+                <a:rPr b="0" lang="en-US" sz="1270" spc="63" strike="noStrike">
+                  <a:solidFill>
+                    <a:srgbClr val="212121"/>
+                  </a:solidFill>
+                  <a:latin typeface="Fira Sans Book"/>
+                </a:rPr>
+                <a:t> </a:t>
+              </a:r>
+              <a:r>
+                <a:rPr b="0" lang="en-US" sz="1270" spc="-1" strike="noStrike">
+                  <a:solidFill>
+                    <a:srgbClr val="212121"/>
+                  </a:solidFill>
+                  <a:latin typeface="Fira Sans Book"/>
+                </a:rPr>
+                <a:t>konteks</a:t>
+              </a:r>
+              <a:r>
+                <a:rPr b="0" lang="en-US" sz="1270" spc="63" strike="noStrike">
+                  <a:solidFill>
+                    <a:srgbClr val="212121"/>
+                  </a:solidFill>
+                  <a:latin typeface="Fira Sans Book"/>
+                </a:rPr>
+                <a:t> </a:t>
+              </a:r>
+              <a:r>
+                <a:rPr b="0" lang="en-US" sz="1270" spc="-1" strike="noStrike">
+                  <a:solidFill>
+                    <a:srgbClr val="212121"/>
+                  </a:solidFill>
+                  <a:latin typeface="Fira Sans Book"/>
+                </a:rPr>
+                <a:t>atau</a:t>
+              </a:r>
+              <a:r>
+                <a:rPr b="0" lang="en-US" sz="1270" spc="63" strike="noStrike">
+                  <a:solidFill>
+                    <a:srgbClr val="212121"/>
+                  </a:solidFill>
+                  <a:latin typeface="Fira Sans Book"/>
+                </a:rPr>
+                <a:t> </a:t>
+              </a:r>
+              <a:r>
+                <a:rPr b="0" lang="en-US" sz="1270" spc="-1" strike="noStrike">
+                  <a:solidFill>
+                    <a:srgbClr val="212121"/>
+                  </a:solidFill>
+                  <a:latin typeface="Fira Sans Book"/>
+                </a:rPr>
+                <a:t>ca­tatan.</a:t>
               </a:r>
               <a:endParaRPr b="0" lang="en-US" sz="1270" spc="-1" strike="noStrike">
                 <a:solidFill>
@@ -4275,7 +5823,7 @@
         </p:sp>
         <p:sp>
           <p:nvSpPr>
-            <p:cNvPr id="67" name=""/>
+            <p:cNvPr id="77" name=""/>
             <p:cNvSpPr/>
             <p:nvPr/>
           </p:nvSpPr>
@@ -4303,7 +5851,7 @@
             <a:fontRef idx="minor"/>
           </p:style>
           <p:txBody>
-            <a:bodyPr lIns="61200" rIns="61200" tIns="0" bIns="0" anchor="ctr">
+            <a:bodyPr lIns="39600" rIns="39600" tIns="0" bIns="0" anchor="ctr">
               <a:noAutofit/>
             </a:bodyPr>
             <a:p>
@@ -4314,7 +5862,43 @@
                   </a:solidFill>
                   <a:latin typeface="Fira Sans"/>
                 </a:rPr>
-                <a:t>Kondisi saat ini</a:t>
+                <a:t>Kondisi</a:t>
+              </a:r>
+              <a:r>
+                <a:rPr b="1" lang="en-US" sz="1270" spc="111" strike="noStrike">
+                  <a:solidFill>
+                    <a:srgbClr val="ffffff"/>
+                  </a:solidFill>
+                  <a:latin typeface="Fira Sans"/>
+                </a:rPr>
+                <a:t> </a:t>
+              </a:r>
+              <a:r>
+                <a:rPr b="1" lang="en-US" sz="1270" spc="-1" strike="noStrike">
+                  <a:solidFill>
+                    <a:srgbClr val="ffffff"/>
+                  </a:solidFill>
+                  <a:latin typeface="Fira Sans"/>
+                </a:rPr>
+                <a:t>saat</a:t>
+              </a:r>
+              <a:r>
+                <a:rPr b="1" lang="en-US" sz="1270" spc="111" strike="noStrike">
+                  <a:solidFill>
+                    <a:srgbClr val="ffffff"/>
+                  </a:solidFill>
+                  <a:latin typeface="Fira Sans"/>
+                </a:rPr>
+                <a:t> </a:t>
+              </a:r>
+              <a:r>
+                <a:rPr b="1" lang="en-US" sz="1270" spc="-1" strike="noStrike">
+                  <a:solidFill>
+                    <a:srgbClr val="ffffff"/>
+                  </a:solidFill>
+                  <a:latin typeface="Fira Sans"/>
+                </a:rPr>
+                <a:t>ini</a:t>
               </a:r>
               <a:endParaRPr b="1" lang="en-US" sz="1270" spc="-1" strike="noStrike">
                 <a:solidFill>
@@ -4328,7 +5912,7 @@
       </p:grpSp>
       <p:grpSp>
         <p:nvGrpSpPr>
-          <p:cNvPr id="68" name=""/>
+          <p:cNvPr id="78" name=""/>
           <p:cNvGrpSpPr/>
           <p:nvPr/>
         </p:nvGrpSpPr>
@@ -4342,7 +5926,7 @@
         </p:grpSpPr>
         <p:sp>
           <p:nvSpPr>
-            <p:cNvPr id="69" name=""/>
+            <p:cNvPr id="79" name=""/>
             <p:cNvSpPr/>
             <p:nvPr/>
           </p:nvSpPr>
@@ -4373,10 +5957,15 @@
             <a:fontRef idx="minor"/>
           </p:style>
           <p:txBody>
-            <a:bodyPr lIns="100800" rIns="100800" tIns="72000" bIns="36000" anchor="t">
+            <a:bodyPr lIns="79200" rIns="79200" tIns="32400" bIns="36000" anchor="t">
               <a:noAutofit/>
             </a:bodyPr>
             <a:p>
+              <a:pPr>
+                <a:lnSpc>
+                  <a:spcPts val="1701"/>
+                </a:lnSpc>
+              </a:pPr>
               <a:endParaRPr b="0" lang="en-US" sz="1270" spc="-1" strike="noStrike">
                 <a:solidFill>
                   <a:srgbClr val="212121"/>
@@ -4388,7 +5977,7 @@
         </p:sp>
         <p:sp>
           <p:nvSpPr>
-            <p:cNvPr id="70" name=""/>
+            <p:cNvPr id="80" name=""/>
             <p:cNvSpPr/>
             <p:nvPr/>
           </p:nvSpPr>
@@ -4416,7 +6005,7 @@
             <a:fontRef idx="minor"/>
           </p:style>
           <p:txBody>
-            <a:bodyPr lIns="61200" rIns="61200" tIns="0" bIns="0" anchor="ctr">
+            <a:bodyPr lIns="39600" rIns="39600" tIns="0" bIns="0" anchor="ctr">
               <a:noAutofit/>
             </a:bodyPr>
             <a:p>
@@ -4441,7 +6030,7 @@
       </p:grpSp>
       <p:sp>
         <p:nvSpPr>
-          <p:cNvPr id="71" name=""/>
+          <p:cNvPr id="81" name=""/>
           <p:cNvSpPr/>
           <p:nvPr/>
         </p:nvSpPr>
@@ -4492,7 +6081,7 @@
       </p:sp>
       <p:sp>
         <p:nvSpPr>
-          <p:cNvPr id="72" name=""/>
+          <p:cNvPr id="82" name=""/>
           <p:cNvSpPr txBox="1"/>
           <p:nvPr/>
         </p:nvSpPr>
@@ -4534,7 +6123,7 @@
       </p:sp>
       <p:sp>
         <p:nvSpPr>
-          <p:cNvPr id="73" name=""/>
+          <p:cNvPr id="83" name=""/>
           <p:cNvSpPr/>
           <p:nvPr/>
         </p:nvSpPr>
@@ -4585,7 +6174,7 @@
       </p:sp>
       <p:sp>
         <p:nvSpPr>
-          <p:cNvPr id="74" name=""/>
+          <p:cNvPr id="84" name=""/>
           <p:cNvSpPr txBox="1"/>
           <p:nvPr/>
         </p:nvSpPr>
@@ -4627,7 +6216,7 @@
       </p:sp>
       <p:sp>
         <p:nvSpPr>
-          <p:cNvPr id="75" name=""/>
+          <p:cNvPr id="85" name=""/>
           <p:cNvSpPr/>
           <p:nvPr/>
         </p:nvSpPr>
@@ -4653,7 +6242,7 @@
           <a:fontRef idx="minor"/>
         </p:style>
         <p:txBody>
-          <a:bodyPr lIns="0" rIns="0" tIns="0" bIns="0" anchor="ctr">
+          <a:bodyPr lIns="0" rIns="0" tIns="0" bIns="39600" anchor="ctr">
             <a:noAutofit/>
           </a:bodyPr>
           <a:p>
@@ -4678,7 +6267,7 @@
       </p:sp>
       <p:sp>
         <p:nvSpPr>
-          <p:cNvPr id="76" name=""/>
+          <p:cNvPr id="86" name=""/>
           <p:cNvSpPr txBox="1"/>
           <p:nvPr/>
         </p:nvSpPr>
@@ -4720,7 +6309,7 @@
       </p:sp>
       <p:grpSp>
         <p:nvGrpSpPr>
-          <p:cNvPr id="77" name=""/>
+          <p:cNvPr id="87" name=""/>
           <p:cNvGrpSpPr/>
           <p:nvPr/>
         </p:nvGrpSpPr>
@@ -4734,7 +6323,7 @@
         </p:grpSpPr>
         <p:sp>
           <p:nvSpPr>
-            <p:cNvPr id="78" name=""/>
+            <p:cNvPr id="88" name=""/>
             <p:cNvSpPr/>
             <p:nvPr/>
           </p:nvSpPr>
@@ -4765,10 +6354,15 @@
             <a:fontRef idx="minor"/>
           </p:style>
           <p:txBody>
-            <a:bodyPr lIns="100800" rIns="100800" tIns="72000" bIns="36000" anchor="t">
+            <a:bodyPr lIns="79200" rIns="79200" tIns="32400" bIns="36000" anchor="t">
               <a:noAutofit/>
             </a:bodyPr>
             <a:p>
+              <a:pPr>
+                <a:lnSpc>
+                  <a:spcPts val="1701"/>
+                </a:lnSpc>
+              </a:pPr>
               <a:r>
                 <a:rPr b="0" lang="en-US" sz="1270" spc="-1" strike="noStrike">
                   <a:solidFill>
@@ -4776,7 +6370,97 @@
                   </a:solidFill>
                   <a:latin typeface="Fira Sans Book"/>
                 </a:rPr>
-                <a:t>Kartu merah untuk risiko atau keterbatasan.</a:t>
+                <a:t>Kartu</a:t>
+              </a:r>
+              <a:r>
+                <a:rPr b="0" lang="en-US" sz="1270" spc="66" strike="noStrike">
+                  <a:solidFill>
+                    <a:srgbClr val="212121"/>
+                  </a:solidFill>
+                  <a:latin typeface="Fira Sans Book"/>
+                </a:rPr>
+                <a:t> </a:t>
+              </a:r>
+              <a:r>
+                <a:rPr b="0" lang="en-US" sz="1270" spc="-1" strike="noStrike">
+                  <a:solidFill>
+                    <a:srgbClr val="212121"/>
+                  </a:solidFill>
+                  <a:latin typeface="Fira Sans Book"/>
+                </a:rPr>
+                <a:t>merah</a:t>
+              </a:r>
+              <a:r>
+                <a:rPr b="0" lang="en-US" sz="1270" spc="66" strike="noStrike">
+                  <a:solidFill>
+                    <a:srgbClr val="212121"/>
+                  </a:solidFill>
+                  <a:latin typeface="Fira Sans Book"/>
+                </a:rPr>
+                <a:t> </a:t>
+              </a:r>
+              <a:r>
+                <a:rPr b="0" lang="en-US" sz="1270" spc="-1" strike="noStrike">
+                  <a:solidFill>
+                    <a:srgbClr val="212121"/>
+                  </a:solidFill>
+                  <a:latin typeface="Fira Sans Book"/>
+                </a:rPr>
+                <a:t>untuk</a:t>
+              </a:r>
+              <a:r>
+                <a:rPr b="0" lang="en-US" sz="1270" spc="66" strike="noStrike">
+                  <a:solidFill>
+                    <a:srgbClr val="212121"/>
+                  </a:solidFill>
+                  <a:latin typeface="Fira Sans Book"/>
+                </a:rPr>
+                <a:t> </a:t>
+              </a:r>
+              <a:r>
+                <a:rPr b="0" lang="en-US" sz="1270" spc="-1" strike="noStrike">
+                  <a:solidFill>
+                    <a:srgbClr val="212121"/>
+                  </a:solidFill>
+                  <a:latin typeface="Fira Sans Book"/>
+                </a:rPr>
+                <a:t>risiko</a:t>
+              </a:r>
+              <a:r>
+                <a:rPr b="0" lang="en-US" sz="1270" spc="66" strike="noStrike">
+                  <a:solidFill>
+                    <a:srgbClr val="212121"/>
+                  </a:solidFill>
+                  <a:latin typeface="Fira Sans Book"/>
+                </a:rPr>
+                <a:t> </a:t>
+              </a:r>
+              <a:r>
+                <a:rPr b="0" lang="en-US" sz="1270" spc="-1" strike="noStrike">
+                  <a:solidFill>
+                    <a:srgbClr val="212121"/>
+                  </a:solidFill>
+                  <a:latin typeface="Fira Sans Book"/>
+                </a:rPr>
+                <a:t>atau</a:t>
+              </a:r>
+              <a:r>
+                <a:rPr b="0" lang="en-US" sz="1270" spc="66" strike="noStrike">
+                  <a:solidFill>
+                    <a:srgbClr val="212121"/>
+                  </a:solidFill>
+                  <a:latin typeface="Fira Sans Book"/>
+                </a:rPr>
+                <a:t> </a:t>
+              </a:r>
+              <a:r>
+                <a:rPr b="0" lang="en-US" sz="1270" spc="-1" strike="noStrike">
+                  <a:solidFill>
+                    <a:srgbClr val="212121"/>
+                  </a:solidFill>
+                  <a:latin typeface="Fira Sans Book"/>
+                </a:rPr>
+                <a:t>keterbatasan.</a:t>
               </a:r>
               <a:endParaRPr b="0" lang="en-US" sz="1270" spc="-1" strike="noStrike">
                 <a:solidFill>
@@ -4789,7 +6473,7 @@
         </p:sp>
         <p:sp>
           <p:nvSpPr>
-            <p:cNvPr id="79" name=""/>
+            <p:cNvPr id="89" name=""/>
             <p:cNvSpPr/>
             <p:nvPr/>
           </p:nvSpPr>
@@ -4817,7 +6501,7 @@
             <a:fontRef idx="minor"/>
           </p:style>
           <p:txBody>
-            <a:bodyPr lIns="61200" rIns="61200" tIns="0" bIns="0" anchor="ctr">
+            <a:bodyPr lIns="39600" rIns="39600" tIns="0" bIns="0" anchor="ctr">
               <a:noAutofit/>
             </a:bodyPr>
             <a:p>
@@ -4842,6 +6526,49 @@
       </p:grpSp>
       <p:sp>
         <p:nvSpPr>
+          <p:cNvPr id="90" name=""/>
+          <p:cNvSpPr txBox="1"/>
+          <p:nvPr/>
+        </p:nvSpPr>
+        <p:spPr>
+          <a:xfrm>
+            <a:off x="7588800" y="4906800"/>
+            <a:ext cx="1440000" cy="212400"/>
+          </a:xfrm>
+          <a:prstGeom prst="rect">
+            <a:avLst/>
+          </a:prstGeom>
+          <a:noFill/>
+          <a:ln w="0">
+            <a:noFill/>
+          </a:ln>
+        </p:spPr>
+        <p:txBody>
+          <a:bodyPr lIns="0" rIns="0" tIns="0" bIns="0" anchor="ctr">
+            <a:noAutofit/>
+          </a:bodyPr>
+          <a:p>
+            <a:pPr algn="r"/>
+            <a:r>
+              <a:rPr b="0" lang="en-US" sz="1110" spc="-1" strike="noStrike">
+                <a:solidFill>
+                  <a:srgbClr val="005aab"/>
+                </a:solidFill>
+                <a:latin typeface="Fira Sans Book"/>
+              </a:rPr>
+              <a:t>3/6</a:t>
+            </a:r>
+            <a:endParaRPr b="0" lang="en-US" sz="1110" spc="-1" strike="noStrike">
+              <a:solidFill>
+                <a:srgbClr val="005aab"/>
+              </a:solidFill>
+              <a:latin typeface="Fira Sans Book"/>
+            </a:endParaRPr>
+          </a:p>
+        </p:txBody>
+      </p:sp>
+      <p:sp>
+        <p:nvSpPr>
           <p:cNvPr id="3" name="PlaceHolder 2"/>
           <p:cNvSpPr>
             <a:spLocks noGrp="1"/>
@@ -4857,26 +6584,6 @@
             <a:r>
               <a:t>Nama Anda · Judul Presentasi Anda · STEI ITB</a:t>
             </a:r>
-          </a:p>
-        </p:txBody>
-      </p:sp>
-      <p:sp>
-        <p:nvSpPr>
-          <p:cNvPr id="4" name="PlaceHolder 3"/>
-          <p:cNvSpPr>
-            <a:spLocks noGrp="1"/>
-          </p:cNvSpPr>
-          <p:nvPr>
-            <p:ph type="sldNum" idx="2"/>
-          </p:nvPr>
-        </p:nvSpPr>
-        <p:spPr/>
-        <p:txBody>
-          <a:bodyPr/>
-          <a:p>
-            <a:fld id="{C75BD6E2-932B-418C-91C9-34E98F731BC9}" type="slidenum">
-              <a:t>5</a:t>
-            </a:fld>
           </a:p>
         </p:txBody>
       </p:sp>
@@ -4912,7 +6619,7 @@
       </p:grpSpPr>
       <p:sp>
         <p:nvSpPr>
-          <p:cNvPr id="80" name="PlaceHolder 1"/>
+          <p:cNvPr id="91" name="PlaceHolder 1"/>
           <p:cNvSpPr>
             <a:spLocks noGrp="1"/>
           </p:cNvSpPr>
@@ -4961,7 +6668,7 @@
       </p:sp>
       <p:sp>
         <p:nvSpPr>
-          <p:cNvPr id="81" name=""/>
+          <p:cNvPr id="92" name=""/>
           <p:cNvSpPr/>
           <p:nvPr/>
         </p:nvSpPr>
@@ -5002,7 +6709,7 @@
       </p:sp>
       <p:sp>
         <p:nvSpPr>
-          <p:cNvPr id="82" name=""/>
+          <p:cNvPr id="93" name=""/>
           <p:cNvSpPr/>
           <p:nvPr/>
         </p:nvSpPr>
@@ -5030,14 +6737,14 @@
           <a:fontRef idx="minor"/>
         </p:style>
         <p:txBody>
-          <a:bodyPr lIns="61200" rIns="61200" tIns="0" bIns="144000" anchor="ctr">
+          <a:bodyPr lIns="43200" rIns="43200" tIns="0" bIns="43200" anchor="ctr">
             <a:noAutofit/>
           </a:bodyPr>
           <a:p>
             <a:pPr algn="ctr">
-              <a:spcAft>
-                <a:spcPts val="850"/>
-              </a:spcAft>
+              <a:lnSpc>
+                <a:spcPts val="3487"/>
+              </a:lnSpc>
             </a:pPr>
             <a:r>
               <a:rPr b="1" lang="en-US" sz="3480" spc="-1" strike="noStrike">
@@ -5056,7 +6763,11 @@
             </a:endParaRPr>
           </a:p>
           <a:p>
-            <a:pPr algn="ctr"/>
+            <a:pPr algn="ctr">
+              <a:lnSpc>
+                <a:spcPts val="2183"/>
+              </a:lnSpc>
+            </a:pPr>
             <a:r>
               <a:rPr b="0" lang="en-US" sz="1110" spc="-1" strike="noStrike">
                 <a:solidFill>
@@ -5064,7 +6775,43 @@
                 </a:solidFill>
                 <a:latin typeface="Fira Sans Book"/>
               </a:rPr>
-              <a:t>makalah primer terpilih</a:t>
+              <a:t>makalah</a:t>
+            </a:r>
+            <a:r>
+              <a:rPr b="0" lang="en-US" sz="1110" spc="197" strike="noStrike">
+                <a:solidFill>
+                  <a:srgbClr val="ffffff"/>
+                </a:solidFill>
+                <a:latin typeface="Fira Sans Book"/>
+              </a:rPr>
+              <a:t> </a:t>
+            </a:r>
+            <a:r>
+              <a:rPr b="0" lang="en-US" sz="1110" spc="-1" strike="noStrike">
+                <a:solidFill>
+                  <a:srgbClr val="ffffff"/>
+                </a:solidFill>
+                <a:latin typeface="Fira Sans Book"/>
+              </a:rPr>
+              <a:t>primer</a:t>
+            </a:r>
+            <a:r>
+              <a:rPr b="0" lang="en-US" sz="1110" spc="197" strike="noStrike">
+                <a:solidFill>
+                  <a:srgbClr val="ffffff"/>
+                </a:solidFill>
+                <a:latin typeface="Fira Sans Book"/>
+              </a:rPr>
+              <a:t> </a:t>
+            </a:r>
+            <a:r>
+              <a:rPr b="0" lang="en-US" sz="1110" spc="-1" strike="noStrike">
+                <a:solidFill>
+                  <a:srgbClr val="ffffff"/>
+                </a:solidFill>
+                <a:latin typeface="Fira Sans Book"/>
+              </a:rPr>
+              <a:t>terpilih</a:t>
             </a:r>
             <a:endParaRPr b="0" lang="en-US" sz="1110" spc="-1" strike="noStrike">
               <a:solidFill>
@@ -5077,7 +6824,7 @@
       </p:sp>
       <p:sp>
         <p:nvSpPr>
-          <p:cNvPr id="83" name=""/>
+          <p:cNvPr id="94" name=""/>
           <p:cNvSpPr/>
           <p:nvPr/>
         </p:nvSpPr>
@@ -5105,14 +6852,14 @@
           <a:fontRef idx="minor"/>
         </p:style>
         <p:txBody>
-          <a:bodyPr lIns="61200" rIns="61200" tIns="0" bIns="144000" anchor="ctr">
+          <a:bodyPr lIns="43200" rIns="43200" tIns="0" bIns="43200" anchor="ctr">
             <a:noAutofit/>
           </a:bodyPr>
           <a:p>
             <a:pPr algn="ctr">
-              <a:spcAft>
-                <a:spcPts val="850"/>
-              </a:spcAft>
+              <a:lnSpc>
+                <a:spcPts val="3487"/>
+              </a:lnSpc>
             </a:pPr>
             <a:r>
               <a:rPr b="1" lang="en-US" sz="3480" spc="-1" strike="noStrike">
@@ -5131,7 +6878,11 @@
             </a:endParaRPr>
           </a:p>
           <a:p>
-            <a:pPr algn="ctr"/>
+            <a:pPr algn="ctr">
+              <a:lnSpc>
+                <a:spcPts val="2183"/>
+              </a:lnSpc>
+            </a:pPr>
             <a:r>
               <a:rPr b="0" lang="en-US" sz="1110" spc="-1" strike="noStrike">
                 <a:solidFill>
@@ -5139,7 +6890,43 @@
                 </a:solidFill>
                 <a:latin typeface="Fira Sans Book"/>
               </a:rPr>
-              <a:t>label angka kedua</a:t>
+              <a:t>label</a:t>
+            </a:r>
+            <a:r>
+              <a:rPr b="0" lang="en-US" sz="1110" spc="211" strike="noStrike">
+                <a:solidFill>
+                  <a:srgbClr val="ffffff"/>
+                </a:solidFill>
+                <a:latin typeface="Fira Sans Book"/>
+              </a:rPr>
+              <a:t> </a:t>
+            </a:r>
+            <a:r>
+              <a:rPr b="0" lang="en-US" sz="1110" spc="-1" strike="noStrike">
+                <a:solidFill>
+                  <a:srgbClr val="ffffff"/>
+                </a:solidFill>
+                <a:latin typeface="Fira Sans Book"/>
+              </a:rPr>
+              <a:t>angka</a:t>
+            </a:r>
+            <a:r>
+              <a:rPr b="0" lang="en-US" sz="1110" spc="211" strike="noStrike">
+                <a:solidFill>
+                  <a:srgbClr val="ffffff"/>
+                </a:solidFill>
+                <a:latin typeface="Fira Sans Book"/>
+              </a:rPr>
+              <a:t> </a:t>
+            </a:r>
+            <a:r>
+              <a:rPr b="0" lang="en-US" sz="1110" spc="-1" strike="noStrike">
+                <a:solidFill>
+                  <a:srgbClr val="ffffff"/>
+                </a:solidFill>
+                <a:latin typeface="Fira Sans Book"/>
+              </a:rPr>
+              <a:t>kedua</a:t>
             </a:r>
             <a:endParaRPr b="0" lang="en-US" sz="1110" spc="-1" strike="noStrike">
               <a:solidFill>
@@ -5152,7 +6939,7 @@
       </p:sp>
       <p:sp>
         <p:nvSpPr>
-          <p:cNvPr id="84" name=""/>
+          <p:cNvPr id="95" name=""/>
           <p:cNvSpPr/>
           <p:nvPr/>
         </p:nvSpPr>
@@ -5180,14 +6967,14 @@
           <a:fontRef idx="minor"/>
         </p:style>
         <p:txBody>
-          <a:bodyPr lIns="61200" rIns="61200" tIns="0" bIns="144000" anchor="ctr">
+          <a:bodyPr lIns="43200" rIns="43200" tIns="93600" bIns="43200" anchor="ctr">
             <a:noAutofit/>
           </a:bodyPr>
           <a:p>
             <a:pPr algn="ctr">
-              <a:spcAft>
-                <a:spcPts val="850"/>
-              </a:spcAft>
+              <a:lnSpc>
+                <a:spcPts val="3487"/>
+              </a:lnSpc>
             </a:pPr>
             <a:r>
               <a:rPr b="1" lang="en-US" sz="3480" spc="-1" strike="noStrike">
@@ -5196,7 +6983,7 @@
                 </a:solidFill>
                 <a:latin typeface="Fira Sans"/>
               </a:rPr>
-              <a:t>6 / 17</a:t>
+              <a:t>6 / 17</a:t>
             </a:r>
             <a:endParaRPr b="0" lang="en-US" sz="3480" spc="-1" strike="noStrike">
               <a:solidFill>
@@ -5206,7 +6993,11 @@
             </a:endParaRPr>
           </a:p>
           <a:p>
-            <a:pPr algn="ctr"/>
+            <a:pPr algn="ctr">
+              <a:lnSpc>
+                <a:spcPts val="2183"/>
+              </a:lnSpc>
+            </a:pPr>
             <a:r>
               <a:rPr b="0" lang="en-US" sz="1110" spc="-1" strike="noStrike">
                 <a:solidFill>
@@ -5214,7 +7005,25 @@
                 </a:solidFill>
                 <a:latin typeface="Fira Sans Book"/>
               </a:rPr>
-              <a:t>rasio atau perbandingan</a:t>
+              <a:t>rasio</a:t>
+            </a:r>
+            <a:r>
+              <a:rPr b="0" lang="en-US" sz="1110" spc="225" strike="noStrike">
+                <a:solidFill>
+                  <a:srgbClr val="ffffff"/>
+                </a:solidFill>
+                <a:latin typeface="Fira Sans Book"/>
+              </a:rPr>
+              <a:t> </a:t>
+            </a:r>
+            <a:r>
+              <a:rPr b="0" lang="en-US" sz="1110" spc="-1" strike="noStrike">
+                <a:solidFill>
+                  <a:srgbClr val="ffffff"/>
+                </a:solidFill>
+                <a:latin typeface="Fira Sans Book"/>
+              </a:rPr>
+              <a:t>atau</a:t>
             </a:r>
             <a:endParaRPr b="0" lang="en-US" sz="1110" spc="-1" strike="noStrike">
               <a:solidFill>
@@ -5223,11 +7032,33 @@
               <a:latin typeface="Fira Sans Book"/>
             </a:endParaRPr>
           </a:p>
-        </p:txBody>
-      </p:sp>
-      <p:sp>
-        <p:nvSpPr>
-          <p:cNvPr id="85" name=""/>
+          <a:p>
+            <a:pPr algn="ctr">
+              <a:lnSpc>
+                <a:spcPts val="2183"/>
+              </a:lnSpc>
+            </a:pPr>
+            <a:r>
+              <a:rPr b="0" lang="en-US" sz="1110" spc="-1" strike="noStrike">
+                <a:solidFill>
+                  <a:srgbClr val="ffffff"/>
+                </a:solidFill>
+                <a:latin typeface="Fira Sans Book"/>
+              </a:rPr>
+              <a:t>perbandingan</a:t>
+            </a:r>
+            <a:endParaRPr b="0" lang="en-US" sz="1110" spc="-1" strike="noStrike">
+              <a:solidFill>
+                <a:srgbClr val="ffffff"/>
+              </a:solidFill>
+              <a:latin typeface="Fira Sans Book"/>
+            </a:endParaRPr>
+          </a:p>
+        </p:txBody>
+      </p:sp>
+      <p:sp>
+        <p:nvSpPr>
+          <p:cNvPr id="96" name=""/>
           <p:cNvSpPr/>
           <p:nvPr/>
         </p:nvSpPr>
@@ -5255,14 +7086,14 @@
           <a:fontRef idx="minor"/>
         </p:style>
         <p:txBody>
-          <a:bodyPr lIns="61200" rIns="61200" tIns="0" bIns="144000" anchor="ctr">
+          <a:bodyPr lIns="43200" rIns="43200" tIns="0" bIns="43200" anchor="ctr">
             <a:noAutofit/>
           </a:bodyPr>
           <a:p>
             <a:pPr algn="ctr">
-              <a:spcAft>
-                <a:spcPts val="850"/>
-              </a:spcAft>
+              <a:lnSpc>
+                <a:spcPts val="3487"/>
+              </a:lnSpc>
             </a:pPr>
             <a:r>
               <a:rPr b="1" lang="en-US" sz="3480" spc="-1" strike="noStrike">
@@ -5281,7 +7112,11 @@
             </a:endParaRPr>
           </a:p>
           <a:p>
-            <a:pPr algn="ctr"/>
+            <a:pPr algn="ctr">
+              <a:lnSpc>
+                <a:spcPts val="2183"/>
+              </a:lnSpc>
+            </a:pPr>
             <a:r>
               <a:rPr b="0" lang="en-US" sz="1110" spc="-1" strike="noStrike">
                 <a:solidFill>
@@ -5302,7 +7137,7 @@
       </p:sp>
       <p:sp>
         <p:nvSpPr>
-          <p:cNvPr id="86" name=""/>
+          <p:cNvPr id="97" name=""/>
           <p:cNvSpPr/>
           <p:nvPr/>
         </p:nvSpPr>
@@ -5330,14 +7165,14 @@
           <a:fontRef idx="minor"/>
         </p:style>
         <p:txBody>
-          <a:bodyPr lIns="61200" rIns="61200" tIns="0" bIns="144000" anchor="ctr">
+          <a:bodyPr lIns="43200" rIns="43200" tIns="0" bIns="43200" anchor="ctr">
             <a:noAutofit/>
           </a:bodyPr>
           <a:p>
             <a:pPr algn="ctr">
-              <a:spcAft>
-                <a:spcPts val="850"/>
-              </a:spcAft>
+              <a:lnSpc>
+                <a:spcPts val="3487"/>
+              </a:lnSpc>
             </a:pPr>
             <a:r>
               <a:rPr b="1" lang="en-US" sz="3480" spc="-1" strike="noStrike">
@@ -5356,7 +7191,11 @@
             </a:endParaRPr>
           </a:p>
           <a:p>
-            <a:pPr algn="ctr"/>
+            <a:pPr algn="ctr">
+              <a:lnSpc>
+                <a:spcPts val="2183"/>
+              </a:lnSpc>
+            </a:pPr>
             <a:r>
               <a:rPr b="0" lang="en-US" sz="1110" spc="-1" strike="noStrike">
                 <a:solidFill>
@@ -5377,7 +7216,7 @@
       </p:sp>
       <p:sp>
         <p:nvSpPr>
-          <p:cNvPr id="87" name=""/>
+          <p:cNvPr id="98" name=""/>
           <p:cNvSpPr/>
           <p:nvPr/>
         </p:nvSpPr>
@@ -5405,14 +7244,14 @@
           <a:fontRef idx="minor"/>
         </p:style>
         <p:txBody>
-          <a:bodyPr lIns="61200" rIns="61200" tIns="0" bIns="144000" anchor="ctr">
+          <a:bodyPr lIns="43200" rIns="43200" tIns="0" bIns="43200" anchor="ctr">
             <a:noAutofit/>
           </a:bodyPr>
           <a:p>
             <a:pPr algn="ctr">
-              <a:spcAft>
-                <a:spcPts val="850"/>
-              </a:spcAft>
+              <a:lnSpc>
+                <a:spcPts val="3487"/>
+              </a:lnSpc>
             </a:pPr>
             <a:r>
               <a:rPr b="1" lang="en-US" sz="3480" spc="-1" strike="noStrike">
@@ -5431,7 +7270,11 @@
             </a:endParaRPr>
           </a:p>
           <a:p>
-            <a:pPr algn="ctr"/>
+            <a:pPr algn="ctr">
+              <a:lnSpc>
+                <a:spcPts val="2183"/>
+              </a:lnSpc>
+            </a:pPr>
             <a:r>
               <a:rPr b="0" lang="en-US" sz="1110" spc="-1" strike="noStrike">
                 <a:solidFill>
@@ -5452,7 +7295,7 @@
       </p:sp>
       <p:sp>
         <p:nvSpPr>
-          <p:cNvPr id="88" name=""/>
+          <p:cNvPr id="99" name=""/>
           <p:cNvSpPr/>
           <p:nvPr/>
         </p:nvSpPr>
@@ -5480,13 +7323,16 @@
           <a:fontRef idx="minor"/>
         </p:style>
         <p:txBody>
-          <a:bodyPr lIns="61200" rIns="61200" tIns="0" bIns="144000" anchor="ctr">
+          <a:bodyPr lIns="43200" rIns="43200" tIns="97200" bIns="43200" anchor="ctr">
             <a:noAutofit/>
           </a:bodyPr>
           <a:p>
             <a:pPr algn="ctr">
+              <a:lnSpc>
+                <a:spcPts val="2381"/>
+              </a:lnSpc>
               <a:spcAft>
-                <a:spcPts val="850"/>
+                <a:spcPts val="312"/>
               </a:spcAft>
             </a:pPr>
             <a:r>
@@ -5496,7 +7342,7 @@
                 </a:solidFill>
                 <a:latin typeface="Fira Sans"/>
               </a:rPr>
-              <a:t>USD 7,3 jt</a:t>
+              <a:t>USD 7,3 jt</a:t>
             </a:r>
             <a:endParaRPr b="0" lang="en-US" sz="2370" spc="-1" strike="noStrike">
               <a:solidFill>
@@ -5506,7 +7352,11 @@
             </a:endParaRPr>
           </a:p>
           <a:p>
-            <a:pPr algn="ctr"/>
+            <a:pPr algn="ctr">
+              <a:lnSpc>
+                <a:spcPts val="2183"/>
+              </a:lnSpc>
+            </a:pPr>
             <a:r>
               <a:rPr b="0" lang="en-US" sz="1110" spc="-1" strike="noStrike">
                 <a:solidFill>
@@ -5514,7 +7364,43 @@
                 </a:solidFill>
                 <a:latin typeface="Fira Sans Book"/>
               </a:rPr>
-              <a:t>nilai lebar, huruf lebih kecil</a:t>
+              <a:t>nilai</a:t>
+            </a:r>
+            <a:r>
+              <a:rPr b="0" lang="en-US" sz="1110" spc="211" strike="noStrike">
+                <a:solidFill>
+                  <a:srgbClr val="ffffff"/>
+                </a:solidFill>
+                <a:latin typeface="Fira Sans Book"/>
+              </a:rPr>
+              <a:t> </a:t>
+            </a:r>
+            <a:r>
+              <a:rPr b="0" lang="en-US" sz="1110" spc="-1" strike="noStrike">
+                <a:solidFill>
+                  <a:srgbClr val="ffffff"/>
+                </a:solidFill>
+                <a:latin typeface="Fira Sans Book"/>
+              </a:rPr>
+              <a:t>lebar,</a:t>
+            </a:r>
+            <a:r>
+              <a:rPr b="0" lang="en-US" sz="1110" spc="211" strike="noStrike">
+                <a:solidFill>
+                  <a:srgbClr val="ffffff"/>
+                </a:solidFill>
+                <a:latin typeface="Fira Sans Book"/>
+              </a:rPr>
+              <a:t> </a:t>
+            </a:r>
+            <a:r>
+              <a:rPr b="0" lang="en-US" sz="1110" spc="-1" strike="noStrike">
+                <a:solidFill>
+                  <a:srgbClr val="ffffff"/>
+                </a:solidFill>
+                <a:latin typeface="Fira Sans Book"/>
+              </a:rPr>
+              <a:t>huruf</a:t>
             </a:r>
             <a:endParaRPr b="0" lang="en-US" sz="1110" spc="-1" strike="noStrike">
               <a:solidFill>
@@ -5523,11 +7409,51 @@
               <a:latin typeface="Fira Sans Book"/>
             </a:endParaRPr>
           </a:p>
-        </p:txBody>
-      </p:sp>
-      <p:sp>
-        <p:nvSpPr>
-          <p:cNvPr id="89" name=""/>
+          <a:p>
+            <a:pPr algn="ctr">
+              <a:lnSpc>
+                <a:spcPts val="2183"/>
+              </a:lnSpc>
+            </a:pPr>
+            <a:r>
+              <a:rPr b="0" lang="en-US" sz="1110" spc="-1" strike="noStrike">
+                <a:solidFill>
+                  <a:srgbClr val="ffffff"/>
+                </a:solidFill>
+                <a:latin typeface="Fira Sans Book"/>
+              </a:rPr>
+              <a:t>lebih</a:t>
+            </a:r>
+            <a:r>
+              <a:rPr b="0" lang="en-US" sz="1110" spc="211" strike="noStrike">
+                <a:solidFill>
+                  <a:srgbClr val="ffffff"/>
+                </a:solidFill>
+                <a:latin typeface="Fira Sans Book"/>
+              </a:rPr>
+              <a:t> </a:t>
+            </a:r>
+            <a:r>
+              <a:rPr b="0" lang="en-US" sz="1110" spc="-1" strike="noStrike">
+                <a:solidFill>
+                  <a:srgbClr val="ffffff"/>
+                </a:solidFill>
+                <a:latin typeface="Fira Sans Book"/>
+              </a:rPr>
+              <a:t>kecil</a:t>
+            </a:r>
+            <a:endParaRPr b="0" lang="en-US" sz="1110" spc="-1" strike="noStrike">
+              <a:solidFill>
+                <a:srgbClr val="ffffff"/>
+              </a:solidFill>
+              <a:latin typeface="Fira Sans Book"/>
+            </a:endParaRPr>
+          </a:p>
+        </p:txBody>
+      </p:sp>
+      <p:sp>
+        <p:nvSpPr>
+          <p:cNvPr id="100" name=""/>
           <p:cNvSpPr/>
           <p:nvPr/>
         </p:nvSpPr>
@@ -5555,14 +7481,14 @@
           <a:fontRef idx="minor"/>
         </p:style>
         <p:txBody>
-          <a:bodyPr lIns="61200" rIns="61200" tIns="0" bIns="144000" anchor="ctr">
+          <a:bodyPr lIns="43200" rIns="43200" tIns="57600" bIns="43200" anchor="ctr">
             <a:noAutofit/>
           </a:bodyPr>
           <a:p>
             <a:pPr algn="ctr">
-              <a:spcAft>
-                <a:spcPts val="850"/>
-              </a:spcAft>
+              <a:lnSpc>
+                <a:spcPts val="3487"/>
+              </a:lnSpc>
             </a:pPr>
             <a:r>
               <a:rPr b="1" lang="en-US" sz="3480" spc="-1" strike="noStrike">
@@ -5581,7 +7507,11 @@
             </a:endParaRPr>
           </a:p>
           <a:p>
-            <a:pPr algn="ctr"/>
+            <a:pPr algn="ctr">
+              <a:lnSpc>
+                <a:spcPts val="2183"/>
+              </a:lnSpc>
+            </a:pPr>
             <a:r>
               <a:rPr b="0" lang="en-US" sz="1110" spc="-1" strike="noStrike">
                 <a:solidFill>
@@ -5589,11 +7519,72 @@
                 </a:solidFill>
                 <a:latin typeface="Fira Sans Book"/>
               </a:rPr>
-              <a:t>celah riset</a:t>
+              <a:t>celah</a:t>
+            </a:r>
+            <a:r>
+              <a:rPr b="0" lang="en-US" sz="1110" spc="225" strike="noStrike">
+                <a:solidFill>
+                  <a:srgbClr val="ffffff"/>
+                </a:solidFill>
+                <a:latin typeface="Fira Sans Book"/>
+              </a:rPr>
+              <a:t> </a:t>
+            </a:r>
+            <a:r>
+              <a:rPr b="0" lang="en-US" sz="1110" spc="-1" strike="noStrike">
+                <a:solidFill>
+                  <a:srgbClr val="ffffff"/>
+                </a:solidFill>
+                <a:latin typeface="Fira Sans Book"/>
+              </a:rPr>
+              <a:t>riset</a:t>
             </a:r>
             <a:endParaRPr b="0" lang="en-US" sz="1110" spc="-1" strike="noStrike">
               <a:solidFill>
                 <a:srgbClr val="ffffff"/>
+              </a:solidFill>
+              <a:latin typeface="Fira Sans Book"/>
+            </a:endParaRPr>
+          </a:p>
+        </p:txBody>
+      </p:sp>
+      <p:sp>
+        <p:nvSpPr>
+          <p:cNvPr id="101" name=""/>
+          <p:cNvSpPr txBox="1"/>
+          <p:nvPr/>
+        </p:nvSpPr>
+        <p:spPr>
+          <a:xfrm>
+            <a:off x="7588800" y="4906800"/>
+            <a:ext cx="1440000" cy="212400"/>
+          </a:xfrm>
+          <a:prstGeom prst="rect">
+            <a:avLst/>
+          </a:prstGeom>
+          <a:noFill/>
+          <a:ln w="0">
+            <a:noFill/>
+          </a:ln>
+        </p:spPr>
+        <p:txBody>
+          <a:bodyPr lIns="0" rIns="0" tIns="0" bIns="0" anchor="ctr">
+            <a:noAutofit/>
+          </a:bodyPr>
+          <a:p>
+            <a:pPr algn="r"/>
+            <a:r>
+              <a:rPr b="0" lang="en-US" sz="1110" spc="-1" strike="noStrike">
+                <a:solidFill>
+                  <a:srgbClr val="005aab"/>
+                </a:solidFill>
+                <a:latin typeface="Fira Sans Book"/>
+              </a:rPr>
+              <a:t>4/6</a:t>
+            </a:r>
+            <a:endParaRPr b="0" lang="en-US" sz="1110" spc="-1" strike="noStrike">
+              <a:solidFill>
+                <a:srgbClr val="005aab"/>
               </a:solidFill>
               <a:latin typeface="Fira Sans Book"/>
             </a:endParaRPr>
@@ -5617,26 +7608,6 @@
             <a:r>
               <a:t>Nama Anda · Judul Presentasi Anda · STEI ITB</a:t>
             </a:r>
-          </a:p>
-        </p:txBody>
-      </p:sp>
-      <p:sp>
-        <p:nvSpPr>
-          <p:cNvPr id="4" name="PlaceHolder 3"/>
-          <p:cNvSpPr>
-            <a:spLocks noGrp="1"/>
-          </p:cNvSpPr>
-          <p:nvPr>
-            <p:ph type="sldNum" idx="2"/>
-          </p:nvPr>
-        </p:nvSpPr>
-        <p:spPr/>
-        <p:txBody>
-          <a:bodyPr/>
-          <a:p>
-            <a:fld id="{A4B8232C-272B-4379-A030-7F75604D1402}" type="slidenum">
-              <a:t>6</a:t>
-            </a:fld>
           </a:p>
         </p:txBody>
       </p:sp>
@@ -5672,7 +7643,7 @@
       </p:grpSpPr>
       <p:sp>
         <p:nvSpPr>
-          <p:cNvPr id="90" name=""/>
+          <p:cNvPr id="102" name=""/>
           <p:cNvSpPr txBox="1"/>
           <p:nvPr/>
         </p:nvSpPr>
@@ -5715,7 +7686,7 @@
       </p:sp>
       <p:sp>
         <p:nvSpPr>
-          <p:cNvPr id="91" name=""/>
+          <p:cNvPr id="103" name=""/>
           <p:cNvSpPr txBox="1"/>
           <p:nvPr/>
         </p:nvSpPr>
@@ -5758,7 +7729,7 @@
       </p:sp>
       <p:sp>
         <p:nvSpPr>
-          <p:cNvPr id="92" name="PlaceHolder 1"/>
+          <p:cNvPr id="104" name="PlaceHolder 1"/>
           <p:cNvSpPr>
             <a:spLocks noGrp="1"/>
           </p:cNvSpPr>
@@ -5768,7 +7739,7 @@
         </p:nvSpPr>
         <p:spPr>
           <a:xfrm>
-            <a:off x="3819600" y="1440000"/>
+            <a:off x="3819600" y="1468800"/>
             <a:ext cx="5112000" cy="2232000"/>
           </a:xfrm>
           <a:prstGeom prst="rect">
@@ -5837,7 +7808,7 @@
       </p:grpSpPr>
       <p:sp>
         <p:nvSpPr>
-          <p:cNvPr id="93" name="PlaceHolder 1"/>
+          <p:cNvPr id="105" name="PlaceHolder 1"/>
           <p:cNvSpPr>
             <a:spLocks noGrp="1"/>
           </p:cNvSpPr>
@@ -5886,7 +7857,7 @@
       </p:sp>
       <p:sp>
         <p:nvSpPr>
-          <p:cNvPr id="94" name=""/>
+          <p:cNvPr id="106" name=""/>
           <p:cNvSpPr/>
           <p:nvPr/>
         </p:nvSpPr>
@@ -5927,7 +7898,7 @@
       </p:sp>
       <p:sp>
         <p:nvSpPr>
-          <p:cNvPr id="95" name=""/>
+          <p:cNvPr id="107" name=""/>
           <p:cNvSpPr/>
           <p:nvPr/>
         </p:nvSpPr>
@@ -5959,7 +7930,11 @@
             <a:noAutofit/>
           </a:bodyPr>
           <a:p>
-            <a:pPr algn="ctr"/>
+            <a:pPr algn="ctr">
+              <a:lnSpc>
+                <a:spcPts val="1871"/>
+              </a:lnSpc>
+            </a:pPr>
             <a:r>
               <a:rPr b="1" lang="en-US" sz="1420" spc="-1" strike="noStrike">
                 <a:solidFill>
@@ -5977,7 +7952,11 @@
             </a:endParaRPr>
           </a:p>
           <a:p>
-            <a:pPr algn="ctr"/>
+            <a:pPr algn="ctr">
+              <a:lnSpc>
+                <a:spcPts val="1871"/>
+              </a:lnSpc>
+            </a:pPr>
             <a:r>
               <a:rPr b="1" lang="en-US" sz="1420" spc="-1" strike="noStrike">
                 <a:solidFill>
@@ -5998,7 +7977,7 @@
       </p:sp>
       <p:sp>
         <p:nvSpPr>
-          <p:cNvPr id="96" name=""/>
+          <p:cNvPr id="108" name=""/>
           <p:cNvSpPr txBox="1"/>
           <p:nvPr/>
         </p:nvSpPr>
@@ -6041,7 +8020,7 @@
       </p:sp>
       <p:sp>
         <p:nvSpPr>
-          <p:cNvPr id="97" name=""/>
+          <p:cNvPr id="109" name=""/>
           <p:cNvSpPr/>
           <p:nvPr/>
         </p:nvSpPr>
@@ -6083,7 +8062,7 @@
       </p:sp>
       <p:sp>
         <p:nvSpPr>
-          <p:cNvPr id="98" name=""/>
+          <p:cNvPr id="110" name=""/>
           <p:cNvSpPr/>
           <p:nvPr/>
         </p:nvSpPr>
@@ -6111,11 +8090,15 @@
           <a:fontRef idx="minor"/>
         </p:style>
         <p:txBody>
-          <a:bodyPr lIns="0" rIns="0" tIns="0" bIns="0" anchor="ctr">
+          <a:bodyPr lIns="0" rIns="0" tIns="0" bIns="50400" anchor="ctr">
             <a:noAutofit/>
           </a:bodyPr>
           <a:p>
-            <a:pPr algn="ctr"/>
+            <a:pPr algn="ctr">
+              <a:lnSpc>
+                <a:spcPts val="1871"/>
+              </a:lnSpc>
+            </a:pPr>
             <a:r>
               <a:rPr b="1" lang="en-US" sz="1420" spc="-1" strike="noStrike">
                 <a:solidFill>
@@ -6133,7 +8116,11 @@
             </a:endParaRPr>
           </a:p>
           <a:p>
-            <a:pPr algn="ctr"/>
+            <a:pPr algn="ctr">
+              <a:lnSpc>
+                <a:spcPts val="1871"/>
+              </a:lnSpc>
+            </a:pPr>
             <a:r>
               <a:rPr b="1" lang="en-US" sz="1420" spc="-1" strike="noStrike">
                 <a:solidFill>
@@ -6154,7 +8141,7 @@
       </p:sp>
       <p:sp>
         <p:nvSpPr>
-          <p:cNvPr id="99" name=""/>
+          <p:cNvPr id="111" name=""/>
           <p:cNvSpPr txBox="1"/>
           <p:nvPr/>
         </p:nvSpPr>
@@ -6197,7 +8184,7 @@
       </p:sp>
       <p:sp>
         <p:nvSpPr>
-          <p:cNvPr id="100" name=""/>
+          <p:cNvPr id="112" name=""/>
           <p:cNvSpPr/>
           <p:nvPr/>
         </p:nvSpPr>
@@ -6239,7 +8226,7 @@
       </p:sp>
       <p:sp>
         <p:nvSpPr>
-          <p:cNvPr id="101" name=""/>
+          <p:cNvPr id="113" name=""/>
           <p:cNvSpPr/>
           <p:nvPr/>
         </p:nvSpPr>
@@ -6267,11 +8254,15 @@
           <a:fontRef idx="minor"/>
         </p:style>
         <p:txBody>
-          <a:bodyPr lIns="0" rIns="0" tIns="0" bIns="0" anchor="ctr">
+          <a:bodyPr lIns="0" rIns="0" tIns="0" bIns="50400" anchor="ctr">
             <a:noAutofit/>
           </a:bodyPr>
           <a:p>
-            <a:pPr algn="ctr"/>
+            <a:pPr algn="ctr">
+              <a:lnSpc>
+                <a:spcPts val="1871"/>
+              </a:lnSpc>
+            </a:pPr>
             <a:r>
               <a:rPr b="1" lang="en-US" sz="1420" spc="-1" strike="noStrike">
                 <a:solidFill>
@@ -6289,7 +8280,11 @@
             </a:endParaRPr>
           </a:p>
           <a:p>
-            <a:pPr algn="ctr"/>
+            <a:pPr algn="ctr">
+              <a:lnSpc>
+                <a:spcPts val="1871"/>
+              </a:lnSpc>
+            </a:pPr>
             <a:r>
               <a:rPr b="1" lang="en-US" sz="1420" spc="-1" strike="noStrike">
                 <a:solidFill>
@@ -6310,7 +8305,7 @@
       </p:sp>
       <p:sp>
         <p:nvSpPr>
-          <p:cNvPr id="102" name=""/>
+          <p:cNvPr id="114" name=""/>
           <p:cNvSpPr txBox="1"/>
           <p:nvPr/>
         </p:nvSpPr>
@@ -6353,7 +8348,7 @@
       </p:sp>
       <p:sp>
         <p:nvSpPr>
-          <p:cNvPr id="103" name=""/>
+          <p:cNvPr id="115" name=""/>
           <p:cNvSpPr/>
           <p:nvPr/>
         </p:nvSpPr>
@@ -6395,7 +8390,7 @@
       </p:sp>
       <p:sp>
         <p:nvSpPr>
-          <p:cNvPr id="104" name=""/>
+          <p:cNvPr id="116" name=""/>
           <p:cNvSpPr/>
           <p:nvPr/>
         </p:nvSpPr>
@@ -6423,11 +8418,15 @@
           <a:fontRef idx="minor"/>
         </p:style>
         <p:txBody>
-          <a:bodyPr lIns="0" rIns="0" tIns="0" bIns="0" anchor="ctr">
+          <a:bodyPr lIns="0" rIns="0" tIns="0" bIns="50400" anchor="ctr">
             <a:noAutofit/>
           </a:bodyPr>
           <a:p>
-            <a:pPr algn="ctr"/>
+            <a:pPr algn="ctr">
+              <a:lnSpc>
+                <a:spcPts val="1871"/>
+              </a:lnSpc>
+            </a:pPr>
             <a:r>
               <a:rPr b="1" lang="en-US" sz="1420" spc="-1" strike="noStrike">
                 <a:solidFill>
@@ -6445,7 +8444,11 @@
             </a:endParaRPr>
           </a:p>
           <a:p>
-            <a:pPr algn="ctr"/>
+            <a:pPr algn="ctr">
+              <a:lnSpc>
+                <a:spcPts val="1871"/>
+              </a:lnSpc>
+            </a:pPr>
             <a:r>
               <a:rPr b="1" lang="en-US" sz="1420" spc="-1" strike="noStrike">
                 <a:solidFill>
@@ -6466,7 +8469,7 @@
       </p:sp>
       <p:sp>
         <p:nvSpPr>
-          <p:cNvPr id="105" name=""/>
+          <p:cNvPr id="117" name=""/>
           <p:cNvSpPr txBox="1"/>
           <p:nvPr/>
         </p:nvSpPr>
@@ -6509,7 +8512,7 @@
       </p:sp>
       <p:sp>
         <p:nvSpPr>
-          <p:cNvPr id="106" name=""/>
+          <p:cNvPr id="118" name=""/>
           <p:cNvSpPr/>
           <p:nvPr/>
         </p:nvSpPr>
@@ -6553,7 +8556,7 @@
       </p:sp>
       <p:sp>
         <p:nvSpPr>
-          <p:cNvPr id="107" name=""/>
+          <p:cNvPr id="119" name=""/>
           <p:cNvSpPr/>
           <p:nvPr/>
         </p:nvSpPr>
@@ -6606,7 +8609,7 @@
       </p:sp>
       <p:grpSp>
         <p:nvGrpSpPr>
-          <p:cNvPr id="108" name=""/>
+          <p:cNvPr id="120" name=""/>
           <p:cNvGrpSpPr/>
           <p:nvPr/>
         </p:nvGrpSpPr>
@@ -6620,7 +8623,7 @@
         </p:grpSpPr>
         <p:sp>
           <p:nvSpPr>
-            <p:cNvPr id="109" name=""/>
+            <p:cNvPr id="121" name=""/>
             <p:cNvSpPr/>
             <p:nvPr/>
           </p:nvSpPr>
@@ -6651,10 +8654,15 @@
             <a:fontRef idx="minor"/>
           </p:style>
           <p:txBody>
-            <a:bodyPr lIns="100800" rIns="100800" tIns="72000" bIns="36000" anchor="t">
+            <a:bodyPr lIns="79200" rIns="79200" tIns="32400" bIns="36000" anchor="t">
               <a:noAutofit/>
             </a:bodyPr>
             <a:p>
+              <a:pPr>
+                <a:lnSpc>
+                  <a:spcPts val="1701"/>
+                </a:lnSpc>
+              </a:pPr>
               <a:r>
                 <a:rPr b="0" lang="en-US" sz="1270" spc="-1" strike="noStrike">
                   <a:solidFill>
@@ -6675,7 +8683,7 @@
         </p:sp>
         <p:sp>
           <p:nvSpPr>
-            <p:cNvPr id="110" name=""/>
+            <p:cNvPr id="122" name=""/>
             <p:cNvSpPr/>
             <p:nvPr/>
           </p:nvSpPr>
@@ -6703,7 +8711,7 @@
             <a:fontRef idx="minor"/>
           </p:style>
           <p:txBody>
-            <a:bodyPr lIns="61200" rIns="61200" tIns="0" bIns="0" anchor="ctr">
+            <a:bodyPr lIns="39600" rIns="39600" tIns="0" bIns="0" anchor="ctr">
               <a:noAutofit/>
             </a:bodyPr>
             <a:p>
@@ -6728,7 +8736,7 @@
       </p:grpSp>
       <p:grpSp>
         <p:nvGrpSpPr>
-          <p:cNvPr id="111" name=""/>
+          <p:cNvPr id="123" name=""/>
           <p:cNvGrpSpPr/>
           <p:nvPr/>
         </p:nvGrpSpPr>
@@ -6742,7 +8750,7 @@
         </p:grpSpPr>
         <p:sp>
           <p:nvSpPr>
-            <p:cNvPr id="112" name=""/>
+            <p:cNvPr id="124" name=""/>
             <p:cNvSpPr/>
             <p:nvPr/>
           </p:nvSpPr>
@@ -6773,10 +8781,15 @@
             <a:fontRef idx="minor"/>
           </p:style>
           <p:txBody>
-            <a:bodyPr lIns="100800" rIns="100800" tIns="72000" bIns="36000" anchor="t">
+            <a:bodyPr lIns="79200" rIns="79200" tIns="32400" bIns="36000" anchor="t">
               <a:noAutofit/>
             </a:bodyPr>
             <a:p>
+              <a:pPr>
+                <a:lnSpc>
+                  <a:spcPts val="1701"/>
+                </a:lnSpc>
+              </a:pPr>
               <a:r>
                 <a:rPr b="0" lang="en-US" sz="1270" spc="-1" strike="noStrike">
                   <a:solidFill>
@@ -6797,7 +8810,7 @@
         </p:sp>
         <p:sp>
           <p:nvSpPr>
-            <p:cNvPr id="113" name=""/>
+            <p:cNvPr id="125" name=""/>
             <p:cNvSpPr/>
             <p:nvPr/>
           </p:nvSpPr>
@@ -6825,7 +8838,7 @@
             <a:fontRef idx="minor"/>
           </p:style>
           <p:txBody>
-            <a:bodyPr lIns="61200" rIns="61200" tIns="0" bIns="0" anchor="ctr">
+            <a:bodyPr lIns="39600" rIns="39600" tIns="0" bIns="0" anchor="ctr">
               <a:noAutofit/>
             </a:bodyPr>
             <a:p>
@@ -6850,7 +8863,7 @@
       </p:grpSp>
       <p:grpSp>
         <p:nvGrpSpPr>
-          <p:cNvPr id="114" name=""/>
+          <p:cNvPr id="126" name=""/>
           <p:cNvGrpSpPr/>
           <p:nvPr/>
         </p:nvGrpSpPr>
@@ -6864,7 +8877,7 @@
         </p:grpSpPr>
         <p:sp>
           <p:nvSpPr>
-            <p:cNvPr id="115" name=""/>
+            <p:cNvPr id="127" name=""/>
             <p:cNvSpPr/>
             <p:nvPr/>
           </p:nvSpPr>
@@ -6895,10 +8908,15 @@
             <a:fontRef idx="minor"/>
           </p:style>
           <p:txBody>
-            <a:bodyPr lIns="100800" rIns="100800" tIns="72000" bIns="36000" anchor="t">
+            <a:bodyPr lIns="79200" rIns="79200" tIns="32400" bIns="36000" anchor="t">
               <a:noAutofit/>
             </a:bodyPr>
             <a:p>
+              <a:pPr>
+                <a:lnSpc>
+                  <a:spcPts val="1701"/>
+                </a:lnSpc>
+              </a:pPr>
               <a:r>
                 <a:rPr b="0" lang="en-US" sz="1270" spc="-1" strike="noStrike">
                   <a:solidFill>
@@ -6919,7 +8937,7 @@
         </p:sp>
         <p:sp>
           <p:nvSpPr>
-            <p:cNvPr id="116" name=""/>
+            <p:cNvPr id="128" name=""/>
             <p:cNvSpPr/>
             <p:nvPr/>
           </p:nvSpPr>
@@ -6947,7 +8965,7 @@
             <a:fontRef idx="minor"/>
           </p:style>
           <p:txBody>
-            <a:bodyPr lIns="61200" rIns="61200" tIns="0" bIns="0" anchor="ctr">
+            <a:bodyPr lIns="39600" rIns="39600" tIns="0" bIns="0" anchor="ctr">
               <a:noAutofit/>
             </a:bodyPr>
             <a:p>
@@ -6972,6 +8990,49 @@
       </p:grpSp>
       <p:sp>
         <p:nvSpPr>
+          <p:cNvPr id="129" name=""/>
+          <p:cNvSpPr txBox="1"/>
+          <p:nvPr/>
+        </p:nvSpPr>
+        <p:spPr>
+          <a:xfrm>
+            <a:off x="7588800" y="4906800"/>
+            <a:ext cx="1440000" cy="212400"/>
+          </a:xfrm>
+          <a:prstGeom prst="rect">
+            <a:avLst/>
+          </a:prstGeom>
+          <a:noFill/>
+          <a:ln w="0">
+            <a:noFill/>
+          </a:ln>
+        </p:spPr>
+        <p:txBody>
+          <a:bodyPr lIns="0" rIns="0" tIns="0" bIns="0" anchor="ctr">
+            <a:noAutofit/>
+          </a:bodyPr>
+          <a:p>
+            <a:pPr algn="r"/>
+            <a:r>
+              <a:rPr b="0" lang="en-US" sz="1110" spc="-1" strike="noStrike">
+                <a:solidFill>
+                  <a:srgbClr val="005aab"/>
+                </a:solidFill>
+                <a:latin typeface="Fira Sans Book"/>
+              </a:rPr>
+              <a:t>5/6</a:t>
+            </a:r>
+            <a:endParaRPr b="0" lang="en-US" sz="1110" spc="-1" strike="noStrike">
+              <a:solidFill>
+                <a:srgbClr val="005aab"/>
+              </a:solidFill>
+              <a:latin typeface="Fira Sans Book"/>
+            </a:endParaRPr>
+          </a:p>
+        </p:txBody>
+      </p:sp>
+      <p:sp>
+        <p:nvSpPr>
           <p:cNvPr id="3" name="PlaceHolder 2"/>
           <p:cNvSpPr>
             <a:spLocks noGrp="1"/>
@@ -6987,26 +9048,6 @@
             <a:r>
               <a:t>Nama Anda · Judul Presentasi Anda · STEI ITB</a:t>
             </a:r>
-          </a:p>
-        </p:txBody>
-      </p:sp>
-      <p:sp>
-        <p:nvSpPr>
-          <p:cNvPr id="4" name="PlaceHolder 3"/>
-          <p:cNvSpPr>
-            <a:spLocks noGrp="1"/>
-          </p:cNvSpPr>
-          <p:nvPr>
-            <p:ph type="sldNum" idx="2"/>
-          </p:nvPr>
-        </p:nvSpPr>
-        <p:spPr/>
-        <p:txBody>
-          <a:bodyPr/>
-          <a:p>
-            <a:fld id="{581E043C-CB13-45E3-BF10-8C04FFEC4A92}" type="slidenum">
-              <a:t>8</a:t>
-            </a:fld>
           </a:p>
         </p:txBody>
       </p:sp>
@@ -7042,7 +9083,7 @@
       </p:grpSpPr>
       <p:sp>
         <p:nvSpPr>
-          <p:cNvPr id="117" name="PlaceHolder 1"/>
+          <p:cNvPr id="130" name="PlaceHolder 1"/>
           <p:cNvSpPr>
             <a:spLocks noGrp="1"/>
           </p:cNvSpPr>
@@ -7091,7 +9132,7 @@
       </p:sp>
       <p:sp>
         <p:nvSpPr>
-          <p:cNvPr id="118" name=""/>
+          <p:cNvPr id="131" name=""/>
           <p:cNvSpPr/>
           <p:nvPr/>
         </p:nvSpPr>
@@ -7130,139 +9171,806 @@
           </a:p>
         </p:txBody>
       </p:sp>
-      <p:sp>
-        <p:nvSpPr>
-          <p:cNvPr id="119" name=""/>
-          <p:cNvSpPr/>
+      <p:graphicFrame>
+        <p:nvGraphicFramePr>
+          <p:cNvPr id="132" name=""/>
+          <p:cNvGraphicFramePr/>
           <p:nvPr/>
-        </p:nvSpPr>
-        <p:spPr>
-          <a:xfrm>
-            <a:off x="2138400" y="2260800"/>
-            <a:ext cx="4867200" cy="0"/>
-          </a:xfrm>
-          <a:prstGeom prst="line">
-            <a:avLst/>
-          </a:prstGeom>
-          <a:ln w="16200">
-            <a:solidFill>
-              <a:srgbClr val="212121"/>
-            </a:solidFill>
-            <a:round/>
-          </a:ln>
-        </p:spPr>
-        <p:style>
-          <a:lnRef idx="0"/>
-          <a:fillRef idx="0"/>
-          <a:effectRef idx="0"/>
-          <a:fontRef idx="minor"/>
-        </p:style>
-        <p:txBody>
-          <a:bodyPr lIns="0" rIns="0" tIns="0" bIns="0" anchor="t">
-            <a:noAutofit/>
-          </a:bodyPr>
-          <a:p>
-            <a:endParaRPr b="0" lang="en-US" sz="1580" spc="-1" strike="noStrike">
-              <a:solidFill>
-                <a:srgbClr val="212121"/>
-              </a:solidFill>
-              <a:latin typeface="Fira Sans Book"/>
-            </a:endParaRPr>
-          </a:p>
-        </p:txBody>
-      </p:sp>
-      <p:sp>
-        <p:nvSpPr>
-          <p:cNvPr id="120" name=""/>
-          <p:cNvSpPr/>
-          <p:nvPr/>
-        </p:nvSpPr>
-        <p:spPr>
-          <a:xfrm>
-            <a:off x="2138400" y="2620800"/>
-            <a:ext cx="4867200" cy="0"/>
-          </a:xfrm>
-          <a:prstGeom prst="line">
-            <a:avLst/>
-          </a:prstGeom>
-          <a:ln w="10080">
-            <a:solidFill>
-              <a:srgbClr val="212121"/>
-            </a:solidFill>
-            <a:round/>
-          </a:ln>
-        </p:spPr>
-        <p:style>
-          <a:lnRef idx="0"/>
-          <a:fillRef idx="0"/>
-          <a:effectRef idx="0"/>
-          <a:fontRef idx="minor"/>
-        </p:style>
-        <p:txBody>
-          <a:bodyPr lIns="0" rIns="0" tIns="0" bIns="0" anchor="t">
-            <a:noAutofit/>
-          </a:bodyPr>
-          <a:p>
-            <a:endParaRPr b="0" lang="en-US" sz="1580" spc="-1" strike="noStrike">
-              <a:solidFill>
-                <a:srgbClr val="212121"/>
-              </a:solidFill>
-              <a:latin typeface="Fira Sans Book"/>
-            </a:endParaRPr>
-          </a:p>
-        </p:txBody>
-      </p:sp>
-      <p:sp>
-        <p:nvSpPr>
-          <p:cNvPr id="121" name=""/>
-          <p:cNvSpPr/>
-          <p:nvPr/>
-        </p:nvSpPr>
-        <p:spPr>
-          <a:xfrm>
-            <a:off x="2138400" y="3492000"/>
-            <a:ext cx="4867200" cy="0"/>
-          </a:xfrm>
-          <a:prstGeom prst="line">
-            <a:avLst/>
-          </a:prstGeom>
-          <a:ln w="16200">
-            <a:solidFill>
-              <a:srgbClr val="212121"/>
-            </a:solidFill>
-            <a:round/>
-          </a:ln>
-        </p:spPr>
-        <p:style>
-          <a:lnRef idx="0"/>
-          <a:fillRef idx="0"/>
-          <a:effectRef idx="0"/>
-          <a:fontRef idx="minor"/>
-        </p:style>
-        <p:txBody>
-          <a:bodyPr lIns="0" rIns="0" tIns="0" bIns="0" anchor="t">
-            <a:noAutofit/>
-          </a:bodyPr>
-          <a:p>
-            <a:endParaRPr b="0" lang="en-US" sz="1580" spc="-1" strike="noStrike">
-              <a:solidFill>
-                <a:srgbClr val="212121"/>
-              </a:solidFill>
-              <a:latin typeface="Fira Sans Book"/>
-            </a:endParaRPr>
-          </a:p>
-        </p:txBody>
-      </p:sp>
-      <p:sp>
-        <p:nvSpPr>
-          <p:cNvPr id="122" name=""/>
+        </p:nvGraphicFramePr>
+        <p:xfrm>
+          <a:off x="2138400" y="2260800"/>
+          <a:ext cx="4921200" cy="1231200"/>
+        </p:xfrm>
+        <a:graphic>
+          <a:graphicData uri="http://schemas.openxmlformats.org/drawingml/2006/table">
+            <a:tbl>
+              <a:tblPr/>
+              <a:tblGrid>
+                <a:gridCol w="1807200"/>
+                <a:gridCol w="810000"/>
+                <a:gridCol w="684000"/>
+                <a:gridCol w="1620000"/>
+              </a:tblGrid>
+              <a:tr h="360000">
+                <a:tc>
+                  <a:txBody>
+                    <a:bodyPr lIns="0" rIns="36000" tIns="75600" bIns="69120" anchor="t">
+                      <a:noAutofit/>
+                    </a:bodyPr>
+                    <a:p>
+                      <a:pPr>
+                        <a:lnSpc>
+                          <a:spcPct val="100000"/>
+                        </a:lnSpc>
+                      </a:pPr>
+                      <a:r>
+                        <a:rPr b="1" lang="en-US" sz="1420" spc="-1" strike="noStrike">
+                          <a:solidFill>
+                            <a:srgbClr val="212121"/>
+                          </a:solidFill>
+                          <a:latin typeface="Fira Sans"/>
+                        </a:rPr>
+                        <a:t>Tahap</a:t>
+                      </a:r>
+                      <a:endParaRPr b="0" lang="en-US" sz="1420" spc="-1" strike="noStrike">
+                        <a:solidFill>
+                          <a:srgbClr val="212121"/>
+                        </a:solidFill>
+                        <a:latin typeface="Fira Sans Book"/>
+                      </a:endParaRPr>
+                    </a:p>
+                  </a:txBody>
+                  <a:tcPr marL="0" anchor="t" marR="36000">
+                    <a:lnL>
+                      <a:noFill/>
+                    </a:lnL>
+                    <a:lnR>
+                      <a:noFill/>
+                    </a:lnR>
+                    <a:lnT w="18720">
+                      <a:solidFill>
+                        <a:srgbClr val="212121"/>
+                      </a:solidFill>
+                      <a:prstDash val="solid"/>
+                    </a:lnT>
+                    <a:lnB w="11520">
+                      <a:solidFill>
+                        <a:srgbClr val="212121"/>
+                      </a:solidFill>
+                      <a:prstDash val="solid"/>
+                    </a:lnB>
+                    <a:noFill/>
+                  </a:tcPr>
+                </a:tc>
+                <a:tc>
+                  <a:txBody>
+                    <a:bodyPr lIns="36000" rIns="120960" tIns="75600" bIns="69120" anchor="t">
+                      <a:noAutofit/>
+                    </a:bodyPr>
+                    <a:p>
+                      <a:pPr algn="r">
+                        <a:lnSpc>
+                          <a:spcPct val="100000"/>
+                        </a:lnSpc>
+                      </a:pPr>
+                      <a:r>
+                        <a:rPr b="1" lang="en-US" sz="1420" spc="-1" strike="noStrike">
+                          <a:solidFill>
+                            <a:srgbClr val="212121"/>
+                          </a:solidFill>
+                          <a:latin typeface="Fira Sans"/>
+                        </a:rPr>
+                        <a:t>Jumlah</a:t>
+                      </a:r>
+                      <a:endParaRPr b="0" lang="en-US" sz="1420" spc="-1" strike="noStrike">
+                        <a:solidFill>
+                          <a:srgbClr val="212121"/>
+                        </a:solidFill>
+                        <a:latin typeface="Fira Sans Book"/>
+                      </a:endParaRPr>
+                    </a:p>
+                  </a:txBody>
+                  <a:tcPr anchor="t" marL="36000" marR="120960">
+                    <a:lnL>
+                      <a:noFill/>
+                    </a:lnL>
+                    <a:lnR>
+                      <a:noFill/>
+                    </a:lnR>
+                    <a:lnT w="18720">
+                      <a:solidFill>
+                        <a:srgbClr val="212121"/>
+                      </a:solidFill>
+                      <a:prstDash val="solid"/>
+                    </a:lnT>
+                    <a:lnB w="11520">
+                      <a:solidFill>
+                        <a:srgbClr val="212121"/>
+                      </a:solidFill>
+                      <a:prstDash val="solid"/>
+                    </a:lnB>
+                    <a:noFill/>
+                  </a:tcPr>
+                </a:tc>
+                <a:tc>
+                  <a:txBody>
+                    <a:bodyPr lIns="36000" rIns="120960" tIns="75600" bIns="69120" anchor="t">
+                      <a:noAutofit/>
+                    </a:bodyPr>
+                    <a:p>
+                      <a:pPr algn="r">
+                        <a:lnSpc>
+                          <a:spcPct val="100000"/>
+                        </a:lnSpc>
+                      </a:pPr>
+                      <a:r>
+                        <a:rPr b="1" lang="en-US" sz="1420" spc="-1" strike="noStrike">
+                          <a:solidFill>
+                            <a:srgbClr val="212121"/>
+                          </a:solidFill>
+                          <a:latin typeface="Fira Sans"/>
+                        </a:rPr>
+                        <a:t>Sisa</a:t>
+                      </a:r>
+                      <a:endParaRPr b="0" lang="en-US" sz="1420" spc="-1" strike="noStrike">
+                        <a:solidFill>
+                          <a:srgbClr val="212121"/>
+                        </a:solidFill>
+                        <a:latin typeface="Fira Sans Book"/>
+                      </a:endParaRPr>
+                    </a:p>
+                  </a:txBody>
+                  <a:tcPr anchor="t" marL="36000" marR="120960">
+                    <a:lnL>
+                      <a:noFill/>
+                    </a:lnL>
+                    <a:lnR>
+                      <a:noFill/>
+                    </a:lnR>
+                    <a:lnT w="18720">
+                      <a:solidFill>
+                        <a:srgbClr val="212121"/>
+                      </a:solidFill>
+                      <a:prstDash val="solid"/>
+                    </a:lnT>
+                    <a:lnB w="11520">
+                      <a:solidFill>
+                        <a:srgbClr val="212121"/>
+                      </a:solidFill>
+                      <a:prstDash val="solid"/>
+                    </a:lnB>
+                    <a:noFill/>
+                  </a:tcPr>
+                </a:tc>
+                <a:tc>
+                  <a:txBody>
+                    <a:bodyPr lIns="120960" rIns="0" tIns="75600" bIns="69120" anchor="t">
+                      <a:noAutofit/>
+                    </a:bodyPr>
+                    <a:p>
+                      <a:pPr>
+                        <a:lnSpc>
+                          <a:spcPct val="100000"/>
+                        </a:lnSpc>
+                      </a:pPr>
+                      <a:r>
+                        <a:rPr b="1" lang="en-US" sz="1420" spc="-9" strike="noStrike">
+                          <a:solidFill>
+                            <a:srgbClr val="212121"/>
+                          </a:solidFill>
+                          <a:latin typeface="Fira Sans"/>
+                        </a:rPr>
+                        <a:t>Catatan</a:t>
+                      </a:r>
+                      <a:endParaRPr b="0" lang="en-US" sz="1420" spc="-1" strike="noStrike">
+                        <a:solidFill>
+                          <a:srgbClr val="212121"/>
+                        </a:solidFill>
+                        <a:latin typeface="Fira Sans Book"/>
+                      </a:endParaRPr>
+                    </a:p>
+                  </a:txBody>
+                  <a:tcPr marR="0" anchor="t" marL="120960">
+                    <a:lnL>
+                      <a:noFill/>
+                    </a:lnL>
+                    <a:lnR>
+                      <a:noFill/>
+                    </a:lnR>
+                    <a:lnT w="18720">
+                      <a:solidFill>
+                        <a:srgbClr val="212121"/>
+                      </a:solidFill>
+                      <a:prstDash val="solid"/>
+                    </a:lnT>
+                    <a:lnB w="11520">
+                      <a:solidFill>
+                        <a:srgbClr val="212121"/>
+                      </a:solidFill>
+                      <a:prstDash val="solid"/>
+                    </a:lnB>
+                    <a:noFill/>
+                  </a:tcPr>
+                </a:tc>
+              </a:tr>
+              <a:tr h="309600">
+                <a:tc>
+                  <a:txBody>
+                    <a:bodyPr lIns="0" rIns="36000" tIns="72000" bIns="22320" anchor="t">
+                      <a:noAutofit/>
+                    </a:bodyPr>
+                    <a:p>
+                      <a:pPr>
+                        <a:lnSpc>
+                          <a:spcPct val="100000"/>
+                        </a:lnSpc>
+                      </a:pPr>
+                      <a:r>
+                        <a:rPr b="0" lang="en-US" sz="1420" spc="-1" strike="noStrike">
+                          <a:solidFill>
+                            <a:srgbClr val="212121"/>
+                          </a:solidFill>
+                          <a:latin typeface="Fira Sans Book"/>
+                        </a:rPr>
+                        <a:t>Pencarian basis data</a:t>
+                      </a:r>
+                      <a:endParaRPr b="0" lang="en-US" sz="1420" spc="-1" strike="noStrike">
+                        <a:solidFill>
+                          <a:srgbClr val="212121"/>
+                        </a:solidFill>
+                        <a:latin typeface="Fira Sans Book"/>
+                      </a:endParaRPr>
+                    </a:p>
+                  </a:txBody>
+                  <a:tcPr marL="0" anchor="t" marR="36000">
+                    <a:lnL>
+                      <a:noFill/>
+                    </a:lnL>
+                    <a:lnR>
+                      <a:noFill/>
+                    </a:lnR>
+                    <a:lnT>
+                      <a:noFill/>
+                    </a:lnT>
+                    <a:lnB>
+                      <a:noFill/>
+                    </a:lnB>
+                    <a:noFill/>
+                  </a:tcPr>
+                </a:tc>
+                <a:tc>
+                  <a:txBody>
+                    <a:bodyPr lIns="36000" rIns="120960" tIns="72000" bIns="22320" anchor="t">
+                      <a:noAutofit/>
+                    </a:bodyPr>
+                    <a:p>
+                      <a:pPr algn="r">
+                        <a:lnSpc>
+                          <a:spcPct val="100000"/>
+                        </a:lnSpc>
+                      </a:pPr>
+                      <a:r>
+                        <a:rPr b="0" lang="en-US" sz="1420" spc="-1" strike="noStrike">
+                          <a:solidFill>
+                            <a:srgbClr val="212121"/>
+                          </a:solidFill>
+                          <a:latin typeface="Fira Sans Book"/>
+                        </a:rPr>
+                        <a:t>1.250</a:t>
+                      </a:r>
+                      <a:endParaRPr b="0" lang="en-US" sz="1420" spc="-1" strike="noStrike">
+                        <a:solidFill>
+                          <a:srgbClr val="212121"/>
+                        </a:solidFill>
+                        <a:latin typeface="Fira Sans Book"/>
+                      </a:endParaRPr>
+                    </a:p>
+                  </a:txBody>
+                  <a:tcPr anchor="t" marL="36000" marR="120960">
+                    <a:lnL>
+                      <a:noFill/>
+                    </a:lnL>
+                    <a:lnR>
+                      <a:noFill/>
+                    </a:lnR>
+                    <a:lnT>
+                      <a:noFill/>
+                    </a:lnT>
+                    <a:lnB>
+                      <a:noFill/>
+                    </a:lnB>
+                    <a:noFill/>
+                  </a:tcPr>
+                </a:tc>
+                <a:tc>
+                  <a:txBody>
+                    <a:bodyPr lIns="36000" rIns="120960" tIns="72000" bIns="22320" anchor="t">
+                      <a:noAutofit/>
+                    </a:bodyPr>
+                    <a:p>
+                      <a:pPr algn="r">
+                        <a:lnSpc>
+                          <a:spcPct val="100000"/>
+                        </a:lnSpc>
+                      </a:pPr>
+                      <a:r>
+                        <a:rPr b="0" lang="en-US" sz="1420" spc="-1" strike="noStrike">
+                          <a:solidFill>
+                            <a:srgbClr val="212121"/>
+                          </a:solidFill>
+                          <a:latin typeface="Fira Sans Book"/>
+                        </a:rPr>
+                        <a:t>1.250</a:t>
+                      </a:r>
+                      <a:endParaRPr b="0" lang="en-US" sz="1420" spc="-1" strike="noStrike">
+                        <a:solidFill>
+                          <a:srgbClr val="212121"/>
+                        </a:solidFill>
+                        <a:latin typeface="Fira Sans Book"/>
+                      </a:endParaRPr>
+                    </a:p>
+                  </a:txBody>
+                  <a:tcPr anchor="t" marL="36000" marR="120960">
+                    <a:lnL>
+                      <a:noFill/>
+                    </a:lnL>
+                    <a:lnR>
+                      <a:noFill/>
+                    </a:lnR>
+                    <a:lnT>
+                      <a:noFill/>
+                    </a:lnT>
+                    <a:lnB>
+                      <a:noFill/>
+                    </a:lnB>
+                    <a:noFill/>
+                  </a:tcPr>
+                </a:tc>
+                <a:tc>
+                  <a:txBody>
+                    <a:bodyPr lIns="120960" rIns="0" tIns="72000" bIns="22320" anchor="t">
+                      <a:noAutofit/>
+                    </a:bodyPr>
+                    <a:p>
+                      <a:pPr>
+                        <a:lnSpc>
+                          <a:spcPct val="100000"/>
+                        </a:lnSpc>
+                      </a:pPr>
+                      <a:r>
+                        <a:rPr b="0" lang="en-US" sz="1420" spc="-9" strike="noStrike">
+                          <a:solidFill>
+                            <a:srgbClr val="212121"/>
+                          </a:solidFill>
+                          <a:latin typeface="Fira Sans Book"/>
+                        </a:rPr>
+                        <a:t>Scopus, IEEE, ACM</a:t>
+                      </a:r>
+                      <a:endParaRPr b="0" lang="en-US" sz="1420" spc="-1" strike="noStrike">
+                        <a:solidFill>
+                          <a:srgbClr val="212121"/>
+                        </a:solidFill>
+                        <a:latin typeface="Fira Sans Book"/>
+                      </a:endParaRPr>
+                    </a:p>
+                  </a:txBody>
+                  <a:tcPr marR="0" anchor="t" marL="120960">
+                    <a:lnL>
+                      <a:noFill/>
+                    </a:lnL>
+                    <a:lnR>
+                      <a:noFill/>
+                    </a:lnR>
+                    <a:lnT>
+                      <a:noFill/>
+                    </a:lnT>
+                    <a:lnB>
+                      <a:noFill/>
+                    </a:lnB>
+                    <a:noFill/>
+                  </a:tcPr>
+                </a:tc>
+              </a:tr>
+              <a:tr h="255600">
+                <a:tc>
+                  <a:txBody>
+                    <a:bodyPr lIns="0" rIns="36000" tIns="18000" bIns="22320" anchor="t">
+                      <a:noAutofit/>
+                    </a:bodyPr>
+                    <a:p>
+                      <a:pPr>
+                        <a:lnSpc>
+                          <a:spcPct val="100000"/>
+                        </a:lnSpc>
+                      </a:pPr>
+                      <a:r>
+                        <a:rPr b="0" lang="en-US" sz="1420" spc="-1" strike="noStrike">
+                          <a:solidFill>
+                            <a:srgbClr val="212121"/>
+                          </a:solidFill>
+                          <a:latin typeface="Fira Sans Book"/>
+                        </a:rPr>
+                        <a:t>Saring judul/abstrak</a:t>
+                      </a:r>
+                      <a:endParaRPr b="0" lang="en-US" sz="1420" spc="-1" strike="noStrike">
+                        <a:solidFill>
+                          <a:srgbClr val="212121"/>
+                        </a:solidFill>
+                        <a:latin typeface="Fira Sans Book"/>
+                      </a:endParaRPr>
+                    </a:p>
+                  </a:txBody>
+                  <a:tcPr marL="0" anchor="t" marR="36000">
+                    <a:lnL>
+                      <a:noFill/>
+                    </a:lnL>
+                    <a:lnR>
+                      <a:noFill/>
+                    </a:lnR>
+                    <a:lnT>
+                      <a:noFill/>
+                    </a:lnT>
+                    <a:lnB>
+                      <a:noFill/>
+                    </a:lnB>
+                    <a:noFill/>
+                  </a:tcPr>
+                </a:tc>
+                <a:tc>
+                  <a:txBody>
+                    <a:bodyPr lIns="36000" rIns="120960" tIns="18000" bIns="22320" anchor="t">
+                      <a:noAutofit/>
+                    </a:bodyPr>
+                    <a:p>
+                      <a:pPr algn="r">
+                        <a:lnSpc>
+                          <a:spcPct val="100000"/>
+                        </a:lnSpc>
+                      </a:pPr>
+                      <a:r>
+                        <a:rPr b="0" lang="en-US" sz="1420" spc="-1" strike="noStrike">
+                          <a:solidFill>
+                            <a:srgbClr val="212121"/>
+                          </a:solidFill>
+                          <a:latin typeface="Fira Sans Book"/>
+                        </a:rPr>
+                        <a:t>− </a:t>
+                      </a:r>
+                      <a:r>
+                        <a:rPr b="0" lang="en-US" sz="1420" spc="-1" strike="noStrike">
+                          <a:solidFill>
+                            <a:srgbClr val="212121"/>
+                          </a:solidFill>
+                          <a:latin typeface="Fira Sans Book"/>
+                        </a:rPr>
+                        <a:t>980</a:t>
+                      </a:r>
+                      <a:endParaRPr b="0" lang="en-US" sz="1420" spc="-1" strike="noStrike">
+                        <a:solidFill>
+                          <a:srgbClr val="212121"/>
+                        </a:solidFill>
+                        <a:latin typeface="Fira Sans Book"/>
+                      </a:endParaRPr>
+                    </a:p>
+                  </a:txBody>
+                  <a:tcPr anchor="t" marL="36000" marR="120960">
+                    <a:lnL>
+                      <a:noFill/>
+                    </a:lnL>
+                    <a:lnR>
+                      <a:noFill/>
+                    </a:lnR>
+                    <a:lnT>
+                      <a:noFill/>
+                    </a:lnT>
+                    <a:lnB>
+                      <a:noFill/>
+                    </a:lnB>
+                    <a:noFill/>
+                  </a:tcPr>
+                </a:tc>
+                <a:tc>
+                  <a:txBody>
+                    <a:bodyPr lIns="36000" rIns="120960" tIns="18000" bIns="22320" anchor="t">
+                      <a:noAutofit/>
+                    </a:bodyPr>
+                    <a:p>
+                      <a:pPr algn="r">
+                        <a:lnSpc>
+                          <a:spcPct val="100000"/>
+                        </a:lnSpc>
+                      </a:pPr>
+                      <a:r>
+                        <a:rPr b="0" lang="en-US" sz="1420" spc="-1" strike="noStrike">
+                          <a:solidFill>
+                            <a:srgbClr val="212121"/>
+                          </a:solidFill>
+                          <a:latin typeface="Fira Sans Book"/>
+                        </a:rPr>
+                        <a:t>270</a:t>
+                      </a:r>
+                      <a:endParaRPr b="0" lang="en-US" sz="1420" spc="-1" strike="noStrike">
+                        <a:solidFill>
+                          <a:srgbClr val="212121"/>
+                        </a:solidFill>
+                        <a:latin typeface="Fira Sans Book"/>
+                      </a:endParaRPr>
+                    </a:p>
+                  </a:txBody>
+                  <a:tcPr anchor="t" marL="36000" marR="120960">
+                    <a:lnL>
+                      <a:noFill/>
+                    </a:lnL>
+                    <a:lnR>
+                      <a:noFill/>
+                    </a:lnR>
+                    <a:lnT>
+                      <a:noFill/>
+                    </a:lnT>
+                    <a:lnB>
+                      <a:noFill/>
+                    </a:lnB>
+                    <a:noFill/>
+                  </a:tcPr>
+                </a:tc>
+                <a:tc>
+                  <a:txBody>
+                    <a:bodyPr lIns="120960" rIns="0" tIns="18000" bIns="22320" anchor="t">
+                      <a:noAutofit/>
+                    </a:bodyPr>
+                    <a:p>
+                      <a:pPr>
+                        <a:lnSpc>
+                          <a:spcPct val="100000"/>
+                        </a:lnSpc>
+                      </a:pPr>
+                      <a:r>
+                        <a:rPr b="0" lang="en-US" sz="1420" spc="-9" strike="noStrike">
+                          <a:solidFill>
+                            <a:srgbClr val="212121"/>
+                          </a:solidFill>
+                          <a:latin typeface="Fira Sans Book"/>
+                        </a:rPr>
+                        <a:t>kriteria inklusi</a:t>
+                      </a:r>
+                      <a:endParaRPr b="0" lang="en-US" sz="1420" spc="-1" strike="noStrike">
+                        <a:solidFill>
+                          <a:srgbClr val="212121"/>
+                        </a:solidFill>
+                        <a:latin typeface="Fira Sans Book"/>
+                      </a:endParaRPr>
+                    </a:p>
+                  </a:txBody>
+                  <a:tcPr marR="0" anchor="t" marL="120960">
+                    <a:lnL>
+                      <a:noFill/>
+                    </a:lnL>
+                    <a:lnR>
+                      <a:noFill/>
+                    </a:lnR>
+                    <a:lnT>
+                      <a:noFill/>
+                    </a:lnT>
+                    <a:lnB>
+                      <a:noFill/>
+                    </a:lnB>
+                    <a:noFill/>
+                  </a:tcPr>
+                </a:tc>
+              </a:tr>
+              <a:tr h="306000">
+                <a:tc>
+                  <a:txBody>
+                    <a:bodyPr lIns="0" rIns="36000" tIns="18000" bIns="72720" anchor="t">
+                      <a:noAutofit/>
+                    </a:bodyPr>
+                    <a:p>
+                      <a:pPr>
+                        <a:lnSpc>
+                          <a:spcPct val="100000"/>
+                        </a:lnSpc>
+                      </a:pPr>
+                      <a:r>
+                        <a:rPr b="0" lang="en-US" sz="1420" spc="-1" strike="noStrike">
+                          <a:solidFill>
+                            <a:srgbClr val="212121"/>
+                          </a:solidFill>
+                          <a:latin typeface="Fira Sans Book"/>
+                        </a:rPr>
+                        <a:t>Baca teks lengkap</a:t>
+                      </a:r>
+                      <a:endParaRPr b="0" lang="en-US" sz="1420" spc="-1" strike="noStrike">
+                        <a:solidFill>
+                          <a:srgbClr val="212121"/>
+                        </a:solidFill>
+                        <a:latin typeface="Fira Sans Book"/>
+                      </a:endParaRPr>
+                    </a:p>
+                  </a:txBody>
+                  <a:tcPr marL="0" anchor="t" marR="36000">
+                    <a:lnL>
+                      <a:noFill/>
+                    </a:lnL>
+                    <a:lnR>
+                      <a:noFill/>
+                    </a:lnR>
+                    <a:lnT>
+                      <a:noFill/>
+                    </a:lnT>
+                    <a:lnB w="18720">
+                      <a:solidFill>
+                        <a:srgbClr val="212121"/>
+                      </a:solidFill>
+                      <a:prstDash val="solid"/>
+                    </a:lnB>
+                    <a:noFill/>
+                  </a:tcPr>
+                </a:tc>
+                <a:tc>
+                  <a:txBody>
+                    <a:bodyPr lIns="36000" rIns="120960" tIns="18000" bIns="72720" anchor="t">
+                      <a:noAutofit/>
+                    </a:bodyPr>
+                    <a:p>
+                      <a:pPr algn="r">
+                        <a:lnSpc>
+                          <a:spcPct val="100000"/>
+                        </a:lnSpc>
+                      </a:pPr>
+                      <a:r>
+                        <a:rPr b="0" lang="en-US" sz="1420" spc="-1" strike="noStrike">
+                          <a:solidFill>
+                            <a:srgbClr val="212121"/>
+                          </a:solidFill>
+                          <a:latin typeface="Fira Sans Book"/>
+                        </a:rPr>
+                        <a:t>− </a:t>
+                      </a:r>
+                      <a:r>
+                        <a:rPr b="0" lang="en-US" sz="1420" spc="-1" strike="noStrike">
+                          <a:solidFill>
+                            <a:srgbClr val="212121"/>
+                          </a:solidFill>
+                          <a:latin typeface="Fira Sans Book"/>
+                        </a:rPr>
+                        <a:t>166</a:t>
+                      </a:r>
+                      <a:endParaRPr b="0" lang="en-US" sz="1420" spc="-1" strike="noStrike">
+                        <a:solidFill>
+                          <a:srgbClr val="212121"/>
+                        </a:solidFill>
+                        <a:latin typeface="Fira Sans Book"/>
+                      </a:endParaRPr>
+                    </a:p>
+                  </a:txBody>
+                  <a:tcPr anchor="t" marL="36000" marR="120960">
+                    <a:lnL>
+                      <a:noFill/>
+                    </a:lnL>
+                    <a:lnR>
+                      <a:noFill/>
+                    </a:lnR>
+                    <a:lnT>
+                      <a:noFill/>
+                    </a:lnT>
+                    <a:lnB w="18720">
+                      <a:solidFill>
+                        <a:srgbClr val="212121"/>
+                      </a:solidFill>
+                      <a:prstDash val="solid"/>
+                    </a:lnB>
+                    <a:noFill/>
+                  </a:tcPr>
+                </a:tc>
+                <a:tc>
+                  <a:txBody>
+                    <a:bodyPr lIns="36000" rIns="120960" tIns="18000" bIns="72720" anchor="t">
+                      <a:noAutofit/>
+                    </a:bodyPr>
+                    <a:p>
+                      <a:pPr algn="r">
+                        <a:lnSpc>
+                          <a:spcPct val="100000"/>
+                        </a:lnSpc>
+                      </a:pPr>
+                      <a:r>
+                        <a:rPr b="1" lang="en-US" sz="1420" spc="-1" strike="noStrike">
+                          <a:solidFill>
+                            <a:srgbClr val="212121"/>
+                          </a:solidFill>
+                          <a:latin typeface="Fira Sans"/>
+                        </a:rPr>
+                        <a:t>104</a:t>
+                      </a:r>
+                      <a:endParaRPr b="0" lang="en-US" sz="1420" spc="-1" strike="noStrike">
+                        <a:solidFill>
+                          <a:srgbClr val="212121"/>
+                        </a:solidFill>
+                        <a:latin typeface="Fira Sans Book"/>
+                      </a:endParaRPr>
+                    </a:p>
+                  </a:txBody>
+                  <a:tcPr anchor="t" marL="36000" marR="120960">
+                    <a:lnL>
+                      <a:noFill/>
+                    </a:lnL>
+                    <a:lnR>
+                      <a:noFill/>
+                    </a:lnR>
+                    <a:lnT>
+                      <a:noFill/>
+                    </a:lnT>
+                    <a:lnB w="18720">
+                      <a:solidFill>
+                        <a:srgbClr val="212121"/>
+                      </a:solidFill>
+                      <a:prstDash val="solid"/>
+                    </a:lnB>
+                    <a:noFill/>
+                  </a:tcPr>
+                </a:tc>
+                <a:tc>
+                  <a:txBody>
+                    <a:bodyPr lIns="120960" rIns="0" tIns="18000" bIns="72720" anchor="t">
+                      <a:noAutofit/>
+                    </a:bodyPr>
+                    <a:p>
+                      <a:pPr>
+                        <a:lnSpc>
+                          <a:spcPct val="100000"/>
+                        </a:lnSpc>
+                      </a:pPr>
+                      <a:r>
+                        <a:rPr b="0" lang="en-US" sz="1420" spc="-9" strike="noStrike">
+                          <a:solidFill>
+                            <a:srgbClr val="212121"/>
+                          </a:solidFill>
+                          <a:latin typeface="Fira Sans Book"/>
+                        </a:rPr>
+                        <a:t>penilaian kualitas</a:t>
+                      </a:r>
+                      <a:endParaRPr b="0" lang="en-US" sz="1420" spc="-1" strike="noStrike">
+                        <a:solidFill>
+                          <a:srgbClr val="212121"/>
+                        </a:solidFill>
+                        <a:latin typeface="Fira Sans Book"/>
+                      </a:endParaRPr>
+                    </a:p>
+                  </a:txBody>
+                  <a:tcPr marR="0" anchor="t" marL="120960">
+                    <a:lnL>
+                      <a:noFill/>
+                    </a:lnL>
+                    <a:lnR>
+                      <a:noFill/>
+                    </a:lnR>
+                    <a:lnT>
+                      <a:noFill/>
+                    </a:lnT>
+                    <a:lnB w="18720">
+                      <a:solidFill>
+                        <a:srgbClr val="212121"/>
+                      </a:solidFill>
+                      <a:prstDash val="solid"/>
+                    </a:lnB>
+                    <a:noFill/>
+                  </a:tcPr>
+                </a:tc>
+              </a:tr>
+            </a:tbl>
+          </a:graphicData>
+        </a:graphic>
+      </p:graphicFrame>
+      <p:sp>
+        <p:nvSpPr>
+          <p:cNvPr id="133" name=""/>
           <p:cNvSpPr txBox="1"/>
           <p:nvPr/>
         </p:nvSpPr>
         <p:spPr>
           <a:xfrm>
-            <a:off x="2138400" y="2329200"/>
-            <a:ext cx="1800000" cy="234000"/>
+            <a:off x="7588800" y="4906800"/>
+            <a:ext cx="1440000" cy="212400"/>
           </a:xfrm>
           <a:prstGeom prst="rect">
             <a:avLst/>
@@ -7273,510 +9981,23 @@
           </a:ln>
         </p:spPr>
         <p:txBody>
-          <a:bodyPr lIns="0" rIns="0" tIns="0" bIns="0" anchor="t">
+          <a:bodyPr lIns="0" rIns="0" tIns="0" bIns="0" anchor="ctr">
             <a:noAutofit/>
           </a:bodyPr>
           <a:p>
-            <a:r>
-              <a:rPr b="1" lang="en-US" sz="1420" spc="-1" strike="noStrike">
-                <a:solidFill>
-                  <a:srgbClr val="212121"/>
-                </a:solidFill>
-                <a:latin typeface="Fira Sans"/>
-              </a:rPr>
-              <a:t>Tahap</a:t>
-            </a:r>
-            <a:endParaRPr b="0" lang="en-US" sz="1420" spc="-1" strike="noStrike">
-              <a:solidFill>
-                <a:srgbClr val="212121"/>
-              </a:solidFill>
-              <a:latin typeface="Fira Sans Book"/>
-            </a:endParaRPr>
-          </a:p>
-        </p:txBody>
-      </p:sp>
-      <p:sp>
-        <p:nvSpPr>
-          <p:cNvPr id="123" name=""/>
-          <p:cNvSpPr txBox="1"/>
-          <p:nvPr/>
-        </p:nvSpPr>
-        <p:spPr>
-          <a:xfrm>
-            <a:off x="2138400" y="2689200"/>
-            <a:ext cx="1800000" cy="792000"/>
-          </a:xfrm>
-          <a:prstGeom prst="rect">
-            <a:avLst/>
-          </a:prstGeom>
-          <a:noFill/>
-          <a:ln w="0">
-            <a:noFill/>
-          </a:ln>
-        </p:spPr>
-        <p:txBody>
-          <a:bodyPr lIns="0" rIns="0" tIns="0" bIns="0" anchor="t">
-            <a:noAutofit/>
-          </a:bodyPr>
-          <a:p>
-            <a:r>
-              <a:rPr b="0" lang="en-US" sz="1420" spc="-1" strike="noStrike">
-                <a:solidFill>
-                  <a:srgbClr val="212121"/>
-                </a:solidFill>
-                <a:latin typeface="Fira Sans Book"/>
-              </a:rPr>
-              <a:t>Pencarian basis data</a:t>
-            </a:r>
-            <a:endParaRPr b="0" lang="en-US" sz="1420" spc="-1" strike="noStrike">
-              <a:solidFill>
-                <a:srgbClr val="212121"/>
-              </a:solidFill>
-              <a:latin typeface="Fira Sans Book"/>
-            </a:endParaRPr>
-          </a:p>
-          <a:p>
-            <a:r>
-              <a:rPr b="0" lang="en-US" sz="1420" spc="-1" strike="noStrike">
-                <a:solidFill>
-                  <a:srgbClr val="212121"/>
-                </a:solidFill>
-                <a:latin typeface="Fira Sans Book"/>
-              </a:rPr>
-              <a:t>Saring judul/abstrak</a:t>
-            </a:r>
-            <a:endParaRPr b="0" lang="en-US" sz="1420" spc="-1" strike="noStrike">
-              <a:solidFill>
-                <a:srgbClr val="212121"/>
-              </a:solidFill>
-              <a:latin typeface="Fira Sans Book"/>
-            </a:endParaRPr>
-          </a:p>
-          <a:p>
-            <a:r>
-              <a:rPr b="0" lang="en-US" sz="1420" spc="-1" strike="noStrike">
-                <a:solidFill>
-                  <a:srgbClr val="212121"/>
-                </a:solidFill>
-                <a:latin typeface="Fira Sans Book"/>
-              </a:rPr>
-              <a:t>Baca teks lengkap</a:t>
-            </a:r>
-            <a:endParaRPr b="0" lang="en-US" sz="1420" spc="-1" strike="noStrike">
-              <a:solidFill>
-                <a:srgbClr val="212121"/>
-              </a:solidFill>
-              <a:latin typeface="Fira Sans Book"/>
-            </a:endParaRPr>
-          </a:p>
-        </p:txBody>
-      </p:sp>
-      <p:sp>
-        <p:nvSpPr>
-          <p:cNvPr id="124" name=""/>
-          <p:cNvSpPr txBox="1"/>
-          <p:nvPr/>
-        </p:nvSpPr>
-        <p:spPr>
-          <a:xfrm>
-            <a:off x="3888000" y="2329200"/>
-            <a:ext cx="720000" cy="234000"/>
-          </a:xfrm>
-          <a:prstGeom prst="rect">
-            <a:avLst/>
-          </a:prstGeom>
-          <a:noFill/>
-          <a:ln w="0">
-            <a:noFill/>
-          </a:ln>
-        </p:spPr>
-        <p:txBody>
-          <a:bodyPr lIns="0" rIns="0" tIns="0" bIns="0" anchor="t">
-            <a:noAutofit/>
-          </a:bodyPr>
-          <a:p>
-            <a:pPr algn="r">
-              <a:spcAft>
-                <a:spcPts val="312"/>
-              </a:spcAft>
-            </a:pPr>
-            <a:r>
-              <a:rPr b="1" lang="en-US" sz="1420" spc="-1" strike="noStrike">
-                <a:solidFill>
-                  <a:srgbClr val="212121"/>
-                </a:solidFill>
-                <a:latin typeface="Fira Sans"/>
-              </a:rPr>
-              <a:t>Jumlah</a:t>
-            </a:r>
-            <a:endParaRPr b="0" lang="en-US" sz="1420" spc="-1" strike="noStrike">
-              <a:solidFill>
-                <a:srgbClr val="212121"/>
-              </a:solidFill>
-              <a:latin typeface="Fira Sans Book"/>
-            </a:endParaRPr>
-          </a:p>
-        </p:txBody>
-      </p:sp>
-      <p:sp>
-        <p:nvSpPr>
-          <p:cNvPr id="125" name=""/>
-          <p:cNvSpPr txBox="1"/>
-          <p:nvPr/>
-        </p:nvSpPr>
-        <p:spPr>
-          <a:xfrm>
-            <a:off x="3888000" y="2689200"/>
-            <a:ext cx="720000" cy="792000"/>
-          </a:xfrm>
-          <a:prstGeom prst="rect">
-            <a:avLst/>
-          </a:prstGeom>
-          <a:noFill/>
-          <a:ln w="0">
-            <a:noFill/>
-          </a:ln>
-        </p:spPr>
-        <p:txBody>
-          <a:bodyPr lIns="0" rIns="0" tIns="0" bIns="0" anchor="t">
-            <a:noAutofit/>
-          </a:bodyPr>
-          <a:p>
-            <a:pPr algn="r">
-              <a:spcAft>
-                <a:spcPts val="312"/>
-              </a:spcAft>
-            </a:pPr>
-            <a:r>
-              <a:rPr b="0" lang="en-US" sz="1420" spc="-1" strike="noStrike">
-                <a:solidFill>
-                  <a:srgbClr val="212121"/>
-                </a:solidFill>
-                <a:latin typeface="Fira Sans Book"/>
-              </a:rPr>
-              <a:t>1.250</a:t>
-            </a:r>
-            <a:endParaRPr b="0" lang="en-US" sz="1420" spc="-1" strike="noStrike">
-              <a:solidFill>
-                <a:srgbClr val="212121"/>
-              </a:solidFill>
-              <a:latin typeface="Fira Sans Book"/>
-            </a:endParaRPr>
-          </a:p>
-          <a:p>
-            <a:pPr algn="r">
-              <a:spcAft>
-                <a:spcPts val="312"/>
-              </a:spcAft>
-            </a:pPr>
-            <a:r>
-              <a:rPr b="0" lang="en-US" sz="1420" spc="-1" strike="noStrike">
-                <a:solidFill>
-                  <a:srgbClr val="212121"/>
-                </a:solidFill>
-                <a:latin typeface="Fira Sans Book"/>
-              </a:rPr>
-              <a:t>−</a:t>
-            </a:r>
-            <a:r>
-              <a:rPr b="0" lang="en-US" sz="1420" spc="-1" strike="noStrike">
-                <a:solidFill>
-                  <a:srgbClr val="212121"/>
-                </a:solidFill>
-                <a:latin typeface="Fira Sans Book"/>
-              </a:rPr>
-              <a:t>980</a:t>
-            </a:r>
-            <a:endParaRPr b="0" lang="en-US" sz="1420" spc="-1" strike="noStrike">
-              <a:solidFill>
-                <a:srgbClr val="212121"/>
-              </a:solidFill>
-              <a:latin typeface="Fira Sans Book"/>
-            </a:endParaRPr>
-          </a:p>
-          <a:p>
-            <a:pPr algn="r">
-              <a:spcAft>
-                <a:spcPts val="312"/>
-              </a:spcAft>
-            </a:pPr>
-            <a:r>
-              <a:rPr b="0" lang="en-US" sz="1420" spc="-1" strike="noStrike">
-                <a:solidFill>
-                  <a:srgbClr val="212121"/>
-                </a:solidFill>
-                <a:latin typeface="Fira Sans Book"/>
-              </a:rPr>
-              <a:t>−</a:t>
-            </a:r>
-            <a:r>
-              <a:rPr b="0" lang="en-US" sz="1420" spc="-1" strike="noStrike">
-                <a:solidFill>
-                  <a:srgbClr val="212121"/>
-                </a:solidFill>
-                <a:latin typeface="Fira Sans Book"/>
-              </a:rPr>
-              <a:t>166</a:t>
-            </a:r>
-            <a:endParaRPr b="0" lang="en-US" sz="1420" spc="-1" strike="noStrike">
-              <a:solidFill>
-                <a:srgbClr val="212121"/>
-              </a:solidFill>
-              <a:latin typeface="Fira Sans Book"/>
-            </a:endParaRPr>
-          </a:p>
-        </p:txBody>
-      </p:sp>
-      <p:sp>
-        <p:nvSpPr>
-          <p:cNvPr id="126" name=""/>
-          <p:cNvSpPr txBox="1"/>
-          <p:nvPr/>
-        </p:nvSpPr>
-        <p:spPr>
-          <a:xfrm>
-            <a:off x="4608000" y="2329200"/>
-            <a:ext cx="684000" cy="234000"/>
-          </a:xfrm>
-          <a:prstGeom prst="rect">
-            <a:avLst/>
-          </a:prstGeom>
-          <a:noFill/>
-          <a:ln w="0">
-            <a:noFill/>
-          </a:ln>
-        </p:spPr>
-        <p:txBody>
-          <a:bodyPr lIns="0" rIns="0" tIns="0" bIns="0" anchor="t">
-            <a:noAutofit/>
-          </a:bodyPr>
-          <a:p>
-            <a:pPr algn="r">
-              <a:spcAft>
-                <a:spcPts val="312"/>
-              </a:spcAft>
-            </a:pPr>
-            <a:r>
-              <a:rPr b="1" lang="en-US" sz="1420" spc="-1" strike="noStrike">
-                <a:solidFill>
-                  <a:srgbClr val="212121"/>
-                </a:solidFill>
-                <a:latin typeface="Fira Sans"/>
-              </a:rPr>
-              <a:t>Sisa</a:t>
-            </a:r>
-            <a:endParaRPr b="0" lang="en-US" sz="1420" spc="-1" strike="noStrike">
-              <a:solidFill>
-                <a:srgbClr val="212121"/>
-              </a:solidFill>
-              <a:latin typeface="Fira Sans Book"/>
-            </a:endParaRPr>
-          </a:p>
-        </p:txBody>
-      </p:sp>
-      <p:sp>
-        <p:nvSpPr>
-          <p:cNvPr id="127" name=""/>
-          <p:cNvSpPr txBox="1"/>
-          <p:nvPr/>
-        </p:nvSpPr>
-        <p:spPr>
-          <a:xfrm>
-            <a:off x="4608000" y="2689200"/>
-            <a:ext cx="684000" cy="792000"/>
-          </a:xfrm>
-          <a:prstGeom prst="rect">
-            <a:avLst/>
-          </a:prstGeom>
-          <a:noFill/>
-          <a:ln w="0">
-            <a:noFill/>
-          </a:ln>
-        </p:spPr>
-        <p:txBody>
-          <a:bodyPr lIns="0" rIns="0" tIns="0" bIns="0" anchor="t">
-            <a:noAutofit/>
-          </a:bodyPr>
-          <a:p>
-            <a:pPr algn="r">
-              <a:spcAft>
-                <a:spcPts val="312"/>
-              </a:spcAft>
-            </a:pPr>
-            <a:r>
-              <a:rPr b="0" lang="en-US" sz="1420" spc="-1" strike="noStrike">
-                <a:solidFill>
-                  <a:srgbClr val="212121"/>
-                </a:solidFill>
-                <a:latin typeface="Fira Sans Book"/>
-              </a:rPr>
-              <a:t>1.250</a:t>
-            </a:r>
-            <a:endParaRPr b="0" lang="en-US" sz="1420" spc="-1" strike="noStrike">
-              <a:solidFill>
-                <a:srgbClr val="212121"/>
-              </a:solidFill>
-              <a:latin typeface="Fira Sans Book"/>
-            </a:endParaRPr>
-          </a:p>
-          <a:p>
-            <a:pPr algn="r">
-              <a:spcAft>
-                <a:spcPts val="312"/>
-              </a:spcAft>
-            </a:pPr>
-            <a:r>
-              <a:rPr b="0" lang="en-US" sz="1420" spc="-1" strike="noStrike">
-                <a:solidFill>
-                  <a:srgbClr val="212121"/>
-                </a:solidFill>
-                <a:latin typeface="Fira Sans Book"/>
-              </a:rPr>
-              <a:t>270</a:t>
-            </a:r>
-            <a:endParaRPr b="0" lang="en-US" sz="1420" spc="-1" strike="noStrike">
-              <a:solidFill>
-                <a:srgbClr val="212121"/>
-              </a:solidFill>
-              <a:latin typeface="Fira Sans Book"/>
-            </a:endParaRPr>
-          </a:p>
-          <a:p>
-            <a:pPr algn="r">
-              <a:spcAft>
-                <a:spcPts val="312"/>
-              </a:spcAft>
-            </a:pPr>
-            <a:r>
-              <a:rPr b="1" lang="en-US" sz="1420" spc="-1" strike="noStrike">
-                <a:solidFill>
-                  <a:srgbClr val="212121"/>
-                </a:solidFill>
-                <a:latin typeface="Fira Sans"/>
-              </a:rPr>
-              <a:t>104</a:t>
-            </a:r>
-            <a:endParaRPr b="0" lang="en-US" sz="1420" spc="-1" strike="noStrike">
-              <a:solidFill>
-                <a:srgbClr val="212121"/>
-              </a:solidFill>
-              <a:latin typeface="Fira Sans Book"/>
-            </a:endParaRPr>
-          </a:p>
-        </p:txBody>
-      </p:sp>
-      <p:sp>
-        <p:nvSpPr>
-          <p:cNvPr id="128" name=""/>
-          <p:cNvSpPr txBox="1"/>
-          <p:nvPr/>
-        </p:nvSpPr>
-        <p:spPr>
-          <a:xfrm>
-            <a:off x="5562000" y="2329200"/>
-            <a:ext cx="1512000" cy="234000"/>
-          </a:xfrm>
-          <a:prstGeom prst="rect">
-            <a:avLst/>
-          </a:prstGeom>
-          <a:noFill/>
-          <a:ln w="0">
-            <a:noFill/>
-          </a:ln>
-        </p:spPr>
-        <p:txBody>
-          <a:bodyPr lIns="0" rIns="0" tIns="0" bIns="0" anchor="t">
-            <a:noAutofit/>
-          </a:bodyPr>
-          <a:p>
-            <a:r>
-              <a:rPr b="1" lang="en-US" sz="1420" spc="-1" strike="noStrike">
-                <a:solidFill>
-                  <a:srgbClr val="212121"/>
-                </a:solidFill>
-                <a:latin typeface="Fira Sans"/>
-              </a:rPr>
-              <a:t>Catatan</a:t>
-            </a:r>
-            <a:endParaRPr b="0" lang="en-US" sz="1420" spc="-1" strike="noStrike">
-              <a:solidFill>
-                <a:srgbClr val="212121"/>
-              </a:solidFill>
-              <a:latin typeface="Fira Sans Book"/>
-            </a:endParaRPr>
-          </a:p>
-        </p:txBody>
-      </p:sp>
-      <p:sp>
-        <p:nvSpPr>
-          <p:cNvPr id="129" name=""/>
-          <p:cNvSpPr txBox="1"/>
-          <p:nvPr/>
-        </p:nvSpPr>
-        <p:spPr>
-          <a:xfrm>
-            <a:off x="5562000" y="2689200"/>
-            <a:ext cx="1512000" cy="792000"/>
-          </a:xfrm>
-          <a:prstGeom prst="rect">
-            <a:avLst/>
-          </a:prstGeom>
-          <a:noFill/>
-          <a:ln w="0">
-            <a:noFill/>
-          </a:ln>
-        </p:spPr>
-        <p:txBody>
-          <a:bodyPr lIns="0" rIns="0" tIns="0" bIns="0" anchor="t">
-            <a:noAutofit/>
-          </a:bodyPr>
-          <a:p>
-            <a:r>
-              <a:rPr b="0" lang="en-US" sz="1420" spc="-1" strike="noStrike">
-                <a:solidFill>
-                  <a:srgbClr val="212121"/>
-                </a:solidFill>
-                <a:latin typeface="Fira Sans Book"/>
-              </a:rPr>
-              <a:t>Scopus, IEEE, ACM</a:t>
-            </a:r>
-            <a:endParaRPr b="0" lang="en-US" sz="1420" spc="-1" strike="noStrike">
-              <a:solidFill>
-                <a:srgbClr val="212121"/>
-              </a:solidFill>
-              <a:latin typeface="Fira Sans Book"/>
-            </a:endParaRPr>
-          </a:p>
-          <a:p>
-            <a:r>
-              <a:rPr b="0" lang="en-US" sz="1420" spc="-1" strike="noStrike">
-                <a:solidFill>
-                  <a:srgbClr val="212121"/>
-                </a:solidFill>
-                <a:latin typeface="Fira Sans Book"/>
-              </a:rPr>
-              <a:t>kriteria inklusi</a:t>
-            </a:r>
-            <a:endParaRPr b="0" lang="en-US" sz="1420" spc="-1" strike="noStrike">
-              <a:solidFill>
-                <a:srgbClr val="212121"/>
-              </a:solidFill>
-              <a:latin typeface="Fira Sans Book"/>
-            </a:endParaRPr>
-          </a:p>
-          <a:p>
-            <a:r>
-              <a:rPr b="0" lang="en-US" sz="1420" spc="-1" strike="noStrike">
-                <a:solidFill>
-                  <a:srgbClr val="212121"/>
-                </a:solidFill>
-                <a:latin typeface="Fira Sans Book"/>
-              </a:rPr>
-              <a:t>penilaian kualitas</a:t>
-            </a:r>
-            <a:endParaRPr b="0" lang="en-US" sz="1420" spc="-1" strike="noStrike">
-              <a:solidFill>
-                <a:srgbClr val="212121"/>
+            <a:pPr algn="r"/>
+            <a:r>
+              <a:rPr b="0" lang="en-US" sz="1110" spc="-1" strike="noStrike">
+                <a:solidFill>
+                  <a:srgbClr val="005aab"/>
+                </a:solidFill>
+                <a:latin typeface="Fira Sans Book"/>
+              </a:rPr>
+              <a:t>6/6</a:t>
+            </a:r>
+            <a:endParaRPr b="0" lang="en-US" sz="1110" spc="-1" strike="noStrike">
+              <a:solidFill>
+                <a:srgbClr val="005aab"/>
               </a:solidFill>
               <a:latin typeface="Fira Sans Book"/>
             </a:endParaRPr>
@@ -7800,26 +10021,6 @@
             <a:r>
               <a:t>Nama Anda · Judul Presentasi Anda · STEI ITB</a:t>
             </a:r>
-          </a:p>
-        </p:txBody>
-      </p:sp>
-      <p:sp>
-        <p:nvSpPr>
-          <p:cNvPr id="4" name="PlaceHolder 3"/>
-          <p:cNvSpPr>
-            <a:spLocks noGrp="1"/>
-          </p:cNvSpPr>
-          <p:nvPr>
-            <p:ph type="sldNum" idx="2"/>
-          </p:nvPr>
-        </p:nvSpPr>
-        <p:spPr/>
-        <p:txBody>
-          <a:bodyPr/>
-          <a:p>
-            <a:fld id="{E7CA4115-987B-4BE0-85C4-DCA924968A4B}" type="slidenum">
-              <a:t>9</a:t>
-            </a:fld>
           </a:p>
         </p:txBody>
       </p:sp>
@@ -8152,4 +10353,110 @@
     </a:fmtScheme>
   </a:themeElements>
 </a:theme>
+</file>
+
+<file path=ppt/theme/theme4.xml><?xml version="1.0" encoding="utf-8"?>
+<a:theme xmlns:a="http://schemas.openxmlformats.org/drawingml/2006/main" xmlns:r="http://schemas.openxmlformats.org/officeDocument/2006/relationships" name="Office">
+  <a:themeElements>
+    <a:clrScheme name="LibreOffice">
+      <a:dk1>
+        <a:srgbClr val="000000"/>
+      </a:dk1>
+      <a:lt1>
+        <a:srgbClr val="ffffff"/>
+      </a:lt1>
+      <a:dk2>
+        <a:srgbClr val="000000"/>
+      </a:dk2>
+      <a:lt2>
+        <a:srgbClr val="ffffff"/>
+      </a:lt2>
+      <a:accent1>
+        <a:srgbClr val="18a303"/>
+      </a:accent1>
+      <a:accent2>
+        <a:srgbClr val="0369a3"/>
+      </a:accent2>
+      <a:accent3>
+        <a:srgbClr val="a33e03"/>
+      </a:accent3>
+      <a:accent4>
+        <a:srgbClr val="8e03a3"/>
+      </a:accent4>
+      <a:accent5>
+        <a:srgbClr val="c99c00"/>
+      </a:accent5>
+      <a:accent6>
+        <a:srgbClr val="c9211e"/>
+      </a:accent6>
+      <a:hlink>
+        <a:srgbClr val="0000ee"/>
+      </a:hlink>
+      <a:folHlink>
+        <a:srgbClr val="551a8b"/>
+      </a:folHlink>
+    </a:clrScheme>
+    <a:fontScheme name="Office">
+      <a:majorFont>
+        <a:latin typeface="Arial" pitchFamily="0" charset="1"/>
+        <a:ea typeface="DejaVu Sans" pitchFamily="0" charset="1"/>
+        <a:cs typeface="DejaVu Sans" pitchFamily="0" charset="1"/>
+      </a:majorFont>
+      <a:minorFont>
+        <a:latin typeface="Arial" pitchFamily="0" charset="1"/>
+        <a:ea typeface="DejaVu Sans" pitchFamily="0" charset="1"/>
+        <a:cs typeface="DejaVu Sans" pitchFamily="0" charset="1"/>
+      </a:minorFont>
+    </a:fontScheme>
+    <a:fmtScheme>
+      <a:fillStyleLst>
+        <a:solidFill>
+          <a:schemeClr val="phClr"/>
+        </a:solidFill>
+        <a:solidFill>
+          <a:schemeClr val="phClr"/>
+        </a:solidFill>
+        <a:solidFill>
+          <a:schemeClr val="phClr"/>
+        </a:solidFill>
+      </a:fillStyleLst>
+      <a:lnStyleLst>
+        <a:ln w="6350" cap="flat" cmpd="sng" algn="ctr">
+          <a:prstDash val="solid"/>
+          <a:miter/>
+        </a:ln>
+        <a:ln w="6350" cap="flat" cmpd="sng" algn="ctr">
+          <a:prstDash val="solid"/>
+          <a:miter/>
+        </a:ln>
+        <a:ln w="6350" cap="flat" cmpd="sng" algn="ctr">
+          <a:prstDash val="solid"/>
+          <a:miter/>
+        </a:ln>
+      </a:lnStyleLst>
+      <a:effectStyleLst>
+        <a:effectStyle>
+          <a:effectLst/>
+        </a:effectStyle>
+        <a:effectStyle>
+          <a:effectLst/>
+        </a:effectStyle>
+        <a:effectStyle>
+          <a:effectLst/>
+        </a:effectStyle>
+      </a:effectStyleLst>
+      <a:bgFillStyleLst>
+        <a:solidFill>
+          <a:schemeClr val="phClr"/>
+        </a:solidFill>
+        <a:solidFill>
+          <a:schemeClr val="phClr"/>
+        </a:solidFill>
+        <a:solidFill>
+          <a:schemeClr val="phClr"/>
+        </a:solidFill>
+      </a:bgFillStyleLst>
+    </a:fmtScheme>
+  </a:themeElements>
+</a:theme>
 </file>
--- a/itb-stei/libreoffice/contoh-itb.pptx
+++ b/itb-stei/libreoffice/contoh-itb.pptx
@@ -322,7 +322,7 @@
         <p:txBody>
           <a:bodyPr/>
           <a:p>
-            <a:fld id="{26B7382E-8BB8-4E67-BF1A-24DFC4BD2481}" type="slidenum">
+            <a:fld id="{ADC0C5D0-BBF7-4FEB-B9B9-E2EF6C4C8B94}" type="slidenum">
               <a:t>&lt;#&gt;</a:t>
             </a:fld>
           </a:p>
@@ -424,7 +424,7 @@
         <p:txBody>
           <a:bodyPr/>
           <a:p>
-            <a:fld id="{74F71292-DBDB-449E-9B59-E042078699CA}" type="slidenum">
+            <a:fld id="{682BB6E7-EDA9-4E46-BA7B-986B144AF9A1}" type="slidenum">
               <a:t>&lt;#&gt;</a:t>
             </a:fld>
           </a:p>
@@ -588,7 +588,7 @@
         <p:txBody>
           <a:bodyPr/>
           <a:p>
-            <a:fld id="{93237E2E-16D0-4AC5-B5E7-21414E87286B}" type="slidenum">
+            <a:fld id="{971C2412-06B5-456B-890C-8614492B7B21}" type="slidenum">
               <a:t>&lt;#&gt;</a:t>
             </a:fld>
           </a:p>
@@ -1522,7 +1522,7 @@
             <a:pPr indent="0" algn="r">
               <a:buNone/>
             </a:pPr>
-            <a:fld id="{DD7B3085-D0E1-4A62-8383-8B962793F545}" type="slidenum">
+            <a:fld id="{FB54DE4A-22C0-4BF8-9006-557AF0E026E1}" type="slidenum">
               <a:rPr b="0" lang="en-US" sz="1110" spc="-1" strike="noStrike">
                 <a:solidFill>
                   <a:srgbClr val="005aab"/>
@@ -2230,7 +2230,7 @@
             <a:pPr indent="0" algn="r">
               <a:buNone/>
             </a:pPr>
-            <a:fld id="{CAE3F5F9-A250-4E59-AFC3-7CE81ADF9769}" type="slidenum">
+            <a:fld id="{DC4F1848-A4F8-41C9-81C5-0F503FA5626D}" type="slidenum">
               <a:rPr b="0" lang="en-US" sz="1110" spc="-1" strike="noStrike">
                 <a:solidFill>
                   <a:srgbClr val="005aab"/>

--- a/itb-stei/libreoffice/contoh-itb.pptx
+++ b/itb-stei/libreoffice/contoh-itb.pptx
@@ -322,7 +322,7 @@
         <p:txBody>
           <a:bodyPr/>
           <a:p>
-            <a:fld id="{ADC0C5D0-BBF7-4FEB-B9B9-E2EF6C4C8B94}" type="slidenum">
+            <a:fld id="{EC44BCC4-2473-4162-8FFE-B0A570EA1775}" type="slidenum">
               <a:t>&lt;#&gt;</a:t>
             </a:fld>
           </a:p>
@@ -424,7 +424,7 @@
         <p:txBody>
           <a:bodyPr/>
           <a:p>
-            <a:fld id="{682BB6E7-EDA9-4E46-BA7B-986B144AF9A1}" type="slidenum">
+            <a:fld id="{D31757CD-63C8-4250-8C41-B35AA03F3757}" type="slidenum">
               <a:t>&lt;#&gt;</a:t>
             </a:fld>
           </a:p>
@@ -588,7 +588,7 @@
         <p:txBody>
           <a:bodyPr/>
           <a:p>
-            <a:fld id="{971C2412-06B5-456B-890C-8614492B7B21}" type="slidenum">
+            <a:fld id="{124315F9-AFB7-4E69-86B5-0C1A9BDECC77}" type="slidenum">
               <a:t>&lt;#&gt;</a:t>
             </a:fld>
           </a:p>
@@ -1522,7 +1522,7 @@
             <a:pPr indent="0" algn="r">
               <a:buNone/>
             </a:pPr>
-            <a:fld id="{FB54DE4A-22C0-4BF8-9006-557AF0E026E1}" type="slidenum">
+            <a:fld id="{13E260DC-7BBD-4D3F-8D0F-5D4AE1D74A92}" type="slidenum">
               <a:rPr b="0" lang="en-US" sz="1110" spc="-1" strike="noStrike">
                 <a:solidFill>
                   <a:srgbClr val="005aab"/>
@@ -2230,7 +2230,7 @@
             <a:pPr indent="0" algn="r">
               <a:buNone/>
             </a:pPr>
-            <a:fld id="{DC4F1848-A4F8-41C9-81C5-0F503FA5626D}" type="slidenum">
+            <a:fld id="{28125E08-8E07-45AA-B960-A28D2C3E4AF5}" type="slidenum">
               <a:rPr b="0" lang="en-US" sz="1110" spc="-1" strike="noStrike">
                 <a:solidFill>
                   <a:srgbClr val="005aab"/>

--- a/itb-stei/libreoffice/contoh-itb.pptx
+++ b/itb-stei/libreoffice/contoh-itb.pptx
@@ -53,8 +53,8 @@
         </p:nvSpPr>
         <p:spPr>
           <a:xfrm>
-            <a:off x="0" y="1980000"/>
-            <a:ext cx="9144000" cy="1080000"/>
+            <a:off x="0" y="1198800"/>
+            <a:ext cx="9144000" cy="396000"/>
           </a:xfrm>
           <a:prstGeom prst="rect">
             <a:avLst/>
@@ -65,7 +65,7 @@
           </a:ln>
         </p:spPr>
         <p:txBody>
-          <a:bodyPr lIns="0" rIns="0" tIns="0" bIns="0" anchor="ctr">
+          <a:bodyPr lIns="0" rIns="0" tIns="0" bIns="0" anchor="t">
             <a:noAutofit/>
           </a:bodyPr>
           <a:p>
@@ -115,8 +115,8 @@
         </p:nvSpPr>
         <p:spPr>
           <a:xfrm>
-            <a:off x="0" y="1980000"/>
-            <a:ext cx="9144000" cy="1080000"/>
+            <a:off x="0" y="1198800"/>
+            <a:ext cx="9144000" cy="396000"/>
           </a:xfrm>
           <a:prstGeom prst="rect">
             <a:avLst/>
@@ -127,7 +127,7 @@
           </a:ln>
         </p:spPr>
         <p:txBody>
-          <a:bodyPr lIns="0" rIns="0" tIns="0" bIns="0" anchor="ctr">
+          <a:bodyPr lIns="0" rIns="0" tIns="0" bIns="0" anchor="t">
             <a:noAutofit/>
           </a:bodyPr>
           <a:p>
@@ -217,8 +217,8 @@
         </p:nvSpPr>
         <p:spPr>
           <a:xfrm>
-            <a:off x="0" y="1980000"/>
-            <a:ext cx="9144000" cy="1080000"/>
+            <a:off x="0" y="1198800"/>
+            <a:ext cx="9144000" cy="396000"/>
           </a:xfrm>
           <a:prstGeom prst="rect">
             <a:avLst/>
@@ -229,7 +229,7 @@
           </a:ln>
         </p:spPr>
         <p:txBody>
-          <a:bodyPr lIns="0" rIns="0" tIns="0" bIns="0" anchor="ctr">
+          <a:bodyPr lIns="0" rIns="0" tIns="0" bIns="0" anchor="t">
             <a:noAutofit/>
           </a:bodyPr>
           <a:p>
@@ -322,7 +322,7 @@
         <p:txBody>
           <a:bodyPr/>
           <a:p>
-            <a:fld id="{EC44BCC4-2473-4162-8FFE-B0A570EA1775}" type="slidenum">
+            <a:fld id="{D3CC7FC8-6198-4348-8597-7F0F9BAA8B28}" type="slidenum">
               <a:t>&lt;#&gt;</a:t>
             </a:fld>
           </a:p>
@@ -362,8 +362,8 @@
         </p:nvSpPr>
         <p:spPr>
           <a:xfrm>
-            <a:off x="0" y="1980000"/>
-            <a:ext cx="9144000" cy="1080000"/>
+            <a:off x="0" y="1198800"/>
+            <a:ext cx="9144000" cy="396000"/>
           </a:xfrm>
           <a:prstGeom prst="rect">
             <a:avLst/>
@@ -374,7 +374,7 @@
           </a:ln>
         </p:spPr>
         <p:txBody>
-          <a:bodyPr lIns="0" rIns="0" tIns="0" bIns="0" anchor="ctr">
+          <a:bodyPr lIns="0" rIns="0" tIns="0" bIns="0" anchor="t">
             <a:noAutofit/>
           </a:bodyPr>
           <a:p>
@@ -424,7 +424,7 @@
         <p:txBody>
           <a:bodyPr/>
           <a:p>
-            <a:fld id="{D31757CD-63C8-4250-8C41-B35AA03F3757}" type="slidenum">
+            <a:fld id="{A2E39E3E-5508-4A26-A79C-9A5F8C3F91DD}" type="slidenum">
               <a:t>&lt;#&gt;</a:t>
             </a:fld>
           </a:p>
@@ -464,8 +464,8 @@
         </p:nvSpPr>
         <p:spPr>
           <a:xfrm>
-            <a:off x="0" y="1980000"/>
-            <a:ext cx="9144000" cy="1080000"/>
+            <a:off x="0" y="1198800"/>
+            <a:ext cx="9144000" cy="396000"/>
           </a:xfrm>
           <a:prstGeom prst="rect">
             <a:avLst/>
@@ -476,7 +476,7 @@
           </a:ln>
         </p:spPr>
         <p:txBody>
-          <a:bodyPr lIns="0" rIns="0" tIns="0" bIns="0" anchor="ctr">
+          <a:bodyPr lIns="0" rIns="0" tIns="0" bIns="0" anchor="t">
             <a:noAutofit/>
           </a:bodyPr>
           <a:p>
@@ -516,7 +516,7 @@
       </p:grpSpPr>
       <p:sp>
         <p:nvSpPr>
-          <p:cNvPr id="32" name="PlaceHolder 1"/>
+          <p:cNvPr id="34" name="PlaceHolder 1"/>
           <p:cNvSpPr>
             <a:spLocks noGrp="1"/>
           </p:cNvSpPr>
@@ -526,8 +526,8 @@
         </p:nvSpPr>
         <p:spPr>
           <a:xfrm>
-            <a:off x="0" y="1980000"/>
-            <a:ext cx="9144000" cy="1080000"/>
+            <a:off x="0" y="1198800"/>
+            <a:ext cx="9144000" cy="396000"/>
           </a:xfrm>
           <a:prstGeom prst="rect">
             <a:avLst/>
@@ -538,7 +538,7 @@
           </a:ln>
         </p:spPr>
         <p:txBody>
-          <a:bodyPr lIns="0" rIns="0" tIns="0" bIns="0" anchor="ctr">
+          <a:bodyPr lIns="0" rIns="0" tIns="0" bIns="0" anchor="t">
             <a:noAutofit/>
           </a:bodyPr>
           <a:p>
@@ -588,7 +588,7 @@
         <p:txBody>
           <a:bodyPr/>
           <a:p>
-            <a:fld id="{124315F9-AFB7-4E69-86B5-0C1A9BDECC77}" type="slidenum">
+            <a:fld id="{602D4D47-9A3A-46E2-B930-460BC411E1AF}" type="slidenum">
               <a:t>&lt;#&gt;</a:t>
             </a:fld>
           </a:p>
@@ -1522,7 +1522,7 @@
             <a:pPr indent="0" algn="r">
               <a:buNone/>
             </a:pPr>
-            <a:fld id="{13E260DC-7BBD-4D3F-8D0F-5D4AE1D74A92}" type="slidenum">
+            <a:fld id="{D84E7B9B-7A70-4077-9A70-7B2957BE3AC2}" type="slidenum">
               <a:rPr b="0" lang="en-US" sz="1110" spc="-1" strike="noStrike">
                 <a:solidFill>
                   <a:srgbClr val="005aab"/>
@@ -2091,8 +2091,8 @@
         </p:nvSpPr>
         <p:spPr>
           <a:xfrm>
-            <a:off x="0" y="1980000"/>
-            <a:ext cx="9144000" cy="1080000"/>
+            <a:off x="0" y="1198800"/>
+            <a:ext cx="9144000" cy="396000"/>
           </a:xfrm>
           <a:prstGeom prst="rect">
             <a:avLst/>
@@ -2103,7 +2103,7 @@
           </a:ln>
         </p:spPr>
         <p:txBody>
-          <a:bodyPr lIns="0" rIns="0" tIns="0" bIns="0" anchor="ctr">
+          <a:bodyPr lIns="0" rIns="0" tIns="0" bIns="0" anchor="t">
             <a:noAutofit/>
           </a:bodyPr>
           <a:p>
@@ -2130,7 +2130,65 @@
       </p:sp>
       <p:sp>
         <p:nvSpPr>
-          <p:cNvPr id="29" name="PlaceHolder 2"/>
+          <p:cNvPr id="29" name=""/>
+          <p:cNvSpPr/>
+          <p:nvPr/>
+        </p:nvSpPr>
+        <p:spPr>
+          <a:xfrm>
+            <a:off x="4114800" y="2829600"/>
+            <a:ext cx="914400" cy="914400"/>
+          </a:xfrm>
+          <a:prstGeom prst="ellipse">
+            <a:avLst/>
+          </a:prstGeom>
+          <a:solidFill>
+            <a:srgbClr val="ffffff"/>
+          </a:solidFill>
+          <a:ln w="0">
+            <a:noFill/>
+          </a:ln>
+        </p:spPr>
+        <p:txBody>
+          <a:bodyPr lIns="0" rIns="0" tIns="0" bIns="0" anchor="t">
+            <a:noAutofit/>
+          </a:bodyPr>
+          <a:p>
+            <a:endParaRPr b="0" lang="en-US" sz="1580" spc="-1" strike="noStrike">
+              <a:solidFill>
+                <a:srgbClr val="212121"/>
+              </a:solidFill>
+              <a:latin typeface="Fira Sans Book"/>
+            </a:endParaRPr>
+          </a:p>
+        </p:txBody>
+      </p:sp>
+      <p:pic>
+        <p:nvPicPr>
+          <p:cNvPr id="30" name="" descr=""/>
+          <p:cNvPicPr/>
+          <p:nvPr/>
+        </p:nvPicPr>
+        <p:blipFill>
+          <a:blip r:embed="rId2"/>
+          <a:stretch/>
+        </p:blipFill>
+        <p:spPr>
+          <a:xfrm>
+            <a:off x="4172040" y="2886840"/>
+            <a:ext cx="799920" cy="799920"/>
+          </a:xfrm>
+          <a:prstGeom prst="rect">
+            <a:avLst/>
+          </a:prstGeom>
+          <a:ln w="0">
+            <a:noFill/>
+          </a:ln>
+        </p:spPr>
+      </p:pic>
+      <p:sp>
+        <p:nvSpPr>
+          <p:cNvPr id="31" name="PlaceHolder 2"/>
           <p:cNvSpPr>
             <a:spLocks noGrp="1"/>
           </p:cNvSpPr>
@@ -2190,7 +2248,7 @@
       </p:sp>
       <p:sp>
         <p:nvSpPr>
-          <p:cNvPr id="30" name="PlaceHolder 3"/>
+          <p:cNvPr id="32" name="PlaceHolder 3"/>
           <p:cNvSpPr>
             <a:spLocks noGrp="1"/>
           </p:cNvSpPr>
@@ -2230,7 +2288,7 @@
             <a:pPr indent="0" algn="r">
               <a:buNone/>
             </a:pPr>
-            <a:fld id="{28125E08-8E07-45AA-B960-A28D2C3E4AF5}" type="slidenum">
+            <a:fld id="{BCF542D1-9D93-46AE-96B7-D99EE55A2A1F}" type="slidenum">
               <a:rPr b="0" lang="en-US" sz="1110" spc="-1" strike="noStrike">
                 <a:solidFill>
                   <a:srgbClr val="005aab"/>
@@ -2250,7 +2308,7 @@
       </p:sp>
       <p:sp>
         <p:nvSpPr>
-          <p:cNvPr id="31" name="PlaceHolder 4"/>
+          <p:cNvPr id="33" name="PlaceHolder 4"/>
           <p:cNvSpPr>
             <a:spLocks noGrp="1"/>
           </p:cNvSpPr>
@@ -2471,7 +2529,7 @@
   </p:cSld>
   <p:clrMap bg1="lt1" bg2="lt2" tx1="dk1" tx2="dk2" accent1="accent1" accent2="accent2" accent3="accent3" accent4="accent4" accent5="accent5" accent6="accent6" hlink="hlink" folHlink="folHlink"/>
   <p:sldLayoutIdLst>
-    <p:sldLayoutId id="2147483657" r:id="rId2"/>
+    <p:sldLayoutId id="2147483657" r:id="rId3"/>
   </p:sldLayoutIdLst>
 </p:sldMaster>
 </file>
@@ -2495,7 +2553,7 @@
       </p:grpSpPr>
       <p:sp>
         <p:nvSpPr>
-          <p:cNvPr id="33" name="PlaceHolder 1"/>
+          <p:cNvPr id="35" name="PlaceHolder 1"/>
           <p:cNvSpPr>
             <a:spLocks noGrp="1"/>
           </p:cNvSpPr>
@@ -2544,7 +2602,7 @@
       </p:sp>
       <p:sp>
         <p:nvSpPr>
-          <p:cNvPr id="34" name="PlaceHolder 2"/>
+          <p:cNvPr id="36" name="PlaceHolder 2"/>
           <p:cNvSpPr>
             <a:spLocks noGrp="1"/>
           </p:cNvSpPr>
@@ -2593,7 +2651,7 @@
       </p:sp>
       <p:sp>
         <p:nvSpPr>
-          <p:cNvPr id="35" name=""/>
+          <p:cNvPr id="37" name=""/>
           <p:cNvSpPr txBox="1"/>
           <p:nvPr/>
         </p:nvSpPr>
@@ -2635,7 +2693,7 @@
       </p:sp>
       <p:sp>
         <p:nvSpPr>
-          <p:cNvPr id="36" name=""/>
+          <p:cNvPr id="38" name=""/>
           <p:cNvSpPr txBox="1"/>
           <p:nvPr/>
         </p:nvSpPr>
@@ -2677,7 +2735,7 @@
       </p:sp>
       <p:sp>
         <p:nvSpPr>
-          <p:cNvPr id="37" name=""/>
+          <p:cNvPr id="39" name=""/>
           <p:cNvSpPr txBox="1"/>
           <p:nvPr/>
         </p:nvSpPr>
@@ -2719,7 +2777,7 @@
       </p:sp>
       <p:sp>
         <p:nvSpPr>
-          <p:cNvPr id="38" name=""/>
+          <p:cNvPr id="40" name=""/>
           <p:cNvSpPr txBox="1"/>
           <p:nvPr/>
         </p:nvSpPr>
@@ -2761,7 +2819,7 @@
       </p:sp>
       <p:sp>
         <p:nvSpPr>
-          <p:cNvPr id="39" name=""/>
+          <p:cNvPr id="41" name=""/>
           <p:cNvSpPr txBox="1"/>
           <p:nvPr/>
         </p:nvSpPr>
@@ -3076,7 +3134,7 @@
       </p:grpSpPr>
       <p:sp>
         <p:nvSpPr>
-          <p:cNvPr id="134" name="PlaceHolder 1"/>
+          <p:cNvPr id="136" name="PlaceHolder 1"/>
           <p:cNvSpPr>
             <a:spLocks noGrp="1"/>
           </p:cNvSpPr>
@@ -3086,8 +3144,8 @@
         </p:nvSpPr>
         <p:spPr>
           <a:xfrm>
-            <a:off x="0" y="1980000"/>
-            <a:ext cx="9144000" cy="1080000"/>
+            <a:off x="0" y="1198800"/>
+            <a:ext cx="9144000" cy="396000"/>
           </a:xfrm>
           <a:prstGeom prst="rect">
             <a:avLst/>
@@ -3098,7 +3156,7 @@
           </a:ln>
         </p:spPr>
         <p:txBody>
-          <a:bodyPr lIns="0" rIns="0" tIns="0" bIns="0" anchor="ctr">
+          <a:bodyPr lIns="0" rIns="0" tIns="0" bIns="0" anchor="t">
             <a:noAutofit/>
           </a:bodyPr>
           <a:p>
@@ -3125,7 +3183,93 @@
       </p:sp>
       <p:sp>
         <p:nvSpPr>
-          <p:cNvPr id="135" name=""/>
+          <p:cNvPr id="137" name=""/>
+          <p:cNvSpPr txBox="1"/>
+          <p:nvPr/>
+        </p:nvSpPr>
+        <p:spPr>
+          <a:xfrm>
+            <a:off x="0" y="1785600"/>
+            <a:ext cx="9144000" cy="288000"/>
+          </a:xfrm>
+          <a:prstGeom prst="rect">
+            <a:avLst/>
+          </a:prstGeom>
+          <a:noFill/>
+          <a:ln w="0">
+            <a:noFill/>
+          </a:ln>
+        </p:spPr>
+        <p:txBody>
+          <a:bodyPr lIns="0" rIns="0" tIns="0" bIns="0" anchor="t">
+            <a:noAutofit/>
+          </a:bodyPr>
+          <a:p>
+            <a:pPr algn="ctr"/>
+            <a:r>
+              <a:rPr b="1" lang="en-US" sz="1580" spc="-1" strike="noStrike">
+                <a:solidFill>
+                  <a:srgbClr val="ffffff"/>
+                </a:solidFill>
+                <a:latin typeface="Fira Sans"/>
+              </a:rPr>
+              <a:t>Nama Anda · NIM</a:t>
+            </a:r>
+            <a:endParaRPr b="1" lang="en-US" sz="1580" spc="-1" strike="noStrike">
+              <a:solidFill>
+                <a:srgbClr val="ffffff"/>
+              </a:solidFill>
+              <a:latin typeface="Fira Sans"/>
+            </a:endParaRPr>
+          </a:p>
+        </p:txBody>
+      </p:sp>
+      <p:sp>
+        <p:nvSpPr>
+          <p:cNvPr id="138" name=""/>
+          <p:cNvSpPr txBox="1"/>
+          <p:nvPr/>
+        </p:nvSpPr>
+        <p:spPr>
+          <a:xfrm>
+            <a:off x="0" y="2296800"/>
+            <a:ext cx="9144000" cy="252000"/>
+          </a:xfrm>
+          <a:prstGeom prst="rect">
+            <a:avLst/>
+          </a:prstGeom>
+          <a:noFill/>
+          <a:ln w="0">
+            <a:noFill/>
+          </a:ln>
+        </p:spPr>
+        <p:txBody>
+          <a:bodyPr lIns="0" rIns="0" tIns="0" bIns="0" anchor="t">
+            <a:noAutofit/>
+          </a:bodyPr>
+          <a:p>
+            <a:pPr algn="ctr"/>
+            <a:r>
+              <a:rPr b="1" lang="en-US" sz="1270" spc="-1" strike="noStrike">
+                <a:solidFill>
+                  <a:srgbClr val="ffffff"/>
+                </a:solidFill>
+                <a:latin typeface="Fira Sans"/>
+              </a:rPr>
+              <a:t>nim@mahasiswa.itb.ac.id · situs-anda.id</a:t>
+            </a:r>
+            <a:endParaRPr b="1" lang="en-US" sz="1270" spc="-1" strike="noStrike">
+              <a:solidFill>
+                <a:srgbClr val="ffffff"/>
+              </a:solidFill>
+              <a:latin typeface="Fira Sans"/>
+            </a:endParaRPr>
+          </a:p>
+        </p:txBody>
+      </p:sp>
+      <p:sp>
+        <p:nvSpPr>
+          <p:cNvPr id="139" name=""/>
           <p:cNvSpPr txBox="1"/>
           <p:nvPr/>
         </p:nvSpPr>
@@ -3218,7 +3362,7 @@
       </p:grpSpPr>
       <p:sp>
         <p:nvSpPr>
-          <p:cNvPr id="40" name="PlaceHolder 1"/>
+          <p:cNvPr id="42" name="PlaceHolder 1"/>
           <p:cNvSpPr>
             <a:spLocks noGrp="1"/>
           </p:cNvSpPr>
@@ -3267,7 +3411,7 @@
       </p:sp>
       <p:sp>
         <p:nvSpPr>
-          <p:cNvPr id="41" name=""/>
+          <p:cNvPr id="43" name=""/>
           <p:cNvSpPr/>
           <p:nvPr/>
         </p:nvSpPr>
@@ -3308,7 +3452,7 @@
       </p:sp>
       <p:sp>
         <p:nvSpPr>
-          <p:cNvPr id="42" name=""/>
+          <p:cNvPr id="44" name=""/>
           <p:cNvSpPr/>
           <p:nvPr/>
         </p:nvSpPr>
@@ -3368,7 +3512,7 @@
       </p:sp>
       <p:sp>
         <p:nvSpPr>
-          <p:cNvPr id="43" name=""/>
+          <p:cNvPr id="45" name=""/>
           <p:cNvSpPr/>
           <p:nvPr/>
         </p:nvSpPr>
@@ -3419,7 +3563,7 @@
       </p:sp>
       <p:sp>
         <p:nvSpPr>
-          <p:cNvPr id="44" name=""/>
+          <p:cNvPr id="46" name=""/>
           <p:cNvSpPr/>
           <p:nvPr/>
         </p:nvSpPr>
@@ -3537,7 +3681,7 @@
       </p:sp>
       <p:sp>
         <p:nvSpPr>
-          <p:cNvPr id="45" name=""/>
+          <p:cNvPr id="47" name=""/>
           <p:cNvSpPr/>
           <p:nvPr/>
         </p:nvSpPr>
@@ -3588,7 +3732,7 @@
       </p:sp>
       <p:sp>
         <p:nvSpPr>
-          <p:cNvPr id="46" name=""/>
+          <p:cNvPr id="48" name=""/>
           <p:cNvSpPr/>
           <p:nvPr/>
         </p:nvSpPr>
@@ -3648,7 +3792,7 @@
       </p:sp>
       <p:sp>
         <p:nvSpPr>
-          <p:cNvPr id="47" name=""/>
+          <p:cNvPr id="49" name=""/>
           <p:cNvSpPr/>
           <p:nvPr/>
         </p:nvSpPr>
@@ -3699,7 +3843,7 @@
       </p:sp>
       <p:sp>
         <p:nvSpPr>
-          <p:cNvPr id="48" name=""/>
+          <p:cNvPr id="50" name=""/>
           <p:cNvSpPr/>
           <p:nvPr/>
         </p:nvSpPr>
@@ -3759,7 +3903,7 @@
       </p:sp>
       <p:sp>
         <p:nvSpPr>
-          <p:cNvPr id="49" name=""/>
+          <p:cNvPr id="51" name=""/>
           <p:cNvSpPr/>
           <p:nvPr/>
         </p:nvSpPr>
@@ -3810,7 +3954,7 @@
       </p:sp>
       <p:sp>
         <p:nvSpPr>
-          <p:cNvPr id="50" name=""/>
+          <p:cNvPr id="52" name=""/>
           <p:cNvSpPr/>
           <p:nvPr/>
         </p:nvSpPr>
@@ -3870,7 +4014,7 @@
       </p:sp>
       <p:sp>
         <p:nvSpPr>
-          <p:cNvPr id="51" name=""/>
+          <p:cNvPr id="53" name=""/>
           <p:cNvSpPr/>
           <p:nvPr/>
         </p:nvSpPr>
@@ -3921,7 +4065,7 @@
       </p:sp>
       <p:sp>
         <p:nvSpPr>
-          <p:cNvPr id="52" name=""/>
+          <p:cNvPr id="54" name=""/>
           <p:cNvSpPr/>
           <p:nvPr/>
         </p:nvSpPr>
@@ -3981,7 +4125,7 @@
       </p:sp>
       <p:sp>
         <p:nvSpPr>
-          <p:cNvPr id="53" name=""/>
+          <p:cNvPr id="55" name=""/>
           <p:cNvSpPr/>
           <p:nvPr/>
         </p:nvSpPr>
@@ -4032,7 +4176,7 @@
       </p:sp>
       <p:sp>
         <p:nvSpPr>
-          <p:cNvPr id="54" name=""/>
+          <p:cNvPr id="56" name=""/>
           <p:cNvSpPr/>
           <p:nvPr/>
         </p:nvSpPr>
@@ -4146,7 +4290,7 @@
       </p:sp>
       <p:sp>
         <p:nvSpPr>
-          <p:cNvPr id="55" name=""/>
+          <p:cNvPr id="57" name=""/>
           <p:cNvSpPr/>
           <p:nvPr/>
         </p:nvSpPr>
@@ -4197,7 +4341,7 @@
       </p:sp>
       <p:sp>
         <p:nvSpPr>
-          <p:cNvPr id="56" name=""/>
+          <p:cNvPr id="58" name=""/>
           <p:cNvSpPr/>
           <p:nvPr/>
         </p:nvSpPr>
@@ -4311,7 +4455,7 @@
       </p:sp>
       <p:sp>
         <p:nvSpPr>
-          <p:cNvPr id="57" name=""/>
+          <p:cNvPr id="59" name=""/>
           <p:cNvSpPr/>
           <p:nvPr/>
         </p:nvSpPr>
@@ -4362,7 +4506,7 @@
       </p:sp>
       <p:sp>
         <p:nvSpPr>
-          <p:cNvPr id="58" name=""/>
+          <p:cNvPr id="60" name=""/>
           <p:cNvSpPr txBox="1"/>
           <p:nvPr/>
         </p:nvSpPr>
@@ -4455,7 +4599,7 @@
       </p:grpSpPr>
       <p:sp>
         <p:nvSpPr>
-          <p:cNvPr id="59" name=""/>
+          <p:cNvPr id="61" name=""/>
           <p:cNvSpPr txBox="1"/>
           <p:nvPr/>
         </p:nvSpPr>
@@ -4498,7 +4642,7 @@
       </p:sp>
       <p:sp>
         <p:nvSpPr>
-          <p:cNvPr id="60" name=""/>
+          <p:cNvPr id="62" name=""/>
           <p:cNvSpPr txBox="1"/>
           <p:nvPr/>
         </p:nvSpPr>
@@ -4541,7 +4685,7 @@
       </p:sp>
       <p:sp>
         <p:nvSpPr>
-          <p:cNvPr id="61" name="PlaceHolder 1"/>
+          <p:cNvPr id="63" name="PlaceHolder 1"/>
           <p:cNvSpPr>
             <a:spLocks noGrp="1"/>
           </p:cNvSpPr>
@@ -4638,7 +4782,7 @@
       </p:grpSpPr>
       <p:sp>
         <p:nvSpPr>
-          <p:cNvPr id="62" name="PlaceHolder 1"/>
+          <p:cNvPr id="64" name="PlaceHolder 1"/>
           <p:cNvSpPr>
             <a:spLocks noGrp="1"/>
           </p:cNvSpPr>
@@ -4687,7 +4831,7 @@
       </p:sp>
       <p:sp>
         <p:nvSpPr>
-          <p:cNvPr id="63" name=""/>
+          <p:cNvPr id="65" name=""/>
           <p:cNvSpPr/>
           <p:nvPr/>
         </p:nvSpPr>
@@ -4728,7 +4872,7 @@
       </p:sp>
       <p:sp>
         <p:nvSpPr>
-          <p:cNvPr id="64" name="PlaceHolder 2"/>
+          <p:cNvPr id="66" name="PlaceHolder 2"/>
           <p:cNvSpPr>
             <a:spLocks noGrp="1"/>
           </p:cNvSpPr>
@@ -4922,7 +5066,7 @@
       </p:sp>
       <p:sp>
         <p:nvSpPr>
-          <p:cNvPr id="65" name=""/>
+          <p:cNvPr id="67" name=""/>
           <p:cNvSpPr txBox="1"/>
           <p:nvPr/>
         </p:nvSpPr>
@@ -5054,7 +5198,7 @@
       </p:sp>
       <p:grpSp>
         <p:nvGrpSpPr>
-          <p:cNvPr id="66" name=""/>
+          <p:cNvPr id="68" name=""/>
           <p:cNvGrpSpPr/>
           <p:nvPr/>
         </p:nvGrpSpPr>
@@ -5068,7 +5212,7 @@
         </p:grpSpPr>
         <p:sp>
           <p:nvSpPr>
-            <p:cNvPr id="67" name=""/>
+            <p:cNvPr id="69" name=""/>
             <p:cNvSpPr/>
             <p:nvPr/>
           </p:nvSpPr>
@@ -5118,7 +5262,7 @@
         </p:sp>
         <p:sp>
           <p:nvSpPr>
-            <p:cNvPr id="68" name=""/>
+            <p:cNvPr id="70" name=""/>
             <p:cNvSpPr/>
             <p:nvPr/>
           </p:nvSpPr>
@@ -5169,7 +5313,7 @@
       </p:grpSp>
       <p:sp>
         <p:nvSpPr>
-          <p:cNvPr id="69" name=""/>
+          <p:cNvPr id="71" name=""/>
           <p:cNvSpPr txBox="1"/>
           <p:nvPr/>
         </p:nvSpPr>
@@ -5262,7 +5406,7 @@
       </p:grpSpPr>
       <p:sp>
         <p:nvSpPr>
-          <p:cNvPr id="70" name="PlaceHolder 1"/>
+          <p:cNvPr id="72" name="PlaceHolder 1"/>
           <p:cNvSpPr>
             <a:spLocks noGrp="1"/>
           </p:cNvSpPr>
@@ -5311,7 +5455,7 @@
       </p:sp>
       <p:sp>
         <p:nvSpPr>
-          <p:cNvPr id="71" name=""/>
+          <p:cNvPr id="73" name=""/>
           <p:cNvSpPr/>
           <p:nvPr/>
         </p:nvSpPr>
@@ -5352,7 +5496,7 @@
       </p:sp>
       <p:grpSp>
         <p:nvGrpSpPr>
-          <p:cNvPr id="72" name=""/>
+          <p:cNvPr id="74" name=""/>
           <p:cNvGrpSpPr/>
           <p:nvPr/>
         </p:nvGrpSpPr>
@@ -5366,7 +5510,7 @@
         </p:grpSpPr>
         <p:sp>
           <p:nvSpPr>
-            <p:cNvPr id="73" name=""/>
+            <p:cNvPr id="75" name=""/>
             <p:cNvSpPr/>
             <p:nvPr/>
           </p:nvSpPr>
@@ -5570,7 +5714,7 @@
         </p:sp>
         <p:sp>
           <p:nvSpPr>
-            <p:cNvPr id="74" name=""/>
+            <p:cNvPr id="76" name=""/>
             <p:cNvSpPr/>
             <p:nvPr/>
           </p:nvSpPr>
@@ -5623,7 +5767,7 @@
       </p:grpSp>
       <p:grpSp>
         <p:nvGrpSpPr>
-          <p:cNvPr id="75" name=""/>
+          <p:cNvPr id="77" name=""/>
           <p:cNvGrpSpPr/>
           <p:nvPr/>
         </p:nvGrpSpPr>
@@ -5637,7 +5781,7 @@
         </p:grpSpPr>
         <p:sp>
           <p:nvSpPr>
-            <p:cNvPr id="76" name=""/>
+            <p:cNvPr id="78" name=""/>
             <p:cNvSpPr/>
             <p:nvPr/>
           </p:nvSpPr>
@@ -5823,7 +5967,7 @@
         </p:sp>
         <p:sp>
           <p:nvSpPr>
-            <p:cNvPr id="77" name=""/>
+            <p:cNvPr id="79" name=""/>
             <p:cNvSpPr/>
             <p:nvPr/>
           </p:nvSpPr>
@@ -5912,7 +6056,7 @@
       </p:grpSp>
       <p:grpSp>
         <p:nvGrpSpPr>
-          <p:cNvPr id="78" name=""/>
+          <p:cNvPr id="80" name=""/>
           <p:cNvGrpSpPr/>
           <p:nvPr/>
         </p:nvGrpSpPr>
@@ -5926,7 +6070,7 @@
         </p:grpSpPr>
         <p:sp>
           <p:nvSpPr>
-            <p:cNvPr id="79" name=""/>
+            <p:cNvPr id="81" name=""/>
             <p:cNvSpPr/>
             <p:nvPr/>
           </p:nvSpPr>
@@ -5977,7 +6121,7 @@
         </p:sp>
         <p:sp>
           <p:nvSpPr>
-            <p:cNvPr id="80" name=""/>
+            <p:cNvPr id="82" name=""/>
             <p:cNvSpPr/>
             <p:nvPr/>
           </p:nvSpPr>
@@ -6030,7 +6174,7 @@
       </p:grpSp>
       <p:sp>
         <p:nvSpPr>
-          <p:cNvPr id="81" name=""/>
+          <p:cNvPr id="83" name=""/>
           <p:cNvSpPr/>
           <p:nvPr/>
         </p:nvSpPr>
@@ -6081,7 +6225,7 @@
       </p:sp>
       <p:sp>
         <p:nvSpPr>
-          <p:cNvPr id="82" name=""/>
+          <p:cNvPr id="84" name=""/>
           <p:cNvSpPr txBox="1"/>
           <p:nvPr/>
         </p:nvSpPr>
@@ -6123,7 +6267,7 @@
       </p:sp>
       <p:sp>
         <p:nvSpPr>
-          <p:cNvPr id="83" name=""/>
+          <p:cNvPr id="85" name=""/>
           <p:cNvSpPr/>
           <p:nvPr/>
         </p:nvSpPr>
@@ -6174,7 +6318,7 @@
       </p:sp>
       <p:sp>
         <p:nvSpPr>
-          <p:cNvPr id="84" name=""/>
+          <p:cNvPr id="86" name=""/>
           <p:cNvSpPr txBox="1"/>
           <p:nvPr/>
         </p:nvSpPr>
@@ -6216,7 +6360,7 @@
       </p:sp>
       <p:sp>
         <p:nvSpPr>
-          <p:cNvPr id="85" name=""/>
+          <p:cNvPr id="87" name=""/>
           <p:cNvSpPr/>
           <p:nvPr/>
         </p:nvSpPr>
@@ -6267,7 +6411,7 @@
       </p:sp>
       <p:sp>
         <p:nvSpPr>
-          <p:cNvPr id="86" name=""/>
+          <p:cNvPr id="88" name=""/>
           <p:cNvSpPr txBox="1"/>
           <p:nvPr/>
         </p:nvSpPr>
@@ -6309,7 +6453,7 @@
       </p:sp>
       <p:grpSp>
         <p:nvGrpSpPr>
-          <p:cNvPr id="87" name=""/>
+          <p:cNvPr id="89" name=""/>
           <p:cNvGrpSpPr/>
           <p:nvPr/>
         </p:nvGrpSpPr>
@@ -6323,7 +6467,7 @@
         </p:grpSpPr>
         <p:sp>
           <p:nvSpPr>
-            <p:cNvPr id="88" name=""/>
+            <p:cNvPr id="90" name=""/>
             <p:cNvSpPr/>
             <p:nvPr/>
           </p:nvSpPr>
@@ -6473,7 +6617,7 @@
         </p:sp>
         <p:sp>
           <p:nvSpPr>
-            <p:cNvPr id="89" name=""/>
+            <p:cNvPr id="91" name=""/>
             <p:cNvSpPr/>
             <p:nvPr/>
           </p:nvSpPr>
@@ -6526,7 +6670,7 @@
       </p:grpSp>
       <p:sp>
         <p:nvSpPr>
-          <p:cNvPr id="90" name=""/>
+          <p:cNvPr id="92" name=""/>
           <p:cNvSpPr txBox="1"/>
           <p:nvPr/>
         </p:nvSpPr>
@@ -6619,7 +6763,7 @@
       </p:grpSpPr>
       <p:sp>
         <p:nvSpPr>
-          <p:cNvPr id="91" name="PlaceHolder 1"/>
+          <p:cNvPr id="93" name="PlaceHolder 1"/>
           <p:cNvSpPr>
             <a:spLocks noGrp="1"/>
           </p:cNvSpPr>
@@ -6668,7 +6812,7 @@
       </p:sp>
       <p:sp>
         <p:nvSpPr>
-          <p:cNvPr id="92" name=""/>
+          <p:cNvPr id="94" name=""/>
           <p:cNvSpPr/>
           <p:nvPr/>
         </p:nvSpPr>
@@ -6709,7 +6853,7 @@
       </p:sp>
       <p:sp>
         <p:nvSpPr>
-          <p:cNvPr id="93" name=""/>
+          <p:cNvPr id="95" name=""/>
           <p:cNvSpPr/>
           <p:nvPr/>
         </p:nvSpPr>
@@ -6824,7 +6968,7 @@
       </p:sp>
       <p:sp>
         <p:nvSpPr>
-          <p:cNvPr id="94" name=""/>
+          <p:cNvPr id="96" name=""/>
           <p:cNvSpPr/>
           <p:nvPr/>
         </p:nvSpPr>
@@ -6939,7 +7083,7 @@
       </p:sp>
       <p:sp>
         <p:nvSpPr>
-          <p:cNvPr id="95" name=""/>
+          <p:cNvPr id="97" name=""/>
           <p:cNvSpPr/>
           <p:nvPr/>
         </p:nvSpPr>
@@ -7058,7 +7202,7 @@
       </p:sp>
       <p:sp>
         <p:nvSpPr>
-          <p:cNvPr id="96" name=""/>
+          <p:cNvPr id="98" name=""/>
           <p:cNvSpPr/>
           <p:nvPr/>
         </p:nvSpPr>
@@ -7137,7 +7281,7 @@
       </p:sp>
       <p:sp>
         <p:nvSpPr>
-          <p:cNvPr id="97" name=""/>
+          <p:cNvPr id="99" name=""/>
           <p:cNvSpPr/>
           <p:nvPr/>
         </p:nvSpPr>
@@ -7216,7 +7360,7 @@
       </p:sp>
       <p:sp>
         <p:nvSpPr>
-          <p:cNvPr id="98" name=""/>
+          <p:cNvPr id="100" name=""/>
           <p:cNvSpPr/>
           <p:nvPr/>
         </p:nvSpPr>
@@ -7295,7 +7439,7 @@
       </p:sp>
       <p:sp>
         <p:nvSpPr>
-          <p:cNvPr id="99" name=""/>
+          <p:cNvPr id="101" name=""/>
           <p:cNvSpPr/>
           <p:nvPr/>
         </p:nvSpPr>
@@ -7453,7 +7597,7 @@
       </p:sp>
       <p:sp>
         <p:nvSpPr>
-          <p:cNvPr id="100" name=""/>
+          <p:cNvPr id="102" name=""/>
           <p:cNvSpPr/>
           <p:nvPr/>
         </p:nvSpPr>
@@ -7550,7 +7694,7 @@
       </p:sp>
       <p:sp>
         <p:nvSpPr>
-          <p:cNvPr id="101" name=""/>
+          <p:cNvPr id="103" name=""/>
           <p:cNvSpPr txBox="1"/>
           <p:nvPr/>
         </p:nvSpPr>
@@ -7643,7 +7787,7 @@
       </p:grpSpPr>
       <p:sp>
         <p:nvSpPr>
-          <p:cNvPr id="102" name=""/>
+          <p:cNvPr id="104" name=""/>
           <p:cNvSpPr txBox="1"/>
           <p:nvPr/>
         </p:nvSpPr>
@@ -7686,7 +7830,7 @@
       </p:sp>
       <p:sp>
         <p:nvSpPr>
-          <p:cNvPr id="103" name=""/>
+          <p:cNvPr id="105" name=""/>
           <p:cNvSpPr txBox="1"/>
           <p:nvPr/>
         </p:nvSpPr>
@@ -7729,7 +7873,7 @@
       </p:sp>
       <p:sp>
         <p:nvSpPr>
-          <p:cNvPr id="104" name="PlaceHolder 1"/>
+          <p:cNvPr id="106" name="PlaceHolder 1"/>
           <p:cNvSpPr>
             <a:spLocks noGrp="1"/>
           </p:cNvSpPr>
@@ -7808,7 +7952,7 @@
       </p:grpSpPr>
       <p:sp>
         <p:nvSpPr>
-          <p:cNvPr id="105" name="PlaceHolder 1"/>
+          <p:cNvPr id="107" name="PlaceHolder 1"/>
           <p:cNvSpPr>
             <a:spLocks noGrp="1"/>
           </p:cNvSpPr>
@@ -7857,7 +8001,7 @@
       </p:sp>
       <p:sp>
         <p:nvSpPr>
-          <p:cNvPr id="106" name=""/>
+          <p:cNvPr id="108" name=""/>
           <p:cNvSpPr/>
           <p:nvPr/>
         </p:nvSpPr>
@@ -7898,7 +8042,7 @@
       </p:sp>
       <p:sp>
         <p:nvSpPr>
-          <p:cNvPr id="107" name=""/>
+          <p:cNvPr id="109" name=""/>
           <p:cNvSpPr/>
           <p:nvPr/>
         </p:nvSpPr>
@@ -7977,7 +8121,7 @@
       </p:sp>
       <p:sp>
         <p:nvSpPr>
-          <p:cNvPr id="108" name=""/>
+          <p:cNvPr id="110" name=""/>
           <p:cNvSpPr txBox="1"/>
           <p:nvPr/>
         </p:nvSpPr>
@@ -8020,7 +8164,7 @@
       </p:sp>
       <p:sp>
         <p:nvSpPr>
-          <p:cNvPr id="109" name=""/>
+          <p:cNvPr id="111" name=""/>
           <p:cNvSpPr/>
           <p:nvPr/>
         </p:nvSpPr>
@@ -8062,7 +8206,7 @@
       </p:sp>
       <p:sp>
         <p:nvSpPr>
-          <p:cNvPr id="110" name=""/>
+          <p:cNvPr id="112" name=""/>
           <p:cNvSpPr/>
           <p:nvPr/>
         </p:nvSpPr>
@@ -8141,7 +8285,7 @@
       </p:sp>
       <p:sp>
         <p:nvSpPr>
-          <p:cNvPr id="111" name=""/>
+          <p:cNvPr id="113" name=""/>
           <p:cNvSpPr txBox="1"/>
           <p:nvPr/>
         </p:nvSpPr>
@@ -8184,7 +8328,7 @@
       </p:sp>
       <p:sp>
         <p:nvSpPr>
-          <p:cNvPr id="112" name=""/>
+          <p:cNvPr id="114" name=""/>
           <p:cNvSpPr/>
           <p:nvPr/>
         </p:nvSpPr>
@@ -8226,7 +8370,7 @@
       </p:sp>
       <p:sp>
         <p:nvSpPr>
-          <p:cNvPr id="113" name=""/>
+          <p:cNvPr id="115" name=""/>
           <p:cNvSpPr/>
           <p:nvPr/>
         </p:nvSpPr>
@@ -8305,7 +8449,7 @@
       </p:sp>
       <p:sp>
         <p:nvSpPr>
-          <p:cNvPr id="114" name=""/>
+          <p:cNvPr id="116" name=""/>
           <p:cNvSpPr txBox="1"/>
           <p:nvPr/>
         </p:nvSpPr>
@@ -8348,7 +8492,7 @@
       </p:sp>
       <p:sp>
         <p:nvSpPr>
-          <p:cNvPr id="115" name=""/>
+          <p:cNvPr id="117" name=""/>
           <p:cNvSpPr/>
           <p:nvPr/>
         </p:nvSpPr>
@@ -8390,7 +8534,7 @@
       </p:sp>
       <p:sp>
         <p:nvSpPr>
-          <p:cNvPr id="116" name=""/>
+          <p:cNvPr id="118" name=""/>
           <p:cNvSpPr/>
           <p:nvPr/>
         </p:nvSpPr>
@@ -8469,7 +8613,7 @@
       </p:sp>
       <p:sp>
         <p:nvSpPr>
-          <p:cNvPr id="117" name=""/>
+          <p:cNvPr id="119" name=""/>
           <p:cNvSpPr txBox="1"/>
           <p:nvPr/>
         </p:nvSpPr>
@@ -8512,7 +8656,7 @@
       </p:sp>
       <p:sp>
         <p:nvSpPr>
-          <p:cNvPr id="118" name=""/>
+          <p:cNvPr id="120" name=""/>
           <p:cNvSpPr/>
           <p:nvPr/>
         </p:nvSpPr>
@@ -8556,7 +8700,7 @@
       </p:sp>
       <p:sp>
         <p:nvSpPr>
-          <p:cNvPr id="119" name=""/>
+          <p:cNvPr id="121" name=""/>
           <p:cNvSpPr/>
           <p:nvPr/>
         </p:nvSpPr>
@@ -8609,7 +8753,7 @@
       </p:sp>
       <p:grpSp>
         <p:nvGrpSpPr>
-          <p:cNvPr id="120" name=""/>
+          <p:cNvPr id="122" name=""/>
           <p:cNvGrpSpPr/>
           <p:nvPr/>
         </p:nvGrpSpPr>
@@ -8623,7 +8767,7 @@
         </p:grpSpPr>
         <p:sp>
           <p:nvSpPr>
-            <p:cNvPr id="121" name=""/>
+            <p:cNvPr id="123" name=""/>
             <p:cNvSpPr/>
             <p:nvPr/>
           </p:nvSpPr>
@@ -8683,7 +8827,7 @@
         </p:sp>
         <p:sp>
           <p:nvSpPr>
-            <p:cNvPr id="122" name=""/>
+            <p:cNvPr id="124" name=""/>
             <p:cNvSpPr/>
             <p:nvPr/>
           </p:nvSpPr>
@@ -8736,7 +8880,7 @@
       </p:grpSp>
       <p:grpSp>
         <p:nvGrpSpPr>
-          <p:cNvPr id="123" name=""/>
+          <p:cNvPr id="125" name=""/>
           <p:cNvGrpSpPr/>
           <p:nvPr/>
         </p:nvGrpSpPr>
@@ -8750,7 +8894,7 @@
         </p:grpSpPr>
         <p:sp>
           <p:nvSpPr>
-            <p:cNvPr id="124" name=""/>
+            <p:cNvPr id="126" name=""/>
             <p:cNvSpPr/>
             <p:nvPr/>
           </p:nvSpPr>
@@ -8810,7 +8954,7 @@
         </p:sp>
         <p:sp>
           <p:nvSpPr>
-            <p:cNvPr id="125" name=""/>
+            <p:cNvPr id="127" name=""/>
             <p:cNvSpPr/>
             <p:nvPr/>
           </p:nvSpPr>
@@ -8863,7 +9007,7 @@
       </p:grpSp>
       <p:grpSp>
         <p:nvGrpSpPr>
-          <p:cNvPr id="126" name=""/>
+          <p:cNvPr id="128" name=""/>
           <p:cNvGrpSpPr/>
           <p:nvPr/>
         </p:nvGrpSpPr>
@@ -8877,7 +9021,7 @@
         </p:grpSpPr>
         <p:sp>
           <p:nvSpPr>
-            <p:cNvPr id="127" name=""/>
+            <p:cNvPr id="129" name=""/>
             <p:cNvSpPr/>
             <p:nvPr/>
           </p:nvSpPr>
@@ -8937,7 +9081,7 @@
         </p:sp>
         <p:sp>
           <p:nvSpPr>
-            <p:cNvPr id="128" name=""/>
+            <p:cNvPr id="130" name=""/>
             <p:cNvSpPr/>
             <p:nvPr/>
           </p:nvSpPr>
@@ -8990,7 +9134,7 @@
       </p:grpSp>
       <p:sp>
         <p:nvSpPr>
-          <p:cNvPr id="129" name=""/>
+          <p:cNvPr id="131" name=""/>
           <p:cNvSpPr txBox="1"/>
           <p:nvPr/>
         </p:nvSpPr>
@@ -9083,7 +9227,7 @@
       </p:grpSpPr>
       <p:sp>
         <p:nvSpPr>
-          <p:cNvPr id="130" name="PlaceHolder 1"/>
+          <p:cNvPr id="132" name="PlaceHolder 1"/>
           <p:cNvSpPr>
             <a:spLocks noGrp="1"/>
           </p:cNvSpPr>
@@ -9132,7 +9276,7 @@
       </p:sp>
       <p:sp>
         <p:nvSpPr>
-          <p:cNvPr id="131" name=""/>
+          <p:cNvPr id="133" name=""/>
           <p:cNvSpPr/>
           <p:nvPr/>
         </p:nvSpPr>
@@ -9173,7 +9317,7 @@
       </p:sp>
       <p:graphicFrame>
         <p:nvGraphicFramePr>
-          <p:cNvPr id="132" name=""/>
+          <p:cNvPr id="134" name=""/>
           <p:cNvGraphicFramePr/>
           <p:nvPr/>
         </p:nvGraphicFramePr>
@@ -9963,7 +10107,7 @@
       </p:graphicFrame>
       <p:sp>
         <p:nvSpPr>
-          <p:cNvPr id="133" name=""/>
+          <p:cNvPr id="135" name=""/>
           <p:cNvSpPr txBox="1"/>
           <p:nvPr/>
         </p:nvSpPr>
